--- a/Week_3/Incident_Problem_Management.pptx
+++ b/Week_3/Incident_Problem_Management.pptx
@@ -19,14 +19,15 @@
     <p:sldId id="281" r:id="rId13"/>
     <p:sldId id="282" r:id="rId14"/>
     <p:sldId id="283" r:id="rId15"/>
-    <p:sldId id="285" r:id="rId16"/>
-    <p:sldId id="286" r:id="rId17"/>
-    <p:sldId id="287" r:id="rId18"/>
-    <p:sldId id="289" r:id="rId19"/>
-    <p:sldId id="291" r:id="rId20"/>
-    <p:sldId id="288" r:id="rId21"/>
-    <p:sldId id="290" r:id="rId22"/>
-    <p:sldId id="292" r:id="rId23"/>
+    <p:sldId id="293" r:id="rId16"/>
+    <p:sldId id="285" r:id="rId17"/>
+    <p:sldId id="286" r:id="rId18"/>
+    <p:sldId id="287" r:id="rId19"/>
+    <p:sldId id="289" r:id="rId20"/>
+    <p:sldId id="291" r:id="rId21"/>
+    <p:sldId id="288" r:id="rId22"/>
+    <p:sldId id="290" r:id="rId23"/>
+    <p:sldId id="292" r:id="rId24"/>
   </p:sldIdLst>
   <p:sldSz cx="12192000" cy="6858000"/>
   <p:notesSz cx="6858000" cy="9144000"/>
@@ -393,7 +394,7 @@
             <a:fld id="{B61BEF0D-F0BB-DE4B-95CE-6DB70DBA9567}" type="datetimeFigureOut">
               <a:rPr lang="en-US" dirty="0"/>
               <a:pPr/>
-              <a:t>10/8/2025</a:t>
+              <a:t>10/9/2025</a:t>
             </a:fld>
             <a:endParaRPr lang="en-US" dirty="0"/>
           </a:p>
@@ -655,7 +656,7 @@
             <a:fld id="{B61BEF0D-F0BB-DE4B-95CE-6DB70DBA9567}" type="datetimeFigureOut">
               <a:rPr lang="en-US" dirty="0"/>
               <a:pPr/>
-              <a:t>10/8/2025</a:t>
+              <a:t>10/9/2025</a:t>
             </a:fld>
             <a:endParaRPr lang="en-US" dirty="0"/>
           </a:p>
@@ -890,7 +891,7 @@
             <a:fld id="{B61BEF0D-F0BB-DE4B-95CE-6DB70DBA9567}" type="datetimeFigureOut">
               <a:rPr lang="en-US" dirty="0"/>
               <a:pPr/>
-              <a:t>10/8/2025</a:t>
+              <a:t>10/9/2025</a:t>
             </a:fld>
             <a:endParaRPr lang="en-US" dirty="0"/>
           </a:p>
@@ -1130,7 +1131,7 @@
             <a:fld id="{B61BEF0D-F0BB-DE4B-95CE-6DB70DBA9567}" type="datetimeFigureOut">
               <a:rPr lang="en-US" dirty="0"/>
               <a:pPr/>
-              <a:t>10/8/2025</a:t>
+              <a:t>10/9/2025</a:t>
             </a:fld>
             <a:endParaRPr lang="en-US" dirty="0"/>
           </a:p>
@@ -1438,7 +1439,7 @@
             <a:fld id="{B61BEF0D-F0BB-DE4B-95CE-6DB70DBA9567}" type="datetimeFigureOut">
               <a:rPr lang="en-US" dirty="0"/>
               <a:pPr/>
-              <a:t>10/8/2025</a:t>
+              <a:t>10/9/2025</a:t>
             </a:fld>
             <a:endParaRPr lang="en-US" dirty="0"/>
           </a:p>
@@ -1739,7 +1740,7 @@
             <a:fld id="{B61BEF0D-F0BB-DE4B-95CE-6DB70DBA9567}" type="datetimeFigureOut">
               <a:rPr lang="en-US" dirty="0"/>
               <a:pPr/>
-              <a:t>10/8/2025</a:t>
+              <a:t>10/9/2025</a:t>
             </a:fld>
             <a:endParaRPr lang="en-US" dirty="0"/>
           </a:p>
@@ -2160,7 +2161,7 @@
             <a:fld id="{B61BEF0D-F0BB-DE4B-95CE-6DB70DBA9567}" type="datetimeFigureOut">
               <a:rPr lang="en-US" dirty="0"/>
               <a:pPr/>
-              <a:t>10/8/2025</a:t>
+              <a:t>10/9/2025</a:t>
             </a:fld>
             <a:endParaRPr lang="en-US" dirty="0"/>
           </a:p>
@@ -2323,7 +2324,7 @@
             <a:fld id="{B61BEF0D-F0BB-DE4B-95CE-6DB70DBA9567}" type="datetimeFigureOut">
               <a:rPr lang="en-US" dirty="0"/>
               <a:pPr/>
-              <a:t>10/8/2025</a:t>
+              <a:t>10/9/2025</a:t>
             </a:fld>
             <a:endParaRPr lang="en-US" dirty="0"/>
           </a:p>
@@ -2420,7 +2421,7 @@
             <a:fld id="{B61BEF0D-F0BB-DE4B-95CE-6DB70DBA9567}" type="datetimeFigureOut">
               <a:rPr lang="en-US" dirty="0"/>
               <a:pPr/>
-              <a:t>10/8/2025</a:t>
+              <a:t>10/9/2025</a:t>
             </a:fld>
             <a:endParaRPr lang="en-US" dirty="0"/>
           </a:p>
@@ -2798,7 +2799,7 @@
             <a:fld id="{B61BEF0D-F0BB-DE4B-95CE-6DB70DBA9567}" type="datetimeFigureOut">
               <a:rPr lang="en-US" dirty="0"/>
               <a:pPr/>
-              <a:t>10/8/2025</a:t>
+              <a:t>10/9/2025</a:t>
             </a:fld>
             <a:endParaRPr lang="en-US" dirty="0"/>
           </a:p>
@@ -3084,7 +3085,7 @@
             <a:fld id="{B61BEF0D-F0BB-DE4B-95CE-6DB70DBA9567}" type="datetimeFigureOut">
               <a:rPr lang="en-US" dirty="0"/>
               <a:pPr/>
-              <a:t>10/8/2025</a:t>
+              <a:t>10/9/2025</a:t>
             </a:fld>
             <a:endParaRPr lang="en-US" dirty="0"/>
           </a:p>
@@ -3323,7 +3324,7 @@
             <a:fld id="{B61BEF0D-F0BB-DE4B-95CE-6DB70DBA9567}" type="datetimeFigureOut">
               <a:rPr lang="en-US" dirty="0"/>
               <a:pPr/>
-              <a:t>10/8/2025</a:t>
+              <a:t>10/9/2025</a:t>
             </a:fld>
             <a:endParaRPr lang="en-US" dirty="0"/>
           </a:p>
@@ -4838,7 +4839,7 @@
           <p:cNvPr id="2" name="Title 1">
             <a:extLst>
               <a:ext uri="{FF2B5EF4-FFF2-40B4-BE49-F238E27FC236}">
-                <a16:creationId xmlns:a16="http://schemas.microsoft.com/office/drawing/2014/main" id="{23FFC745-70F1-2EEF-8C2F-71D334B9DF8B}"/>
+                <a16:creationId xmlns:a16="http://schemas.microsoft.com/office/drawing/2014/main" id="{5EB90051-E65F-E0C9-488E-F59B15C2258C}"/>
               </a:ext>
             </a:extLst>
           </p:cNvPr>
@@ -4856,7 +4857,7 @@
           <a:p>
             <a:r>
               <a:rPr lang="en-US" dirty="0"/>
-              <a:t>Key Problem Management Features</a:t>
+              <a:t>Reactive vs Proactive</a:t>
             </a:r>
           </a:p>
         </p:txBody>
@@ -4866,7 +4867,7 @@
           <p:cNvPr id="3" name="Content Placeholder 2">
             <a:extLst>
               <a:ext uri="{FF2B5EF4-FFF2-40B4-BE49-F238E27FC236}">
-                <a16:creationId xmlns:a16="http://schemas.microsoft.com/office/drawing/2014/main" id="{18C168EC-9684-3E21-8BEA-2CCD41D4C786}"/>
+                <a16:creationId xmlns:a16="http://schemas.microsoft.com/office/drawing/2014/main" id="{47743F3E-73A2-0AA6-ACBF-98C8BAF173CC}"/>
               </a:ext>
             </a:extLst>
           </p:cNvPr>
@@ -4883,94 +4884,64 @@
           <a:lstStyle/>
           <a:p>
             <a:r>
+              <a:rPr lang="en-US" dirty="0"/>
+              <a:t>Definition: </a:t>
+            </a:r>
+            <a:r>
               <a:rPr lang="en-US" dirty="0">
                 <a:solidFill>
                   <a:schemeClr val="accent2"/>
                 </a:solidFill>
               </a:rPr>
-              <a:t>The Problem record </a:t>
-            </a:r>
-            <a:r>
-              <a:rPr lang="en-US" dirty="0"/>
-              <a:t>– link related incidents; log problem details; handle resolution/closure</a:t>
-            </a:r>
-          </a:p>
-          <a:p>
+              <a:t>Reactive Problem Management </a:t>
+            </a:r>
+            <a:r>
+              <a:rPr lang="en-US" dirty="0"/>
+              <a:t>is triggered after an incident has occurred, and its goal is to identify and remove the root cause</a:t>
+            </a:r>
+          </a:p>
+          <a:p>
+            <a:pPr lvl="1"/>
+            <a:r>
+              <a:rPr lang="en-US" dirty="0"/>
+              <a:t>Problem records created from existing incidents</a:t>
+            </a:r>
+          </a:p>
+          <a:p>
+            <a:r>
+              <a:rPr lang="en-US" dirty="0"/>
+              <a:t>Definition: </a:t>
+            </a:r>
             <a:r>
               <a:rPr lang="en-US" dirty="0">
                 <a:solidFill>
                   <a:schemeClr val="accent2"/>
                 </a:solidFill>
               </a:rPr>
-              <a:t>Assignment Rules </a:t>
-            </a:r>
-            <a:r>
-              <a:rPr lang="en-US" dirty="0"/>
-              <a:t>– automatically routes problems to the correct support group or individual</a:t>
-            </a:r>
-          </a:p>
-          <a:p>
-            <a:r>
-              <a:rPr lang="en-US" dirty="0">
-                <a:solidFill>
-                  <a:schemeClr val="accent2"/>
-                </a:solidFill>
-              </a:rPr>
-              <a:t>Priority Matrix </a:t>
-            </a:r>
-            <a:r>
-              <a:rPr lang="en-US" dirty="0"/>
-              <a:t>– priority = impact + urgency</a:t>
-            </a:r>
-          </a:p>
-          <a:p>
-            <a:r>
-              <a:rPr lang="en-US" dirty="0">
-                <a:solidFill>
-                  <a:schemeClr val="accent2"/>
-                </a:solidFill>
-              </a:rPr>
-              <a:t>Work Notes &amp; Comments </a:t>
-            </a:r>
-            <a:r>
-              <a:rPr lang="en-US" dirty="0"/>
-              <a:t>– facilitate collaboration between support teams and communicate with the user</a:t>
-            </a:r>
-          </a:p>
-          <a:p>
-            <a:r>
-              <a:rPr lang="en-US" dirty="0">
-                <a:solidFill>
-                  <a:schemeClr val="accent2"/>
-                </a:solidFill>
-              </a:rPr>
-              <a:t>Communicate Workarounds </a:t>
-            </a:r>
-            <a:r>
-              <a:rPr lang="en-US" dirty="0"/>
-              <a:t>– tell related incident owners about the fix</a:t>
-            </a:r>
-          </a:p>
-          <a:p>
-            <a:r>
-              <a:rPr lang="en-US" dirty="0">
-                <a:solidFill>
-                  <a:schemeClr val="accent2"/>
-                </a:solidFill>
-              </a:rPr>
-              <a:t>Known Errors </a:t>
-            </a:r>
-            <a:r>
-              <a:rPr lang="en-US" dirty="0"/>
-              <a:t>– Identify root causes and find solutions; create knowledge base articles</a:t>
-            </a:r>
+              <a:t>Proactive Problem Management </a:t>
+            </a:r>
+            <a:r>
+              <a:rPr lang="en-US" dirty="0"/>
+              <a:t>aims to identify and prevent problems before they cause incidents</a:t>
+            </a:r>
+          </a:p>
+          <a:p>
+            <a:pPr lvl="1"/>
+            <a:r>
+              <a:rPr lang="en-US" dirty="0"/>
+              <a:t>Use trend analysis, monitoring data, and continuous improvement to detect issues early </a:t>
+            </a:r>
+          </a:p>
+          <a:p>
+            <a:pPr lvl="1"/>
+            <a:endParaRPr lang="en-US" dirty="0"/>
           </a:p>
         </p:txBody>
       </p:sp>
     </p:spTree>
     <p:extLst>
       <p:ext uri="{BB962C8B-B14F-4D97-AF65-F5344CB8AC3E}">
-        <p14:creationId xmlns:p14="http://schemas.microsoft.com/office/powerpoint/2010/main" val="3301352783"/>
+        <p14:creationId xmlns:p14="http://schemas.microsoft.com/office/powerpoint/2010/main" val="1472518551"/>
       </p:ext>
     </p:extLst>
   </p:cSld>
@@ -5002,6 +4973,170 @@
           <p:cNvPr id="2" name="Title 1">
             <a:extLst>
               <a:ext uri="{FF2B5EF4-FFF2-40B4-BE49-F238E27FC236}">
+                <a16:creationId xmlns:a16="http://schemas.microsoft.com/office/drawing/2014/main" id="{23FFC745-70F1-2EEF-8C2F-71D334B9DF8B}"/>
+              </a:ext>
+            </a:extLst>
+          </p:cNvPr>
+          <p:cNvSpPr>
+            <a:spLocks noGrp="1"/>
+          </p:cNvSpPr>
+          <p:nvPr>
+            <p:ph type="title"/>
+          </p:nvPr>
+        </p:nvSpPr>
+        <p:spPr/>
+        <p:txBody>
+          <a:bodyPr/>
+          <a:lstStyle/>
+          <a:p>
+            <a:r>
+              <a:rPr lang="en-US" dirty="0"/>
+              <a:t>Key Problem Management Features</a:t>
+            </a:r>
+          </a:p>
+        </p:txBody>
+      </p:sp>
+      <p:sp>
+        <p:nvSpPr>
+          <p:cNvPr id="3" name="Content Placeholder 2">
+            <a:extLst>
+              <a:ext uri="{FF2B5EF4-FFF2-40B4-BE49-F238E27FC236}">
+                <a16:creationId xmlns:a16="http://schemas.microsoft.com/office/drawing/2014/main" id="{18C168EC-9684-3E21-8BEA-2CCD41D4C786}"/>
+              </a:ext>
+            </a:extLst>
+          </p:cNvPr>
+          <p:cNvSpPr>
+            <a:spLocks noGrp="1"/>
+          </p:cNvSpPr>
+          <p:nvPr>
+            <p:ph idx="1"/>
+          </p:nvPr>
+        </p:nvSpPr>
+        <p:spPr/>
+        <p:txBody>
+          <a:bodyPr/>
+          <a:lstStyle/>
+          <a:p>
+            <a:r>
+              <a:rPr lang="en-US" dirty="0">
+                <a:solidFill>
+                  <a:schemeClr val="accent2"/>
+                </a:solidFill>
+              </a:rPr>
+              <a:t>The Problem record </a:t>
+            </a:r>
+            <a:r>
+              <a:rPr lang="en-US" dirty="0"/>
+              <a:t>– link related incidents; log problem details; handle resolution/closure</a:t>
+            </a:r>
+          </a:p>
+          <a:p>
+            <a:r>
+              <a:rPr lang="en-US" dirty="0">
+                <a:solidFill>
+                  <a:schemeClr val="accent2"/>
+                </a:solidFill>
+              </a:rPr>
+              <a:t>Assignment Rules </a:t>
+            </a:r>
+            <a:r>
+              <a:rPr lang="en-US" dirty="0"/>
+              <a:t>– automatically routes problems to the correct support group or individual</a:t>
+            </a:r>
+          </a:p>
+          <a:p>
+            <a:r>
+              <a:rPr lang="en-US" dirty="0">
+                <a:solidFill>
+                  <a:schemeClr val="accent2"/>
+                </a:solidFill>
+              </a:rPr>
+              <a:t>Priority Matrix </a:t>
+            </a:r>
+            <a:r>
+              <a:rPr lang="en-US" dirty="0"/>
+              <a:t>– priority = impact + urgency</a:t>
+            </a:r>
+          </a:p>
+          <a:p>
+            <a:r>
+              <a:rPr lang="en-US" dirty="0">
+                <a:solidFill>
+                  <a:schemeClr val="accent2"/>
+                </a:solidFill>
+              </a:rPr>
+              <a:t>Work Notes &amp; Comments </a:t>
+            </a:r>
+            <a:r>
+              <a:rPr lang="en-US" dirty="0"/>
+              <a:t>– facilitate collaboration between support teams and communicate with the user</a:t>
+            </a:r>
+          </a:p>
+          <a:p>
+            <a:r>
+              <a:rPr lang="en-US" dirty="0">
+                <a:solidFill>
+                  <a:schemeClr val="accent2"/>
+                </a:solidFill>
+              </a:rPr>
+              <a:t>Communicate Workarounds </a:t>
+            </a:r>
+            <a:r>
+              <a:rPr lang="en-US" dirty="0"/>
+              <a:t>– tell related incident owners about the fix</a:t>
+            </a:r>
+          </a:p>
+          <a:p>
+            <a:r>
+              <a:rPr lang="en-US" dirty="0">
+                <a:solidFill>
+                  <a:schemeClr val="accent2"/>
+                </a:solidFill>
+              </a:rPr>
+              <a:t>Known Errors </a:t>
+            </a:r>
+            <a:r>
+              <a:rPr lang="en-US" dirty="0"/>
+              <a:t>– Identify root causes and find solutions; create knowledge base articles</a:t>
+            </a:r>
+          </a:p>
+        </p:txBody>
+      </p:sp>
+    </p:spTree>
+    <p:extLst>
+      <p:ext uri="{BB962C8B-B14F-4D97-AF65-F5344CB8AC3E}">
+        <p14:creationId xmlns:p14="http://schemas.microsoft.com/office/powerpoint/2010/main" val="3301352783"/>
+      </p:ext>
+    </p:extLst>
+  </p:cSld>
+  <p:clrMapOvr>
+    <a:masterClrMapping/>
+  </p:clrMapOvr>
+</p:sld>
+</file>
+
+<file path=ppt/slides/slide17.xml><?xml version="1.0" encoding="utf-8"?>
+<p:sld xmlns:a="http://schemas.openxmlformats.org/drawingml/2006/main" xmlns:r="http://schemas.openxmlformats.org/officeDocument/2006/relationships" xmlns:p="http://schemas.openxmlformats.org/presentationml/2006/main">
+  <p:cSld>
+    <p:spTree>
+      <p:nvGrpSpPr>
+        <p:cNvPr id="1" name=""/>
+        <p:cNvGrpSpPr/>
+        <p:nvPr/>
+      </p:nvGrpSpPr>
+      <p:grpSpPr>
+        <a:xfrm>
+          <a:off x="0" y="0"/>
+          <a:ext cx="0" cy="0"/>
+          <a:chOff x="0" y="0"/>
+          <a:chExt cx="0" cy="0"/>
+        </a:xfrm>
+      </p:grpSpPr>
+      <p:sp>
+        <p:nvSpPr>
+          <p:cNvPr id="2" name="Title 1">
+            <a:extLst>
+              <a:ext uri="{FF2B5EF4-FFF2-40B4-BE49-F238E27FC236}">
                 <a16:creationId xmlns:a16="http://schemas.microsoft.com/office/drawing/2014/main" id="{76590990-6B86-C8A4-7A44-555AE00DD931}"/>
               </a:ext>
             </a:extLst>
@@ -5174,7 +5309,7 @@
 </p:sld>
 </file>
 
-<file path=ppt/slides/slide17.xml><?xml version="1.0" encoding="utf-8"?>
+<file path=ppt/slides/slide18.xml><?xml version="1.0" encoding="utf-8"?>
 <p:sld xmlns:a="http://schemas.openxmlformats.org/drawingml/2006/main" xmlns:r="http://schemas.openxmlformats.org/officeDocument/2006/relationships" xmlns:p="http://schemas.openxmlformats.org/presentationml/2006/main">
   <p:cSld>
     <p:spTree>
@@ -5262,7 +5397,7 @@
 </p:sld>
 </file>
 
-<file path=ppt/slides/slide18.xml><?xml version="1.0" encoding="utf-8"?>
+<file path=ppt/slides/slide19.xml><?xml version="1.0" encoding="utf-8"?>
 <p:sld xmlns:a="http://schemas.openxmlformats.org/drawingml/2006/main" xmlns:r="http://schemas.openxmlformats.org/officeDocument/2006/relationships" xmlns:p="http://schemas.openxmlformats.org/presentationml/2006/main">
   <p:cSld>
     <p:spTree>
@@ -5480,7 +5615,140 @@
 </p:sld>
 </file>
 
-<file path=ppt/slides/slide19.xml><?xml version="1.0" encoding="utf-8"?>
+<file path=ppt/slides/slide2.xml><?xml version="1.0" encoding="utf-8"?>
+<p:sld xmlns:a="http://schemas.openxmlformats.org/drawingml/2006/main" xmlns:r="http://schemas.openxmlformats.org/officeDocument/2006/relationships" xmlns:p="http://schemas.openxmlformats.org/presentationml/2006/main">
+  <p:cSld>
+    <p:spTree>
+      <p:nvGrpSpPr>
+        <p:cNvPr id="1" name=""/>
+        <p:cNvGrpSpPr/>
+        <p:nvPr/>
+      </p:nvGrpSpPr>
+      <p:grpSpPr>
+        <a:xfrm>
+          <a:off x="0" y="0"/>
+          <a:ext cx="0" cy="0"/>
+          <a:chOff x="0" y="0"/>
+          <a:chExt cx="0" cy="0"/>
+        </a:xfrm>
+      </p:grpSpPr>
+      <p:sp>
+        <p:nvSpPr>
+          <p:cNvPr id="2" name="Title 1">
+            <a:extLst>
+              <a:ext uri="{FF2B5EF4-FFF2-40B4-BE49-F238E27FC236}">
+                <a16:creationId xmlns:a16="http://schemas.microsoft.com/office/drawing/2014/main" id="{47395674-13A9-9205-28DD-508DE993CD69}"/>
+              </a:ext>
+            </a:extLst>
+          </p:cNvPr>
+          <p:cNvSpPr>
+            <a:spLocks noGrp="1"/>
+          </p:cNvSpPr>
+          <p:nvPr>
+            <p:ph type="title"/>
+          </p:nvPr>
+        </p:nvSpPr>
+        <p:spPr/>
+        <p:txBody>
+          <a:bodyPr/>
+          <a:lstStyle/>
+          <a:p>
+            <a:r>
+              <a:rPr lang="en-US" dirty="0"/>
+              <a:t>What is Incident Management?</a:t>
+            </a:r>
+          </a:p>
+        </p:txBody>
+      </p:sp>
+      <p:sp>
+        <p:nvSpPr>
+          <p:cNvPr id="3" name="Content Placeholder 2">
+            <a:extLst>
+              <a:ext uri="{FF2B5EF4-FFF2-40B4-BE49-F238E27FC236}">
+                <a16:creationId xmlns:a16="http://schemas.microsoft.com/office/drawing/2014/main" id="{4C7E3DD8-E45A-6112-A399-C81789AA6D17}"/>
+              </a:ext>
+            </a:extLst>
+          </p:cNvPr>
+          <p:cNvSpPr>
+            <a:spLocks noGrp="1"/>
+          </p:cNvSpPr>
+          <p:nvPr>
+            <p:ph idx="1"/>
+          </p:nvPr>
+        </p:nvSpPr>
+        <p:spPr>
+          <a:xfrm>
+            <a:off x="581191" y="2428849"/>
+            <a:ext cx="11029615" cy="3419057"/>
+          </a:xfrm>
+        </p:spPr>
+        <p:txBody>
+          <a:bodyPr>
+            <a:normAutofit/>
+          </a:bodyPr>
+          <a:lstStyle/>
+          <a:p>
+            <a:r>
+              <a:rPr lang="en-US" dirty="0"/>
+              <a:t>Definition: </a:t>
+            </a:r>
+            <a:r>
+              <a:rPr lang="en-US" dirty="0">
+                <a:solidFill>
+                  <a:schemeClr val="accent2"/>
+                </a:solidFill>
+              </a:rPr>
+              <a:t>Incident Management </a:t>
+            </a:r>
+            <a:r>
+              <a:rPr lang="en-US" dirty="0"/>
+              <a:t>in ServiceNow is the process and supporting application used to restore normal service operation as quickly as possible after an unplanned interruption or reduction in quality of IT service — minimizing the impact on business operations.</a:t>
+            </a:r>
+          </a:p>
+          <a:p>
+            <a:pPr lvl="1"/>
+            <a:r>
+              <a:rPr lang="en-US" dirty="0"/>
+              <a:t>Make sure service disruptions are resolved quickly</a:t>
+            </a:r>
+          </a:p>
+          <a:p>
+            <a:pPr lvl="1"/>
+            <a:r>
+              <a:rPr lang="en-US" dirty="0"/>
+              <a:t>Work is assigned automatically to the right teams</a:t>
+            </a:r>
+          </a:p>
+          <a:p>
+            <a:pPr lvl="1"/>
+            <a:r>
+              <a:rPr lang="en-US" dirty="0"/>
+              <a:t>Customers and support staff can track progress transparently</a:t>
+            </a:r>
+          </a:p>
+          <a:p>
+            <a:pPr lvl="1"/>
+            <a:r>
+              <a:rPr lang="en-US" dirty="0"/>
+              <a:t>Finding a cause is not the concern of incidents, restoring service quickly is</a:t>
+            </a:r>
+          </a:p>
+        </p:txBody>
+      </p:sp>
+    </p:spTree>
+    <p:extLst>
+      <p:ext uri="{BB962C8B-B14F-4D97-AF65-F5344CB8AC3E}">
+        <p14:creationId xmlns:p14="http://schemas.microsoft.com/office/powerpoint/2010/main" val="2296974838"/>
+      </p:ext>
+    </p:extLst>
+  </p:cSld>
+  <p:clrMapOvr>
+    <a:masterClrMapping/>
+  </p:clrMapOvr>
+</p:sld>
+</file>
+
+<file path=ppt/slides/slide20.xml><?xml version="1.0" encoding="utf-8"?>
 <p:sld xmlns:a="http://schemas.openxmlformats.org/drawingml/2006/main" xmlns:r="http://schemas.openxmlformats.org/officeDocument/2006/relationships" xmlns:p="http://schemas.openxmlformats.org/presentationml/2006/main">
   <p:cSld>
     <p:spTree>
@@ -5718,140 +5986,7 @@
 </p:sld>
 </file>
 
-<file path=ppt/slides/slide2.xml><?xml version="1.0" encoding="utf-8"?>
-<p:sld xmlns:a="http://schemas.openxmlformats.org/drawingml/2006/main" xmlns:r="http://schemas.openxmlformats.org/officeDocument/2006/relationships" xmlns:p="http://schemas.openxmlformats.org/presentationml/2006/main">
-  <p:cSld>
-    <p:spTree>
-      <p:nvGrpSpPr>
-        <p:cNvPr id="1" name=""/>
-        <p:cNvGrpSpPr/>
-        <p:nvPr/>
-      </p:nvGrpSpPr>
-      <p:grpSpPr>
-        <a:xfrm>
-          <a:off x="0" y="0"/>
-          <a:ext cx="0" cy="0"/>
-          <a:chOff x="0" y="0"/>
-          <a:chExt cx="0" cy="0"/>
-        </a:xfrm>
-      </p:grpSpPr>
-      <p:sp>
-        <p:nvSpPr>
-          <p:cNvPr id="2" name="Title 1">
-            <a:extLst>
-              <a:ext uri="{FF2B5EF4-FFF2-40B4-BE49-F238E27FC236}">
-                <a16:creationId xmlns:a16="http://schemas.microsoft.com/office/drawing/2014/main" id="{47395674-13A9-9205-28DD-508DE993CD69}"/>
-              </a:ext>
-            </a:extLst>
-          </p:cNvPr>
-          <p:cNvSpPr>
-            <a:spLocks noGrp="1"/>
-          </p:cNvSpPr>
-          <p:nvPr>
-            <p:ph type="title"/>
-          </p:nvPr>
-        </p:nvSpPr>
-        <p:spPr/>
-        <p:txBody>
-          <a:bodyPr/>
-          <a:lstStyle/>
-          <a:p>
-            <a:r>
-              <a:rPr lang="en-US" dirty="0"/>
-              <a:t>What is Incident Management?</a:t>
-            </a:r>
-          </a:p>
-        </p:txBody>
-      </p:sp>
-      <p:sp>
-        <p:nvSpPr>
-          <p:cNvPr id="3" name="Content Placeholder 2">
-            <a:extLst>
-              <a:ext uri="{FF2B5EF4-FFF2-40B4-BE49-F238E27FC236}">
-                <a16:creationId xmlns:a16="http://schemas.microsoft.com/office/drawing/2014/main" id="{4C7E3DD8-E45A-6112-A399-C81789AA6D17}"/>
-              </a:ext>
-            </a:extLst>
-          </p:cNvPr>
-          <p:cNvSpPr>
-            <a:spLocks noGrp="1"/>
-          </p:cNvSpPr>
-          <p:nvPr>
-            <p:ph idx="1"/>
-          </p:nvPr>
-        </p:nvSpPr>
-        <p:spPr>
-          <a:xfrm>
-            <a:off x="581191" y="2428849"/>
-            <a:ext cx="11029615" cy="3419057"/>
-          </a:xfrm>
-        </p:spPr>
-        <p:txBody>
-          <a:bodyPr>
-            <a:normAutofit/>
-          </a:bodyPr>
-          <a:lstStyle/>
-          <a:p>
-            <a:r>
-              <a:rPr lang="en-US" dirty="0"/>
-              <a:t>Definition: </a:t>
-            </a:r>
-            <a:r>
-              <a:rPr lang="en-US" dirty="0">
-                <a:solidFill>
-                  <a:schemeClr val="accent2"/>
-                </a:solidFill>
-              </a:rPr>
-              <a:t>Incident Management </a:t>
-            </a:r>
-            <a:r>
-              <a:rPr lang="en-US" dirty="0"/>
-              <a:t>in ServiceNow is the process and supporting application used to restore normal service operation as quickly as possible after an unplanned interruption or reduction in quality of IT service — minimizing the impact on business operations.</a:t>
-            </a:r>
-          </a:p>
-          <a:p>
-            <a:pPr lvl="1"/>
-            <a:r>
-              <a:rPr lang="en-US" dirty="0"/>
-              <a:t>Make sure service disruptions are resolved quickly</a:t>
-            </a:r>
-          </a:p>
-          <a:p>
-            <a:pPr lvl="1"/>
-            <a:r>
-              <a:rPr lang="en-US" dirty="0"/>
-              <a:t>Work is assigned automatically to the right teams</a:t>
-            </a:r>
-          </a:p>
-          <a:p>
-            <a:pPr lvl="1"/>
-            <a:r>
-              <a:rPr lang="en-US" dirty="0"/>
-              <a:t>Customers and support staff can track progress transparently</a:t>
-            </a:r>
-          </a:p>
-          <a:p>
-            <a:pPr lvl="1"/>
-            <a:r>
-              <a:rPr lang="en-US" dirty="0"/>
-              <a:t>Finding a cause is not the concern of incidents, restoring service quickly is</a:t>
-            </a:r>
-          </a:p>
-        </p:txBody>
-      </p:sp>
-    </p:spTree>
-    <p:extLst>
-      <p:ext uri="{BB962C8B-B14F-4D97-AF65-F5344CB8AC3E}">
-        <p14:creationId xmlns:p14="http://schemas.microsoft.com/office/powerpoint/2010/main" val="2296974838"/>
-      </p:ext>
-    </p:extLst>
-  </p:cSld>
-  <p:clrMapOvr>
-    <a:masterClrMapping/>
-  </p:clrMapOvr>
-</p:sld>
-</file>
-
-<file path=ppt/slides/slide20.xml><?xml version="1.0" encoding="utf-8"?>
+<file path=ppt/slides/slide21.xml><?xml version="1.0" encoding="utf-8"?>
 <p:sld xmlns:a="http://schemas.openxmlformats.org/drawingml/2006/main" xmlns:r="http://schemas.openxmlformats.org/officeDocument/2006/relationships" xmlns:p="http://schemas.openxmlformats.org/presentationml/2006/main">
   <p:cSld>
     <p:spTree>
@@ -6050,7 +6185,7 @@
 </p:sld>
 </file>
 
-<file path=ppt/slides/slide21.xml><?xml version="1.0" encoding="utf-8"?>
+<file path=ppt/slides/slide22.xml><?xml version="1.0" encoding="utf-8"?>
 <p:sld xmlns:a="http://schemas.openxmlformats.org/drawingml/2006/main" xmlns:r="http://schemas.openxmlformats.org/officeDocument/2006/relationships" xmlns:p="http://schemas.openxmlformats.org/presentationml/2006/main">
   <p:cSld>
     <p:spTree>
@@ -6213,7 +6348,7 @@
 </p:sld>
 </file>
 
-<file path=ppt/slides/slide22.xml><?xml version="1.0" encoding="utf-8"?>
+<file path=ppt/slides/slide23.xml><?xml version="1.0" encoding="utf-8"?>
 <p:sld xmlns:a="http://schemas.openxmlformats.org/drawingml/2006/main" xmlns:r="http://schemas.openxmlformats.org/officeDocument/2006/relationships" xmlns:p="http://schemas.openxmlformats.org/presentationml/2006/main">
   <p:cSld>
     <p:spTree>

--- a/Week_3/Incident_Problem_Management.pptx
+++ b/Week_3/Incident_Problem_Management.pptx
@@ -19,15 +19,37 @@
     <p:sldId id="281" r:id="rId13"/>
     <p:sldId id="282" r:id="rId14"/>
     <p:sldId id="283" r:id="rId15"/>
-    <p:sldId id="293" r:id="rId16"/>
-    <p:sldId id="285" r:id="rId17"/>
-    <p:sldId id="286" r:id="rId18"/>
-    <p:sldId id="287" r:id="rId19"/>
-    <p:sldId id="289" r:id="rId20"/>
-    <p:sldId id="291" r:id="rId21"/>
-    <p:sldId id="288" r:id="rId22"/>
-    <p:sldId id="290" r:id="rId23"/>
-    <p:sldId id="292" r:id="rId24"/>
+    <p:sldId id="294" r:id="rId16"/>
+    <p:sldId id="293" r:id="rId17"/>
+    <p:sldId id="285" r:id="rId18"/>
+    <p:sldId id="286" r:id="rId19"/>
+    <p:sldId id="287" r:id="rId20"/>
+    <p:sldId id="289" r:id="rId21"/>
+    <p:sldId id="291" r:id="rId22"/>
+    <p:sldId id="288" r:id="rId23"/>
+    <p:sldId id="290" r:id="rId24"/>
+    <p:sldId id="292" r:id="rId25"/>
+    <p:sldId id="295" r:id="rId26"/>
+    <p:sldId id="296" r:id="rId27"/>
+    <p:sldId id="297" r:id="rId28"/>
+    <p:sldId id="299" r:id="rId29"/>
+    <p:sldId id="298" r:id="rId30"/>
+    <p:sldId id="307" r:id="rId31"/>
+    <p:sldId id="300" r:id="rId32"/>
+    <p:sldId id="305" r:id="rId33"/>
+    <p:sldId id="301" r:id="rId34"/>
+    <p:sldId id="303" r:id="rId35"/>
+    <p:sldId id="304" r:id="rId36"/>
+    <p:sldId id="306" r:id="rId37"/>
+    <p:sldId id="315" r:id="rId38"/>
+    <p:sldId id="316" r:id="rId39"/>
+    <p:sldId id="308" r:id="rId40"/>
+    <p:sldId id="309" r:id="rId41"/>
+    <p:sldId id="310" r:id="rId42"/>
+    <p:sldId id="314" r:id="rId43"/>
+    <p:sldId id="311" r:id="rId44"/>
+    <p:sldId id="312" r:id="rId45"/>
+    <p:sldId id="313" r:id="rId46"/>
   </p:sldIdLst>
   <p:sldSz cx="12192000" cy="6858000"/>
   <p:notesSz cx="6858000" cy="9144000"/>
@@ -4785,7 +4807,7 @@
             </a:r>
             <a:r>
               <a:rPr lang="en-US" dirty="0"/>
-              <a:t>is the ITIL practice focused on identifying the root cause of incidents and preventing recurring issues</a:t>
+              <a:t>is the ITIL practice focused on reducing the likelihood and impact of incidents by finding and addressing their underling causes, and by managing workarounds and known errors. </a:t>
             </a:r>
           </a:p>
           <a:p>
@@ -4839,7 +4861,7 @@
           <p:cNvPr id="2" name="Title 1">
             <a:extLst>
               <a:ext uri="{FF2B5EF4-FFF2-40B4-BE49-F238E27FC236}">
-                <a16:creationId xmlns:a16="http://schemas.microsoft.com/office/drawing/2014/main" id="{5EB90051-E65F-E0C9-488E-F59B15C2258C}"/>
+                <a16:creationId xmlns:a16="http://schemas.microsoft.com/office/drawing/2014/main" id="{6AB87AE5-862B-4D98-69E8-20BBEDF56E2C}"/>
               </a:ext>
             </a:extLst>
           </p:cNvPr>
@@ -4857,7 +4879,7 @@
           <a:p>
             <a:r>
               <a:rPr lang="en-US" dirty="0"/>
-              <a:t>Reactive vs Proactive</a:t>
+              <a:t>Workaround &amp; Known error</a:t>
             </a:r>
           </a:p>
         </p:txBody>
@@ -4867,7 +4889,7 @@
           <p:cNvPr id="3" name="Content Placeholder 2">
             <a:extLst>
               <a:ext uri="{FF2B5EF4-FFF2-40B4-BE49-F238E27FC236}">
-                <a16:creationId xmlns:a16="http://schemas.microsoft.com/office/drawing/2014/main" id="{47743F3E-73A2-0AA6-ACBF-98C8BAF173CC}"/>
+                <a16:creationId xmlns:a16="http://schemas.microsoft.com/office/drawing/2014/main" id="{6E7D0D98-FF63-B1D3-4E61-D0B7A4A192B0}"/>
               </a:ext>
             </a:extLst>
           </p:cNvPr>
@@ -4878,14 +4900,19 @@
             <p:ph idx="1"/>
           </p:nvPr>
         </p:nvSpPr>
-        <p:spPr/>
+        <p:spPr>
+          <a:xfrm>
+            <a:off x="581192" y="2180496"/>
+            <a:ext cx="6553255" cy="3678303"/>
+          </a:xfrm>
+        </p:spPr>
         <p:txBody>
           <a:bodyPr/>
           <a:lstStyle/>
           <a:p>
             <a:r>
               <a:rPr lang="en-US" dirty="0"/>
-              <a:t>Definition: </a:t>
+              <a:t>Definition: A </a:t>
             </a:r>
             <a:r>
               <a:rPr lang="en-US" dirty="0">
@@ -4893,24 +4920,36 @@
                   <a:schemeClr val="accent2"/>
                 </a:solidFill>
               </a:rPr>
-              <a:t>Reactive Problem Management </a:t>
-            </a:r>
-            <a:r>
-              <a:rPr lang="en-US" dirty="0"/>
-              <a:t>is triggered after an incident has occurred, and its goal is to identify and remove the root cause</a:t>
+              <a:t>workaround</a:t>
+            </a:r>
+            <a:r>
+              <a:rPr lang="en-US" dirty="0"/>
+              <a:t> restores service without a full fix</a:t>
+            </a:r>
+          </a:p>
+          <a:p>
+            <a:r>
+              <a:rPr lang="en-US" dirty="0"/>
+              <a:t>Definition: A </a:t>
+            </a:r>
+            <a:r>
+              <a:rPr lang="en-US" dirty="0">
+                <a:solidFill>
+                  <a:schemeClr val="accent2"/>
+                </a:solidFill>
+              </a:rPr>
+              <a:t>known error </a:t>
+            </a:r>
+            <a:r>
+              <a:rPr lang="en-US" dirty="0"/>
+              <a:t>is a problem that has a documented root cause and a workaround</a:t>
             </a:r>
           </a:p>
           <a:p>
             <a:pPr lvl="1"/>
             <a:r>
               <a:rPr lang="en-US" dirty="0"/>
-              <a:t>Problem records created from existing incidents</a:t>
-            </a:r>
-          </a:p>
-          <a:p>
-            <a:r>
-              <a:rPr lang="en-US" dirty="0"/>
-              <a:t>Definition: </a:t>
+              <a:t>Stored in the </a:t>
             </a:r>
             <a:r>
               <a:rPr lang="en-US" dirty="0">
@@ -4918,30 +4957,45 @@
                   <a:schemeClr val="accent2"/>
                 </a:solidFill>
               </a:rPr>
-              <a:t>Proactive Problem Management </a:t>
-            </a:r>
-            <a:r>
-              <a:rPr lang="en-US" dirty="0"/>
-              <a:t>aims to identify and prevent problems before they cause incidents</a:t>
-            </a:r>
-          </a:p>
-          <a:p>
-            <a:pPr lvl="1"/>
-            <a:r>
-              <a:rPr lang="en-US" dirty="0"/>
-              <a:t>Use trend analysis, monitoring data, and continuous improvement to detect issues early </a:t>
-            </a:r>
-          </a:p>
-          <a:p>
-            <a:pPr lvl="1"/>
-            <a:endParaRPr lang="en-US" dirty="0"/>
-          </a:p>
-        </p:txBody>
-      </p:sp>
+              <a:t>Known Error Database (KEDB)</a:t>
+            </a:r>
+          </a:p>
+        </p:txBody>
+      </p:sp>
+      <p:pic>
+        <p:nvPicPr>
+          <p:cNvPr id="5" name="Picture 4">
+            <a:extLst>
+              <a:ext uri="{FF2B5EF4-FFF2-40B4-BE49-F238E27FC236}">
+                <a16:creationId xmlns:a16="http://schemas.microsoft.com/office/drawing/2014/main" id="{F079044E-152A-2599-728F-E1A805643B75}"/>
+              </a:ext>
+            </a:extLst>
+          </p:cNvPr>
+          <p:cNvPicPr>
+            <a:picLocks noChangeAspect="1"/>
+          </p:cNvPicPr>
+          <p:nvPr/>
+        </p:nvPicPr>
+        <p:blipFill>
+          <a:blip r:embed="rId2"/>
+          <a:stretch>
+            <a:fillRect/>
+          </a:stretch>
+        </p:blipFill>
+        <p:spPr>
+          <a:xfrm>
+            <a:off x="7929710" y="3333335"/>
+            <a:ext cx="2648320" cy="1190791"/>
+          </a:xfrm>
+          <a:prstGeom prst="rect">
+            <a:avLst/>
+          </a:prstGeom>
+        </p:spPr>
+      </p:pic>
     </p:spTree>
     <p:extLst>
       <p:ext uri="{BB962C8B-B14F-4D97-AF65-F5344CB8AC3E}">
-        <p14:creationId xmlns:p14="http://schemas.microsoft.com/office/powerpoint/2010/main" val="1472518551"/>
+        <p14:creationId xmlns:p14="http://schemas.microsoft.com/office/powerpoint/2010/main" val="920011886"/>
       </p:ext>
     </p:extLst>
   </p:cSld>
@@ -4973,7 +5027,7 @@
           <p:cNvPr id="2" name="Title 1">
             <a:extLst>
               <a:ext uri="{FF2B5EF4-FFF2-40B4-BE49-F238E27FC236}">
-                <a16:creationId xmlns:a16="http://schemas.microsoft.com/office/drawing/2014/main" id="{23FFC745-70F1-2EEF-8C2F-71D334B9DF8B}"/>
+                <a16:creationId xmlns:a16="http://schemas.microsoft.com/office/drawing/2014/main" id="{5EB90051-E65F-E0C9-488E-F59B15C2258C}"/>
               </a:ext>
             </a:extLst>
           </p:cNvPr>
@@ -4991,7 +5045,7 @@
           <a:p>
             <a:r>
               <a:rPr lang="en-US" dirty="0"/>
-              <a:t>Key Problem Management Features</a:t>
+              <a:t>Reactive vs Proactive</a:t>
             </a:r>
           </a:p>
         </p:txBody>
@@ -5001,7 +5055,7 @@
           <p:cNvPr id="3" name="Content Placeholder 2">
             <a:extLst>
               <a:ext uri="{FF2B5EF4-FFF2-40B4-BE49-F238E27FC236}">
-                <a16:creationId xmlns:a16="http://schemas.microsoft.com/office/drawing/2014/main" id="{18C168EC-9684-3E21-8BEA-2CCD41D4C786}"/>
+                <a16:creationId xmlns:a16="http://schemas.microsoft.com/office/drawing/2014/main" id="{47743F3E-73A2-0AA6-ACBF-98C8BAF173CC}"/>
               </a:ext>
             </a:extLst>
           </p:cNvPr>
@@ -5018,94 +5072,64 @@
           <a:lstStyle/>
           <a:p>
             <a:r>
+              <a:rPr lang="en-US" dirty="0"/>
+              <a:t>Definition: </a:t>
+            </a:r>
+            <a:r>
               <a:rPr lang="en-US" dirty="0">
                 <a:solidFill>
                   <a:schemeClr val="accent2"/>
                 </a:solidFill>
               </a:rPr>
-              <a:t>The Problem record </a:t>
-            </a:r>
-            <a:r>
-              <a:rPr lang="en-US" dirty="0"/>
-              <a:t>– link related incidents; log problem details; handle resolution/closure</a:t>
-            </a:r>
-          </a:p>
-          <a:p>
+              <a:t>Reactive Problem Management </a:t>
+            </a:r>
+            <a:r>
+              <a:rPr lang="en-US" dirty="0"/>
+              <a:t>is triggered after an incident has occurred, and its goal is to identify and remove the root cause</a:t>
+            </a:r>
+          </a:p>
+          <a:p>
+            <a:pPr lvl="1"/>
+            <a:r>
+              <a:rPr lang="en-US" dirty="0"/>
+              <a:t>Problem records created from existing incidents</a:t>
+            </a:r>
+          </a:p>
+          <a:p>
+            <a:r>
+              <a:rPr lang="en-US" dirty="0"/>
+              <a:t>Definition: </a:t>
+            </a:r>
             <a:r>
               <a:rPr lang="en-US" dirty="0">
                 <a:solidFill>
                   <a:schemeClr val="accent2"/>
                 </a:solidFill>
               </a:rPr>
-              <a:t>Assignment Rules </a:t>
-            </a:r>
-            <a:r>
-              <a:rPr lang="en-US" dirty="0"/>
-              <a:t>– automatically routes problems to the correct support group or individual</a:t>
-            </a:r>
-          </a:p>
-          <a:p>
-            <a:r>
-              <a:rPr lang="en-US" dirty="0">
-                <a:solidFill>
-                  <a:schemeClr val="accent2"/>
-                </a:solidFill>
-              </a:rPr>
-              <a:t>Priority Matrix </a:t>
-            </a:r>
-            <a:r>
-              <a:rPr lang="en-US" dirty="0"/>
-              <a:t>– priority = impact + urgency</a:t>
-            </a:r>
-          </a:p>
-          <a:p>
-            <a:r>
-              <a:rPr lang="en-US" dirty="0">
-                <a:solidFill>
-                  <a:schemeClr val="accent2"/>
-                </a:solidFill>
-              </a:rPr>
-              <a:t>Work Notes &amp; Comments </a:t>
-            </a:r>
-            <a:r>
-              <a:rPr lang="en-US" dirty="0"/>
-              <a:t>– facilitate collaboration between support teams and communicate with the user</a:t>
-            </a:r>
-          </a:p>
-          <a:p>
-            <a:r>
-              <a:rPr lang="en-US" dirty="0">
-                <a:solidFill>
-                  <a:schemeClr val="accent2"/>
-                </a:solidFill>
-              </a:rPr>
-              <a:t>Communicate Workarounds </a:t>
-            </a:r>
-            <a:r>
-              <a:rPr lang="en-US" dirty="0"/>
-              <a:t>– tell related incident owners about the fix</a:t>
-            </a:r>
-          </a:p>
-          <a:p>
-            <a:r>
-              <a:rPr lang="en-US" dirty="0">
-                <a:solidFill>
-                  <a:schemeClr val="accent2"/>
-                </a:solidFill>
-              </a:rPr>
-              <a:t>Known Errors </a:t>
-            </a:r>
-            <a:r>
-              <a:rPr lang="en-US" dirty="0"/>
-              <a:t>– Identify root causes and find solutions; create knowledge base articles</a:t>
-            </a:r>
+              <a:t>Proactive Problem Management </a:t>
+            </a:r>
+            <a:r>
+              <a:rPr lang="en-US" dirty="0"/>
+              <a:t>aims to identify and prevent problems before they cause incidents</a:t>
+            </a:r>
+          </a:p>
+          <a:p>
+            <a:pPr lvl="1"/>
+            <a:r>
+              <a:rPr lang="en-US" dirty="0"/>
+              <a:t>Use trend analysis, monitoring data, and continuous improvement to detect issues early </a:t>
+            </a:r>
+          </a:p>
+          <a:p>
+            <a:pPr lvl="1"/>
+            <a:endParaRPr lang="en-US" dirty="0"/>
           </a:p>
         </p:txBody>
       </p:sp>
     </p:spTree>
     <p:extLst>
       <p:ext uri="{BB962C8B-B14F-4D97-AF65-F5344CB8AC3E}">
-        <p14:creationId xmlns:p14="http://schemas.microsoft.com/office/powerpoint/2010/main" val="3301352783"/>
+        <p14:creationId xmlns:p14="http://schemas.microsoft.com/office/powerpoint/2010/main" val="1472518551"/>
       </p:ext>
     </p:extLst>
   </p:cSld>
@@ -5137,6 +5161,170 @@
           <p:cNvPr id="2" name="Title 1">
             <a:extLst>
               <a:ext uri="{FF2B5EF4-FFF2-40B4-BE49-F238E27FC236}">
+                <a16:creationId xmlns:a16="http://schemas.microsoft.com/office/drawing/2014/main" id="{23FFC745-70F1-2EEF-8C2F-71D334B9DF8B}"/>
+              </a:ext>
+            </a:extLst>
+          </p:cNvPr>
+          <p:cNvSpPr>
+            <a:spLocks noGrp="1"/>
+          </p:cNvSpPr>
+          <p:nvPr>
+            <p:ph type="title"/>
+          </p:nvPr>
+        </p:nvSpPr>
+        <p:spPr/>
+        <p:txBody>
+          <a:bodyPr/>
+          <a:lstStyle/>
+          <a:p>
+            <a:r>
+              <a:rPr lang="en-US" dirty="0"/>
+              <a:t>Key Problem Management Features</a:t>
+            </a:r>
+          </a:p>
+        </p:txBody>
+      </p:sp>
+      <p:sp>
+        <p:nvSpPr>
+          <p:cNvPr id="3" name="Content Placeholder 2">
+            <a:extLst>
+              <a:ext uri="{FF2B5EF4-FFF2-40B4-BE49-F238E27FC236}">
+                <a16:creationId xmlns:a16="http://schemas.microsoft.com/office/drawing/2014/main" id="{18C168EC-9684-3E21-8BEA-2CCD41D4C786}"/>
+              </a:ext>
+            </a:extLst>
+          </p:cNvPr>
+          <p:cNvSpPr>
+            <a:spLocks noGrp="1"/>
+          </p:cNvSpPr>
+          <p:nvPr>
+            <p:ph idx="1"/>
+          </p:nvPr>
+        </p:nvSpPr>
+        <p:spPr/>
+        <p:txBody>
+          <a:bodyPr/>
+          <a:lstStyle/>
+          <a:p>
+            <a:r>
+              <a:rPr lang="en-US" dirty="0">
+                <a:solidFill>
+                  <a:schemeClr val="accent2"/>
+                </a:solidFill>
+              </a:rPr>
+              <a:t>The Problem record </a:t>
+            </a:r>
+            <a:r>
+              <a:rPr lang="en-US" dirty="0"/>
+              <a:t>– link related incidents; log problem details; handle resolution/closure</a:t>
+            </a:r>
+          </a:p>
+          <a:p>
+            <a:r>
+              <a:rPr lang="en-US" dirty="0">
+                <a:solidFill>
+                  <a:schemeClr val="accent2"/>
+                </a:solidFill>
+              </a:rPr>
+              <a:t>Assignment Rules </a:t>
+            </a:r>
+            <a:r>
+              <a:rPr lang="en-US" dirty="0"/>
+              <a:t>– automatically routes problems to the correct support group or individual</a:t>
+            </a:r>
+          </a:p>
+          <a:p>
+            <a:r>
+              <a:rPr lang="en-US" dirty="0">
+                <a:solidFill>
+                  <a:schemeClr val="accent2"/>
+                </a:solidFill>
+              </a:rPr>
+              <a:t>Priority Matrix </a:t>
+            </a:r>
+            <a:r>
+              <a:rPr lang="en-US" dirty="0"/>
+              <a:t>– priority = impact + urgency</a:t>
+            </a:r>
+          </a:p>
+          <a:p>
+            <a:r>
+              <a:rPr lang="en-US" dirty="0">
+                <a:solidFill>
+                  <a:schemeClr val="accent2"/>
+                </a:solidFill>
+              </a:rPr>
+              <a:t>Work Notes &amp; Comments </a:t>
+            </a:r>
+            <a:r>
+              <a:rPr lang="en-US" dirty="0"/>
+              <a:t>– facilitate collaboration between support teams and communicate with the user</a:t>
+            </a:r>
+          </a:p>
+          <a:p>
+            <a:r>
+              <a:rPr lang="en-US" dirty="0">
+                <a:solidFill>
+                  <a:schemeClr val="accent2"/>
+                </a:solidFill>
+              </a:rPr>
+              <a:t>Communicate Workarounds </a:t>
+            </a:r>
+            <a:r>
+              <a:rPr lang="en-US" dirty="0"/>
+              <a:t>– tell related incident owners about the fix</a:t>
+            </a:r>
+          </a:p>
+          <a:p>
+            <a:r>
+              <a:rPr lang="en-US" dirty="0">
+                <a:solidFill>
+                  <a:schemeClr val="accent2"/>
+                </a:solidFill>
+              </a:rPr>
+              <a:t>Known Errors </a:t>
+            </a:r>
+            <a:r>
+              <a:rPr lang="en-US" dirty="0"/>
+              <a:t>– Identify root causes and find solutions; create knowledge base articles</a:t>
+            </a:r>
+          </a:p>
+        </p:txBody>
+      </p:sp>
+    </p:spTree>
+    <p:extLst>
+      <p:ext uri="{BB962C8B-B14F-4D97-AF65-F5344CB8AC3E}">
+        <p14:creationId xmlns:p14="http://schemas.microsoft.com/office/powerpoint/2010/main" val="3301352783"/>
+      </p:ext>
+    </p:extLst>
+  </p:cSld>
+  <p:clrMapOvr>
+    <a:masterClrMapping/>
+  </p:clrMapOvr>
+</p:sld>
+</file>
+
+<file path=ppt/slides/slide18.xml><?xml version="1.0" encoding="utf-8"?>
+<p:sld xmlns:a="http://schemas.openxmlformats.org/drawingml/2006/main" xmlns:r="http://schemas.openxmlformats.org/officeDocument/2006/relationships" xmlns:p="http://schemas.openxmlformats.org/presentationml/2006/main">
+  <p:cSld>
+    <p:spTree>
+      <p:nvGrpSpPr>
+        <p:cNvPr id="1" name=""/>
+        <p:cNvGrpSpPr/>
+        <p:nvPr/>
+      </p:nvGrpSpPr>
+      <p:grpSpPr>
+        <a:xfrm>
+          <a:off x="0" y="0"/>
+          <a:ext cx="0" cy="0"/>
+          <a:chOff x="0" y="0"/>
+          <a:chExt cx="0" cy="0"/>
+        </a:xfrm>
+      </p:grpSpPr>
+      <p:sp>
+        <p:nvSpPr>
+          <p:cNvPr id="2" name="Title 1">
+            <a:extLst>
+              <a:ext uri="{FF2B5EF4-FFF2-40B4-BE49-F238E27FC236}">
                 <a16:creationId xmlns:a16="http://schemas.microsoft.com/office/drawing/2014/main" id="{76590990-6B86-C8A4-7A44-555AE00DD931}"/>
               </a:ext>
             </a:extLst>
@@ -5309,7 +5497,7 @@
 </p:sld>
 </file>
 
-<file path=ppt/slides/slide18.xml><?xml version="1.0" encoding="utf-8"?>
+<file path=ppt/slides/slide19.xml><?xml version="1.0" encoding="utf-8"?>
 <p:sld xmlns:a="http://schemas.openxmlformats.org/drawingml/2006/main" xmlns:r="http://schemas.openxmlformats.org/officeDocument/2006/relationships" xmlns:p="http://schemas.openxmlformats.org/presentationml/2006/main">
   <p:cSld>
     <p:spTree>
@@ -5397,7 +5585,140 @@
 </p:sld>
 </file>
 
-<file path=ppt/slides/slide19.xml><?xml version="1.0" encoding="utf-8"?>
+<file path=ppt/slides/slide2.xml><?xml version="1.0" encoding="utf-8"?>
+<p:sld xmlns:a="http://schemas.openxmlformats.org/drawingml/2006/main" xmlns:r="http://schemas.openxmlformats.org/officeDocument/2006/relationships" xmlns:p="http://schemas.openxmlformats.org/presentationml/2006/main">
+  <p:cSld>
+    <p:spTree>
+      <p:nvGrpSpPr>
+        <p:cNvPr id="1" name=""/>
+        <p:cNvGrpSpPr/>
+        <p:nvPr/>
+      </p:nvGrpSpPr>
+      <p:grpSpPr>
+        <a:xfrm>
+          <a:off x="0" y="0"/>
+          <a:ext cx="0" cy="0"/>
+          <a:chOff x="0" y="0"/>
+          <a:chExt cx="0" cy="0"/>
+        </a:xfrm>
+      </p:grpSpPr>
+      <p:sp>
+        <p:nvSpPr>
+          <p:cNvPr id="2" name="Title 1">
+            <a:extLst>
+              <a:ext uri="{FF2B5EF4-FFF2-40B4-BE49-F238E27FC236}">
+                <a16:creationId xmlns:a16="http://schemas.microsoft.com/office/drawing/2014/main" id="{47395674-13A9-9205-28DD-508DE993CD69}"/>
+              </a:ext>
+            </a:extLst>
+          </p:cNvPr>
+          <p:cNvSpPr>
+            <a:spLocks noGrp="1"/>
+          </p:cNvSpPr>
+          <p:nvPr>
+            <p:ph type="title"/>
+          </p:nvPr>
+        </p:nvSpPr>
+        <p:spPr/>
+        <p:txBody>
+          <a:bodyPr/>
+          <a:lstStyle/>
+          <a:p>
+            <a:r>
+              <a:rPr lang="en-US" dirty="0"/>
+              <a:t>What is Incident Management?</a:t>
+            </a:r>
+          </a:p>
+        </p:txBody>
+      </p:sp>
+      <p:sp>
+        <p:nvSpPr>
+          <p:cNvPr id="3" name="Content Placeholder 2">
+            <a:extLst>
+              <a:ext uri="{FF2B5EF4-FFF2-40B4-BE49-F238E27FC236}">
+                <a16:creationId xmlns:a16="http://schemas.microsoft.com/office/drawing/2014/main" id="{4C7E3DD8-E45A-6112-A399-C81789AA6D17}"/>
+              </a:ext>
+            </a:extLst>
+          </p:cNvPr>
+          <p:cNvSpPr>
+            <a:spLocks noGrp="1"/>
+          </p:cNvSpPr>
+          <p:nvPr>
+            <p:ph idx="1"/>
+          </p:nvPr>
+        </p:nvSpPr>
+        <p:spPr>
+          <a:xfrm>
+            <a:off x="581191" y="2428849"/>
+            <a:ext cx="11029615" cy="3419057"/>
+          </a:xfrm>
+        </p:spPr>
+        <p:txBody>
+          <a:bodyPr>
+            <a:normAutofit/>
+          </a:bodyPr>
+          <a:lstStyle/>
+          <a:p>
+            <a:r>
+              <a:rPr lang="en-US" dirty="0"/>
+              <a:t>Definition: </a:t>
+            </a:r>
+            <a:r>
+              <a:rPr lang="en-US" dirty="0">
+                <a:solidFill>
+                  <a:schemeClr val="accent2"/>
+                </a:solidFill>
+              </a:rPr>
+              <a:t>Incident Management </a:t>
+            </a:r>
+            <a:r>
+              <a:rPr lang="en-US" dirty="0"/>
+              <a:t>in ServiceNow is the process and supporting application used to restore normal service operation as quickly as possible after an unplanned interruption or reduction in quality of IT service — minimizing the impact on business operations.</a:t>
+            </a:r>
+          </a:p>
+          <a:p>
+            <a:pPr lvl="1"/>
+            <a:r>
+              <a:rPr lang="en-US" dirty="0"/>
+              <a:t>Make sure service disruptions are resolved quickly</a:t>
+            </a:r>
+          </a:p>
+          <a:p>
+            <a:pPr lvl="1"/>
+            <a:r>
+              <a:rPr lang="en-US" dirty="0"/>
+              <a:t>Work is assigned automatically to the right teams</a:t>
+            </a:r>
+          </a:p>
+          <a:p>
+            <a:pPr lvl="1"/>
+            <a:r>
+              <a:rPr lang="en-US" dirty="0"/>
+              <a:t>Customers and support staff can track progress transparently</a:t>
+            </a:r>
+          </a:p>
+          <a:p>
+            <a:pPr lvl="1"/>
+            <a:r>
+              <a:rPr lang="en-US" dirty="0"/>
+              <a:t>Finding a cause is not the concern of incidents, restoring service quickly is</a:t>
+            </a:r>
+          </a:p>
+        </p:txBody>
+      </p:sp>
+    </p:spTree>
+    <p:extLst>
+      <p:ext uri="{BB962C8B-B14F-4D97-AF65-F5344CB8AC3E}">
+        <p14:creationId xmlns:p14="http://schemas.microsoft.com/office/powerpoint/2010/main" val="2296974838"/>
+      </p:ext>
+    </p:extLst>
+  </p:cSld>
+  <p:clrMapOvr>
+    <a:masterClrMapping/>
+  </p:clrMapOvr>
+</p:sld>
+</file>
+
+<file path=ppt/slides/slide20.xml><?xml version="1.0" encoding="utf-8"?>
 <p:sld xmlns:a="http://schemas.openxmlformats.org/drawingml/2006/main" xmlns:r="http://schemas.openxmlformats.org/officeDocument/2006/relationships" xmlns:p="http://schemas.openxmlformats.org/presentationml/2006/main">
   <p:cSld>
     <p:spTree>
@@ -5615,140 +5936,7 @@
 </p:sld>
 </file>
 
-<file path=ppt/slides/slide2.xml><?xml version="1.0" encoding="utf-8"?>
-<p:sld xmlns:a="http://schemas.openxmlformats.org/drawingml/2006/main" xmlns:r="http://schemas.openxmlformats.org/officeDocument/2006/relationships" xmlns:p="http://schemas.openxmlformats.org/presentationml/2006/main">
-  <p:cSld>
-    <p:spTree>
-      <p:nvGrpSpPr>
-        <p:cNvPr id="1" name=""/>
-        <p:cNvGrpSpPr/>
-        <p:nvPr/>
-      </p:nvGrpSpPr>
-      <p:grpSpPr>
-        <a:xfrm>
-          <a:off x="0" y="0"/>
-          <a:ext cx="0" cy="0"/>
-          <a:chOff x="0" y="0"/>
-          <a:chExt cx="0" cy="0"/>
-        </a:xfrm>
-      </p:grpSpPr>
-      <p:sp>
-        <p:nvSpPr>
-          <p:cNvPr id="2" name="Title 1">
-            <a:extLst>
-              <a:ext uri="{FF2B5EF4-FFF2-40B4-BE49-F238E27FC236}">
-                <a16:creationId xmlns:a16="http://schemas.microsoft.com/office/drawing/2014/main" id="{47395674-13A9-9205-28DD-508DE993CD69}"/>
-              </a:ext>
-            </a:extLst>
-          </p:cNvPr>
-          <p:cNvSpPr>
-            <a:spLocks noGrp="1"/>
-          </p:cNvSpPr>
-          <p:nvPr>
-            <p:ph type="title"/>
-          </p:nvPr>
-        </p:nvSpPr>
-        <p:spPr/>
-        <p:txBody>
-          <a:bodyPr/>
-          <a:lstStyle/>
-          <a:p>
-            <a:r>
-              <a:rPr lang="en-US" dirty="0"/>
-              <a:t>What is Incident Management?</a:t>
-            </a:r>
-          </a:p>
-        </p:txBody>
-      </p:sp>
-      <p:sp>
-        <p:nvSpPr>
-          <p:cNvPr id="3" name="Content Placeholder 2">
-            <a:extLst>
-              <a:ext uri="{FF2B5EF4-FFF2-40B4-BE49-F238E27FC236}">
-                <a16:creationId xmlns:a16="http://schemas.microsoft.com/office/drawing/2014/main" id="{4C7E3DD8-E45A-6112-A399-C81789AA6D17}"/>
-              </a:ext>
-            </a:extLst>
-          </p:cNvPr>
-          <p:cNvSpPr>
-            <a:spLocks noGrp="1"/>
-          </p:cNvSpPr>
-          <p:nvPr>
-            <p:ph idx="1"/>
-          </p:nvPr>
-        </p:nvSpPr>
-        <p:spPr>
-          <a:xfrm>
-            <a:off x="581191" y="2428849"/>
-            <a:ext cx="11029615" cy="3419057"/>
-          </a:xfrm>
-        </p:spPr>
-        <p:txBody>
-          <a:bodyPr>
-            <a:normAutofit/>
-          </a:bodyPr>
-          <a:lstStyle/>
-          <a:p>
-            <a:r>
-              <a:rPr lang="en-US" dirty="0"/>
-              <a:t>Definition: </a:t>
-            </a:r>
-            <a:r>
-              <a:rPr lang="en-US" dirty="0">
-                <a:solidFill>
-                  <a:schemeClr val="accent2"/>
-                </a:solidFill>
-              </a:rPr>
-              <a:t>Incident Management </a:t>
-            </a:r>
-            <a:r>
-              <a:rPr lang="en-US" dirty="0"/>
-              <a:t>in ServiceNow is the process and supporting application used to restore normal service operation as quickly as possible after an unplanned interruption or reduction in quality of IT service — minimizing the impact on business operations.</a:t>
-            </a:r>
-          </a:p>
-          <a:p>
-            <a:pPr lvl="1"/>
-            <a:r>
-              <a:rPr lang="en-US" dirty="0"/>
-              <a:t>Make sure service disruptions are resolved quickly</a:t>
-            </a:r>
-          </a:p>
-          <a:p>
-            <a:pPr lvl="1"/>
-            <a:r>
-              <a:rPr lang="en-US" dirty="0"/>
-              <a:t>Work is assigned automatically to the right teams</a:t>
-            </a:r>
-          </a:p>
-          <a:p>
-            <a:pPr lvl="1"/>
-            <a:r>
-              <a:rPr lang="en-US" dirty="0"/>
-              <a:t>Customers and support staff can track progress transparently</a:t>
-            </a:r>
-          </a:p>
-          <a:p>
-            <a:pPr lvl="1"/>
-            <a:r>
-              <a:rPr lang="en-US" dirty="0"/>
-              <a:t>Finding a cause is not the concern of incidents, restoring service quickly is</a:t>
-            </a:r>
-          </a:p>
-        </p:txBody>
-      </p:sp>
-    </p:spTree>
-    <p:extLst>
-      <p:ext uri="{BB962C8B-B14F-4D97-AF65-F5344CB8AC3E}">
-        <p14:creationId xmlns:p14="http://schemas.microsoft.com/office/powerpoint/2010/main" val="2296974838"/>
-      </p:ext>
-    </p:extLst>
-  </p:cSld>
-  <p:clrMapOvr>
-    <a:masterClrMapping/>
-  </p:clrMapOvr>
-</p:sld>
-</file>
-
-<file path=ppt/slides/slide20.xml><?xml version="1.0" encoding="utf-8"?>
+<file path=ppt/slides/slide21.xml><?xml version="1.0" encoding="utf-8"?>
 <p:sld xmlns:a="http://schemas.openxmlformats.org/drawingml/2006/main" xmlns:r="http://schemas.openxmlformats.org/officeDocument/2006/relationships" xmlns:p="http://schemas.openxmlformats.org/presentationml/2006/main">
   <p:cSld>
     <p:spTree>
@@ -5986,7 +6174,7 @@
 </p:sld>
 </file>
 
-<file path=ppt/slides/slide21.xml><?xml version="1.0" encoding="utf-8"?>
+<file path=ppt/slides/slide22.xml><?xml version="1.0" encoding="utf-8"?>
 <p:sld xmlns:a="http://schemas.openxmlformats.org/drawingml/2006/main" xmlns:r="http://schemas.openxmlformats.org/officeDocument/2006/relationships" xmlns:p="http://schemas.openxmlformats.org/presentationml/2006/main">
   <p:cSld>
     <p:spTree>
@@ -6185,7 +6373,7 @@
 </p:sld>
 </file>
 
-<file path=ppt/slides/slide22.xml><?xml version="1.0" encoding="utf-8"?>
+<file path=ppt/slides/slide23.xml><?xml version="1.0" encoding="utf-8"?>
 <p:sld xmlns:a="http://schemas.openxmlformats.org/drawingml/2006/main" xmlns:r="http://schemas.openxmlformats.org/officeDocument/2006/relationships" xmlns:p="http://schemas.openxmlformats.org/presentationml/2006/main">
   <p:cSld>
     <p:spTree>
@@ -6348,7 +6536,7 @@
 </p:sld>
 </file>
 
-<file path=ppt/slides/slide23.xml><?xml version="1.0" encoding="utf-8"?>
+<file path=ppt/slides/slide24.xml><?xml version="1.0" encoding="utf-8"?>
 <p:sld xmlns:a="http://schemas.openxmlformats.org/drawingml/2006/main" xmlns:r="http://schemas.openxmlformats.org/officeDocument/2006/relationships" xmlns:p="http://schemas.openxmlformats.org/presentationml/2006/main">
   <p:cSld>
     <p:spTree>
@@ -6721,6 +6909,767 @@
     <p:extLst>
       <p:ext uri="{BB962C8B-B14F-4D97-AF65-F5344CB8AC3E}">
         <p14:creationId xmlns:p14="http://schemas.microsoft.com/office/powerpoint/2010/main" val="3594362430"/>
+      </p:ext>
+    </p:extLst>
+  </p:cSld>
+  <p:clrMapOvr>
+    <a:masterClrMapping/>
+  </p:clrMapOvr>
+</p:sld>
+</file>
+
+<file path=ppt/slides/slide25.xml><?xml version="1.0" encoding="utf-8"?>
+<p:sld xmlns:a="http://schemas.openxmlformats.org/drawingml/2006/main" xmlns:r="http://schemas.openxmlformats.org/officeDocument/2006/relationships" xmlns:p="http://schemas.openxmlformats.org/presentationml/2006/main">
+  <p:cSld>
+    <p:spTree>
+      <p:nvGrpSpPr>
+        <p:cNvPr id="1" name="">
+          <a:extLst>
+            <a:ext uri="{FF2B5EF4-FFF2-40B4-BE49-F238E27FC236}">
+              <a16:creationId xmlns:a16="http://schemas.microsoft.com/office/drawing/2014/main" id="{35EA57E7-9EF0-4C7C-E3A8-3B3F2FA106DB}"/>
+            </a:ext>
+          </a:extLst>
+        </p:cNvPr>
+        <p:cNvGrpSpPr/>
+        <p:nvPr/>
+      </p:nvGrpSpPr>
+      <p:grpSpPr>
+        <a:xfrm>
+          <a:off x="0" y="0"/>
+          <a:ext cx="0" cy="0"/>
+          <a:chOff x="0" y="0"/>
+          <a:chExt cx="0" cy="0"/>
+        </a:xfrm>
+      </p:grpSpPr>
+      <p:sp>
+        <p:nvSpPr>
+          <p:cNvPr id="2" name="Title 1">
+            <a:extLst>
+              <a:ext uri="{FF2B5EF4-FFF2-40B4-BE49-F238E27FC236}">
+                <a16:creationId xmlns:a16="http://schemas.microsoft.com/office/drawing/2014/main" id="{7E9C5811-B36D-BFBB-FAA4-DA13B22FB741}"/>
+              </a:ext>
+            </a:extLst>
+          </p:cNvPr>
+          <p:cNvSpPr>
+            <a:spLocks noGrp="1"/>
+          </p:cNvSpPr>
+          <p:nvPr>
+            <p:ph type="ctrTitle"/>
+          </p:nvPr>
+        </p:nvSpPr>
+        <p:spPr/>
+        <p:txBody>
+          <a:bodyPr/>
+          <a:lstStyle/>
+          <a:p>
+            <a:r>
+              <a:rPr lang="en-US" dirty="0"/>
+              <a:t>Change Management</a:t>
+            </a:r>
+          </a:p>
+        </p:txBody>
+      </p:sp>
+    </p:spTree>
+    <p:extLst>
+      <p:ext uri="{BB962C8B-B14F-4D97-AF65-F5344CB8AC3E}">
+        <p14:creationId xmlns:p14="http://schemas.microsoft.com/office/powerpoint/2010/main" val="380141261"/>
+      </p:ext>
+    </p:extLst>
+  </p:cSld>
+  <p:clrMapOvr>
+    <a:masterClrMapping/>
+  </p:clrMapOvr>
+</p:sld>
+</file>
+
+<file path=ppt/slides/slide26.xml><?xml version="1.0" encoding="utf-8"?>
+<p:sld xmlns:a="http://schemas.openxmlformats.org/drawingml/2006/main" xmlns:r="http://schemas.openxmlformats.org/officeDocument/2006/relationships" xmlns:p="http://schemas.openxmlformats.org/presentationml/2006/main">
+  <p:cSld>
+    <p:spTree>
+      <p:nvGrpSpPr>
+        <p:cNvPr id="1" name=""/>
+        <p:cNvGrpSpPr/>
+        <p:nvPr/>
+      </p:nvGrpSpPr>
+      <p:grpSpPr>
+        <a:xfrm>
+          <a:off x="0" y="0"/>
+          <a:ext cx="0" cy="0"/>
+          <a:chOff x="0" y="0"/>
+          <a:chExt cx="0" cy="0"/>
+        </a:xfrm>
+      </p:grpSpPr>
+      <p:sp>
+        <p:nvSpPr>
+          <p:cNvPr id="2" name="Title 1">
+            <a:extLst>
+              <a:ext uri="{FF2B5EF4-FFF2-40B4-BE49-F238E27FC236}">
+                <a16:creationId xmlns:a16="http://schemas.microsoft.com/office/drawing/2014/main" id="{D4458A7F-7962-0CD3-6D38-C469283BDC9F}"/>
+              </a:ext>
+            </a:extLst>
+          </p:cNvPr>
+          <p:cNvSpPr>
+            <a:spLocks noGrp="1"/>
+          </p:cNvSpPr>
+          <p:nvPr>
+            <p:ph type="title"/>
+          </p:nvPr>
+        </p:nvSpPr>
+        <p:spPr/>
+        <p:txBody>
+          <a:bodyPr/>
+          <a:lstStyle/>
+          <a:p>
+            <a:r>
+              <a:rPr lang="en-US" dirty="0"/>
+              <a:t>What is Change Management?</a:t>
+            </a:r>
+          </a:p>
+        </p:txBody>
+      </p:sp>
+      <p:sp>
+        <p:nvSpPr>
+          <p:cNvPr id="3" name="Content Placeholder 2">
+            <a:extLst>
+              <a:ext uri="{FF2B5EF4-FFF2-40B4-BE49-F238E27FC236}">
+                <a16:creationId xmlns:a16="http://schemas.microsoft.com/office/drawing/2014/main" id="{E288AB57-8C17-2D7A-82A4-4954811D22CE}"/>
+              </a:ext>
+            </a:extLst>
+          </p:cNvPr>
+          <p:cNvSpPr>
+            <a:spLocks noGrp="1"/>
+          </p:cNvSpPr>
+          <p:nvPr>
+            <p:ph idx="1"/>
+          </p:nvPr>
+        </p:nvSpPr>
+        <p:spPr/>
+        <p:txBody>
+          <a:bodyPr/>
+          <a:lstStyle/>
+          <a:p>
+            <a:r>
+              <a:rPr lang="en-US" dirty="0"/>
+              <a:t>We don’t call it change management anymore in ITIL version 4. </a:t>
+            </a:r>
+          </a:p>
+          <a:p>
+            <a:r>
+              <a:rPr lang="en-US" dirty="0"/>
+              <a:t>ITIL V3 = Change Management </a:t>
+            </a:r>
+          </a:p>
+          <a:p>
+            <a:r>
+              <a:rPr lang="en-US" dirty="0"/>
+              <a:t>ITIL V4 = Change Enablement</a:t>
+            </a:r>
+          </a:p>
+          <a:p>
+            <a:r>
+              <a:rPr lang="en-US" dirty="0"/>
+              <a:t>Definition: </a:t>
+            </a:r>
+            <a:r>
+              <a:rPr lang="en-US" dirty="0">
+                <a:solidFill>
+                  <a:schemeClr val="accent2"/>
+                </a:solidFill>
+              </a:rPr>
+              <a:t>Change enablement </a:t>
+            </a:r>
+            <a:r>
+              <a:rPr lang="en-US" dirty="0"/>
+              <a:t>is the management practice of ensuring that changes to IT services and the IT infrastructure are implemented in a way that minimizes risk and disruption while maximizing value </a:t>
+            </a:r>
+          </a:p>
+          <a:p>
+            <a:endParaRPr lang="en-US" dirty="0"/>
+          </a:p>
+          <a:p>
+            <a:endParaRPr lang="en-US" dirty="0"/>
+          </a:p>
+          <a:p>
+            <a:pPr marL="0" indent="0" algn="ctr">
+              <a:buNone/>
+            </a:pPr>
+            <a:r>
+              <a:rPr lang="en-US" dirty="0"/>
+              <a:t>You may see an even older term ‘change control’. In day-to-day practice, you could see or hear all 3.</a:t>
+            </a:r>
+          </a:p>
+          <a:p>
+            <a:pPr marL="0" indent="0" algn="ctr">
+              <a:buNone/>
+            </a:pPr>
+            <a:r>
+              <a:rPr lang="en-US" dirty="0"/>
+              <a:t>Change Control, Change Management, Change Enablement (Newest)</a:t>
+            </a:r>
+          </a:p>
+        </p:txBody>
+      </p:sp>
+    </p:spTree>
+    <p:extLst>
+      <p:ext uri="{BB962C8B-B14F-4D97-AF65-F5344CB8AC3E}">
+        <p14:creationId xmlns:p14="http://schemas.microsoft.com/office/powerpoint/2010/main" val="2546766448"/>
+      </p:ext>
+    </p:extLst>
+  </p:cSld>
+  <p:clrMapOvr>
+    <a:masterClrMapping/>
+  </p:clrMapOvr>
+</p:sld>
+</file>
+
+<file path=ppt/slides/slide27.xml><?xml version="1.0" encoding="utf-8"?>
+<p:sld xmlns:a="http://schemas.openxmlformats.org/drawingml/2006/main" xmlns:r="http://schemas.openxmlformats.org/officeDocument/2006/relationships" xmlns:p="http://schemas.openxmlformats.org/presentationml/2006/main">
+  <p:cSld>
+    <p:spTree>
+      <p:nvGrpSpPr>
+        <p:cNvPr id="1" name=""/>
+        <p:cNvGrpSpPr/>
+        <p:nvPr/>
+      </p:nvGrpSpPr>
+      <p:grpSpPr>
+        <a:xfrm>
+          <a:off x="0" y="0"/>
+          <a:ext cx="0" cy="0"/>
+          <a:chOff x="0" y="0"/>
+          <a:chExt cx="0" cy="0"/>
+        </a:xfrm>
+      </p:grpSpPr>
+      <p:sp>
+        <p:nvSpPr>
+          <p:cNvPr id="2" name="Title 1">
+            <a:extLst>
+              <a:ext uri="{FF2B5EF4-FFF2-40B4-BE49-F238E27FC236}">
+                <a16:creationId xmlns:a16="http://schemas.microsoft.com/office/drawing/2014/main" id="{69FB02F0-5CF1-56C1-DD10-FFAB584D20E7}"/>
+              </a:ext>
+            </a:extLst>
+          </p:cNvPr>
+          <p:cNvSpPr>
+            <a:spLocks noGrp="1"/>
+          </p:cNvSpPr>
+          <p:nvPr>
+            <p:ph type="title"/>
+          </p:nvPr>
+        </p:nvSpPr>
+        <p:spPr/>
+        <p:txBody>
+          <a:bodyPr/>
+          <a:lstStyle/>
+          <a:p>
+            <a:r>
+              <a:rPr lang="en-US" dirty="0"/>
+              <a:t>Change Types</a:t>
+            </a:r>
+          </a:p>
+        </p:txBody>
+      </p:sp>
+      <p:sp>
+        <p:nvSpPr>
+          <p:cNvPr id="3" name="Content Placeholder 2">
+            <a:extLst>
+              <a:ext uri="{FF2B5EF4-FFF2-40B4-BE49-F238E27FC236}">
+                <a16:creationId xmlns:a16="http://schemas.microsoft.com/office/drawing/2014/main" id="{7221DC42-2694-ADC2-4855-D806E75AD6CC}"/>
+              </a:ext>
+            </a:extLst>
+          </p:cNvPr>
+          <p:cNvSpPr>
+            <a:spLocks noGrp="1"/>
+          </p:cNvSpPr>
+          <p:nvPr>
+            <p:ph idx="1"/>
+          </p:nvPr>
+        </p:nvSpPr>
+        <p:spPr/>
+        <p:txBody>
+          <a:bodyPr/>
+          <a:lstStyle/>
+          <a:p>
+            <a:r>
+              <a:rPr lang="en-US" dirty="0"/>
+              <a:t>Definition: </a:t>
+            </a:r>
+            <a:r>
+              <a:rPr lang="en-US" dirty="0">
+                <a:solidFill>
+                  <a:schemeClr val="accent2"/>
+                </a:solidFill>
+              </a:rPr>
+              <a:t>Standard Changes </a:t>
+            </a:r>
+            <a:r>
+              <a:rPr lang="en-US" dirty="0"/>
+              <a:t>are pre-authorized changes that are low-risk and don’t need to be assessed or authorized </a:t>
+            </a:r>
+          </a:p>
+          <a:p>
+            <a:pPr lvl="1"/>
+            <a:r>
+              <a:rPr lang="en-US" dirty="0"/>
+              <a:t>Example: provisioning a new employee’s email using a script</a:t>
+            </a:r>
+          </a:p>
+          <a:p>
+            <a:r>
+              <a:rPr lang="en-US" dirty="0"/>
+              <a:t>Definition:  An </a:t>
+            </a:r>
+            <a:r>
+              <a:rPr lang="en-US" dirty="0">
+                <a:solidFill>
+                  <a:schemeClr val="accent2"/>
+                </a:solidFill>
+              </a:rPr>
+              <a:t>Emergency Change </a:t>
+            </a:r>
+            <a:r>
+              <a:rPr lang="en-US" dirty="0"/>
+              <a:t>is a change that must be implemented as soon as possible</a:t>
+            </a:r>
+          </a:p>
+          <a:p>
+            <a:pPr lvl="1"/>
+            <a:r>
+              <a:rPr lang="en-US" dirty="0"/>
+              <a:t>Example: Deploying a zero-day security hotfix</a:t>
+            </a:r>
+          </a:p>
+          <a:p>
+            <a:r>
+              <a:rPr lang="en-US" dirty="0"/>
+              <a:t>Definition: A </a:t>
+            </a:r>
+            <a:r>
+              <a:rPr lang="en-US" dirty="0">
+                <a:solidFill>
+                  <a:schemeClr val="accent2"/>
+                </a:solidFill>
+              </a:rPr>
+              <a:t>Normal Change </a:t>
+            </a:r>
+            <a:r>
+              <a:rPr lang="en-US" dirty="0"/>
+              <a:t>is any service change that is not a standard or emergency change</a:t>
+            </a:r>
+          </a:p>
+          <a:p>
+            <a:pPr lvl="1"/>
+            <a:r>
+              <a:rPr lang="en-US" dirty="0"/>
+              <a:t>Example: Upgrading our database from v12 to v13</a:t>
+            </a:r>
+          </a:p>
+          <a:p>
+            <a:endParaRPr lang="en-US" dirty="0"/>
+          </a:p>
+          <a:p>
+            <a:pPr marL="0" indent="0" algn="ctr">
+              <a:buNone/>
+            </a:pPr>
+            <a:r>
+              <a:rPr lang="en-US" dirty="0"/>
+              <a:t>Changes are stored on [</a:t>
+            </a:r>
+            <a:r>
+              <a:rPr lang="en-US" dirty="0" err="1"/>
+              <a:t>change_request</a:t>
+            </a:r>
+            <a:r>
+              <a:rPr lang="en-US" dirty="0"/>
+              <a:t>]</a:t>
+            </a:r>
+          </a:p>
+        </p:txBody>
+      </p:sp>
+    </p:spTree>
+    <p:extLst>
+      <p:ext uri="{BB962C8B-B14F-4D97-AF65-F5344CB8AC3E}">
+        <p14:creationId xmlns:p14="http://schemas.microsoft.com/office/powerpoint/2010/main" val="3510581228"/>
+      </p:ext>
+    </p:extLst>
+  </p:cSld>
+  <p:clrMapOvr>
+    <a:masterClrMapping/>
+  </p:clrMapOvr>
+</p:sld>
+</file>
+
+<file path=ppt/slides/slide28.xml><?xml version="1.0" encoding="utf-8"?>
+<p:sld xmlns:a="http://schemas.openxmlformats.org/drawingml/2006/main" xmlns:r="http://schemas.openxmlformats.org/officeDocument/2006/relationships" xmlns:p="http://schemas.openxmlformats.org/presentationml/2006/main">
+  <p:cSld>
+    <p:spTree>
+      <p:nvGrpSpPr>
+        <p:cNvPr id="1" name=""/>
+        <p:cNvGrpSpPr/>
+        <p:nvPr/>
+      </p:nvGrpSpPr>
+      <p:grpSpPr>
+        <a:xfrm>
+          <a:off x="0" y="0"/>
+          <a:ext cx="0" cy="0"/>
+          <a:chOff x="0" y="0"/>
+          <a:chExt cx="0" cy="0"/>
+        </a:xfrm>
+      </p:grpSpPr>
+      <p:sp>
+        <p:nvSpPr>
+          <p:cNvPr id="2" name="Title 1">
+            <a:extLst>
+              <a:ext uri="{FF2B5EF4-FFF2-40B4-BE49-F238E27FC236}">
+                <a16:creationId xmlns:a16="http://schemas.microsoft.com/office/drawing/2014/main" id="{EB4F3E9E-7F68-4128-35D6-1D740E4FC0D8}"/>
+              </a:ext>
+            </a:extLst>
+          </p:cNvPr>
+          <p:cNvSpPr>
+            <a:spLocks noGrp="1"/>
+          </p:cNvSpPr>
+          <p:nvPr>
+            <p:ph type="title"/>
+          </p:nvPr>
+        </p:nvSpPr>
+        <p:spPr/>
+        <p:txBody>
+          <a:bodyPr/>
+          <a:lstStyle/>
+          <a:p>
+            <a:r>
+              <a:rPr lang="en-US" dirty="0"/>
+              <a:t>Governance Roles</a:t>
+            </a:r>
+          </a:p>
+        </p:txBody>
+      </p:sp>
+      <p:sp>
+        <p:nvSpPr>
+          <p:cNvPr id="3" name="Content Placeholder 2">
+            <a:extLst>
+              <a:ext uri="{FF2B5EF4-FFF2-40B4-BE49-F238E27FC236}">
+                <a16:creationId xmlns:a16="http://schemas.microsoft.com/office/drawing/2014/main" id="{0EF5678F-DBE8-28B0-A126-4328ABA22FD8}"/>
+              </a:ext>
+            </a:extLst>
+          </p:cNvPr>
+          <p:cNvSpPr>
+            <a:spLocks noGrp="1"/>
+          </p:cNvSpPr>
+          <p:nvPr>
+            <p:ph idx="1"/>
+          </p:nvPr>
+        </p:nvSpPr>
+        <p:spPr/>
+        <p:txBody>
+          <a:bodyPr/>
+          <a:lstStyle/>
+          <a:p>
+            <a:r>
+              <a:rPr lang="en-US" dirty="0"/>
+              <a:t>ITIL V4 introduced the Change Authority terminology, but CAB is still used too</a:t>
+            </a:r>
+          </a:p>
+          <a:p>
+            <a:r>
+              <a:rPr lang="en-US" dirty="0"/>
+              <a:t>Definition: A </a:t>
+            </a:r>
+            <a:r>
+              <a:rPr lang="en-US" dirty="0">
+                <a:solidFill>
+                  <a:schemeClr val="accent2"/>
+                </a:solidFill>
+              </a:rPr>
+              <a:t>Change Authority </a:t>
+            </a:r>
+            <a:r>
+              <a:rPr lang="en-US" dirty="0"/>
+              <a:t>is any mechanism by which change approval is granted </a:t>
+            </a:r>
+          </a:p>
+          <a:p>
+            <a:pPr lvl="1"/>
+            <a:r>
+              <a:rPr lang="en-US" dirty="0"/>
+              <a:t>A delegated team within the organization</a:t>
+            </a:r>
+          </a:p>
+          <a:p>
+            <a:pPr lvl="1"/>
+            <a:r>
+              <a:rPr lang="en-US" dirty="0"/>
+              <a:t>A peer review </a:t>
+            </a:r>
+          </a:p>
+          <a:p>
+            <a:pPr lvl="1"/>
+            <a:r>
+              <a:rPr lang="en-US" dirty="0"/>
+              <a:t>Automated approval processes in CI/CD pipelines</a:t>
+            </a:r>
+          </a:p>
+          <a:p>
+            <a:pPr lvl="1"/>
+            <a:r>
+              <a:rPr lang="en-US" dirty="0"/>
+              <a:t>Business stakeholders </a:t>
+            </a:r>
+          </a:p>
+          <a:p>
+            <a:r>
+              <a:rPr lang="en-US" dirty="0"/>
+              <a:t>Definition: A </a:t>
+            </a:r>
+            <a:r>
+              <a:rPr lang="en-US" dirty="0">
+                <a:solidFill>
+                  <a:schemeClr val="accent2"/>
+                </a:solidFill>
+              </a:rPr>
+              <a:t>Change Advisory Board (CAB) </a:t>
+            </a:r>
+            <a:r>
+              <a:rPr lang="en-US" dirty="0"/>
+              <a:t>is a committee that provides guidance and oversight on proposed changes, evaluating their impact and risks before approving</a:t>
+            </a:r>
+          </a:p>
+          <a:p>
+            <a:r>
+              <a:rPr lang="en-US" dirty="0"/>
+              <a:t>Definition: An </a:t>
+            </a:r>
+            <a:r>
+              <a:rPr lang="en-US" dirty="0">
+                <a:solidFill>
+                  <a:schemeClr val="accent2"/>
+                </a:solidFill>
+              </a:rPr>
+              <a:t>Emergency Change Advisory Board (ECAB) </a:t>
+            </a:r>
+            <a:r>
+              <a:rPr lang="en-US" dirty="0"/>
+              <a:t>is a flexible, rapid-response decision making group that is convened to assess and authorize emergency changes</a:t>
+            </a:r>
+          </a:p>
+        </p:txBody>
+      </p:sp>
+    </p:spTree>
+    <p:extLst>
+      <p:ext uri="{BB962C8B-B14F-4D97-AF65-F5344CB8AC3E}">
+        <p14:creationId xmlns:p14="http://schemas.microsoft.com/office/powerpoint/2010/main" val="203190173"/>
+      </p:ext>
+    </p:extLst>
+  </p:cSld>
+  <p:clrMapOvr>
+    <a:masterClrMapping/>
+  </p:clrMapOvr>
+</p:sld>
+</file>
+
+<file path=ppt/slides/slide29.xml><?xml version="1.0" encoding="utf-8"?>
+<p:sld xmlns:a="http://schemas.openxmlformats.org/drawingml/2006/main" xmlns:r="http://schemas.openxmlformats.org/officeDocument/2006/relationships" xmlns:p="http://schemas.openxmlformats.org/presentationml/2006/main">
+  <p:cSld>
+    <p:spTree>
+      <p:nvGrpSpPr>
+        <p:cNvPr id="1" name=""/>
+        <p:cNvGrpSpPr/>
+        <p:nvPr/>
+      </p:nvGrpSpPr>
+      <p:grpSpPr>
+        <a:xfrm>
+          <a:off x="0" y="0"/>
+          <a:ext cx="0" cy="0"/>
+          <a:chOff x="0" y="0"/>
+          <a:chExt cx="0" cy="0"/>
+        </a:xfrm>
+      </p:grpSpPr>
+      <p:sp>
+        <p:nvSpPr>
+          <p:cNvPr id="2" name="Title 1">
+            <a:extLst>
+              <a:ext uri="{FF2B5EF4-FFF2-40B4-BE49-F238E27FC236}">
+                <a16:creationId xmlns:a16="http://schemas.microsoft.com/office/drawing/2014/main" id="{5F45A74A-8767-3F0D-E3AD-9A87A5F3155E}"/>
+              </a:ext>
+            </a:extLst>
+          </p:cNvPr>
+          <p:cNvSpPr>
+            <a:spLocks noGrp="1"/>
+          </p:cNvSpPr>
+          <p:nvPr>
+            <p:ph type="title"/>
+          </p:nvPr>
+        </p:nvSpPr>
+        <p:spPr/>
+        <p:txBody>
+          <a:bodyPr/>
+          <a:lstStyle/>
+          <a:p>
+            <a:r>
+              <a:rPr lang="en-US" dirty="0"/>
+              <a:t>Key Change Enablement Features</a:t>
+            </a:r>
+          </a:p>
+        </p:txBody>
+      </p:sp>
+      <p:sp>
+        <p:nvSpPr>
+          <p:cNvPr id="3" name="Content Placeholder 2">
+            <a:extLst>
+              <a:ext uri="{FF2B5EF4-FFF2-40B4-BE49-F238E27FC236}">
+                <a16:creationId xmlns:a16="http://schemas.microsoft.com/office/drawing/2014/main" id="{65DD9CC2-6FEE-A4B2-3868-E4FF6C870A1D}"/>
+              </a:ext>
+            </a:extLst>
+          </p:cNvPr>
+          <p:cNvSpPr>
+            <a:spLocks noGrp="1"/>
+          </p:cNvSpPr>
+          <p:nvPr>
+            <p:ph idx="1"/>
+          </p:nvPr>
+        </p:nvSpPr>
+        <p:spPr>
+          <a:xfrm>
+            <a:off x="581192" y="1945759"/>
+            <a:ext cx="11029616" cy="4008734"/>
+          </a:xfrm>
+        </p:spPr>
+        <p:txBody>
+          <a:bodyPr>
+            <a:normAutofit/>
+          </a:bodyPr>
+          <a:lstStyle/>
+          <a:p>
+            <a:r>
+              <a:rPr lang="en-US" dirty="0"/>
+              <a:t>The </a:t>
+            </a:r>
+            <a:r>
+              <a:rPr lang="en-US" dirty="0">
+                <a:solidFill>
+                  <a:schemeClr val="accent2"/>
+                </a:solidFill>
+              </a:rPr>
+              <a:t>change request record </a:t>
+            </a:r>
+            <a:r>
+              <a:rPr lang="en-US" dirty="0"/>
+              <a:t>on the [</a:t>
+            </a:r>
+            <a:r>
+              <a:rPr lang="en-US" dirty="0" err="1"/>
+              <a:t>change_request</a:t>
+            </a:r>
+            <a:r>
+              <a:rPr lang="en-US" dirty="0"/>
+              <a:t>] table</a:t>
+            </a:r>
+          </a:p>
+          <a:p>
+            <a:r>
+              <a:rPr lang="en-US" dirty="0"/>
+              <a:t>Definition: </a:t>
+            </a:r>
+            <a:r>
+              <a:rPr lang="en-US" dirty="0">
+                <a:solidFill>
+                  <a:schemeClr val="accent2"/>
+                </a:solidFill>
+              </a:rPr>
+              <a:t>Risk Conditions </a:t>
+            </a:r>
+            <a:r>
+              <a:rPr lang="en-US" dirty="0"/>
+              <a:t>automatically calculate the risk field of a change record </a:t>
+            </a:r>
+          </a:p>
+          <a:p>
+            <a:pPr lvl="1"/>
+            <a:r>
+              <a:rPr lang="en-US" dirty="0"/>
+              <a:t>Bulit-in by default</a:t>
+            </a:r>
+          </a:p>
+          <a:p>
+            <a:pPr lvl="1"/>
+            <a:r>
+              <a:rPr lang="en-US" dirty="0"/>
+              <a:t>Risk Assessment plugin is an optional alternative. It calculates a weighted score from assessment questions (</a:t>
+            </a:r>
+            <a:r>
+              <a:rPr lang="en-US" dirty="0" err="1"/>
+              <a:t>com.snc.change_management.risk_assessment</a:t>
+            </a:r>
+            <a:r>
+              <a:rPr lang="en-US" dirty="0"/>
+              <a:t>)</a:t>
+            </a:r>
+          </a:p>
+          <a:p>
+            <a:r>
+              <a:rPr lang="en-US" dirty="0"/>
+              <a:t>Definition: </a:t>
+            </a:r>
+            <a:r>
+              <a:rPr lang="en-US" dirty="0">
+                <a:solidFill>
+                  <a:schemeClr val="accent2"/>
+                </a:solidFill>
+              </a:rPr>
+              <a:t>Change Schedules </a:t>
+            </a:r>
+            <a:r>
+              <a:rPr lang="en-US" dirty="0"/>
+              <a:t>show us a calendar view that overlays our planned changes with blackout &amp; maintenance windows  </a:t>
+            </a:r>
+          </a:p>
+          <a:p>
+            <a:pPr lvl="1"/>
+            <a:r>
+              <a:rPr lang="en-US" dirty="0"/>
+              <a:t>Helps spot conflicts </a:t>
+            </a:r>
+          </a:p>
+          <a:p>
+            <a:r>
+              <a:rPr lang="en-US" dirty="0"/>
+              <a:t>Definition</a:t>
+            </a:r>
+            <a:r>
+              <a:rPr lang="en-US" dirty="0">
+                <a:solidFill>
+                  <a:schemeClr val="accent2"/>
+                </a:solidFill>
+              </a:rPr>
+              <a:t>: Change Approval Policies </a:t>
+            </a:r>
+            <a:r>
+              <a:rPr lang="en-US" dirty="0"/>
+              <a:t>decide who must approve a change, when, and under what conditions </a:t>
+            </a:r>
+          </a:p>
+          <a:p>
+            <a:r>
+              <a:rPr lang="en-US" dirty="0"/>
+              <a:t>Definition: </a:t>
+            </a:r>
+            <a:r>
+              <a:rPr lang="en-US" dirty="0">
+                <a:solidFill>
+                  <a:schemeClr val="accent2"/>
+                </a:solidFill>
+              </a:rPr>
+              <a:t>The CAB Workbench </a:t>
+            </a:r>
+            <a:r>
+              <a:rPr lang="en-US" dirty="0"/>
+              <a:t>is a built-in place to manage CAB meetings</a:t>
+            </a:r>
+          </a:p>
+        </p:txBody>
+      </p:sp>
+    </p:spTree>
+    <p:extLst>
+      <p:ext uri="{BB962C8B-B14F-4D97-AF65-F5344CB8AC3E}">
+        <p14:creationId xmlns:p14="http://schemas.microsoft.com/office/powerpoint/2010/main" val="793387103"/>
       </p:ext>
     </p:extLst>
   </p:cSld>
@@ -6894,6 +7843,1799 @@
 </p:sld>
 </file>
 
+<file path=ppt/slides/slide30.xml><?xml version="1.0" encoding="utf-8"?>
+<p:sld xmlns:a="http://schemas.openxmlformats.org/drawingml/2006/main" xmlns:r="http://schemas.openxmlformats.org/officeDocument/2006/relationships" xmlns:p="http://schemas.openxmlformats.org/presentationml/2006/main">
+  <p:cSld>
+    <p:spTree>
+      <p:nvGrpSpPr>
+        <p:cNvPr id="1" name=""/>
+        <p:cNvGrpSpPr/>
+        <p:nvPr/>
+      </p:nvGrpSpPr>
+      <p:grpSpPr>
+        <a:xfrm>
+          <a:off x="0" y="0"/>
+          <a:ext cx="0" cy="0"/>
+          <a:chOff x="0" y="0"/>
+          <a:chExt cx="0" cy="0"/>
+        </a:xfrm>
+      </p:grpSpPr>
+      <p:sp>
+        <p:nvSpPr>
+          <p:cNvPr id="2" name="Title 1">
+            <a:extLst>
+              <a:ext uri="{FF2B5EF4-FFF2-40B4-BE49-F238E27FC236}">
+                <a16:creationId xmlns:a16="http://schemas.microsoft.com/office/drawing/2014/main" id="{56A8CF73-FED4-CD29-1B92-24E7D67A4D06}"/>
+              </a:ext>
+            </a:extLst>
+          </p:cNvPr>
+          <p:cNvSpPr>
+            <a:spLocks noGrp="1"/>
+          </p:cNvSpPr>
+          <p:nvPr>
+            <p:ph type="title"/>
+          </p:nvPr>
+        </p:nvSpPr>
+        <p:spPr/>
+        <p:txBody>
+          <a:bodyPr/>
+          <a:lstStyle/>
+          <a:p>
+            <a:r>
+              <a:rPr lang="en-US" dirty="0"/>
+              <a:t>Creating Change Requests</a:t>
+            </a:r>
+          </a:p>
+        </p:txBody>
+      </p:sp>
+      <p:sp>
+        <p:nvSpPr>
+          <p:cNvPr id="3" name="Content Placeholder 2">
+            <a:extLst>
+              <a:ext uri="{FF2B5EF4-FFF2-40B4-BE49-F238E27FC236}">
+                <a16:creationId xmlns:a16="http://schemas.microsoft.com/office/drawing/2014/main" id="{0CBCF200-E008-51D2-AB18-BB8E2DE540F2}"/>
+              </a:ext>
+            </a:extLst>
+          </p:cNvPr>
+          <p:cNvSpPr>
+            <a:spLocks noGrp="1"/>
+          </p:cNvSpPr>
+          <p:nvPr>
+            <p:ph idx="1"/>
+          </p:nvPr>
+        </p:nvSpPr>
+        <p:spPr>
+          <a:xfrm>
+            <a:off x="581193" y="2180496"/>
+            <a:ext cx="4086500" cy="3678303"/>
+          </a:xfrm>
+        </p:spPr>
+        <p:txBody>
+          <a:bodyPr/>
+          <a:lstStyle/>
+          <a:p>
+            <a:r>
+              <a:rPr lang="en-US" dirty="0"/>
+              <a:t>Change &gt; Create New</a:t>
+            </a:r>
+          </a:p>
+        </p:txBody>
+      </p:sp>
+      <p:pic>
+        <p:nvPicPr>
+          <p:cNvPr id="5" name="Picture 4">
+            <a:extLst>
+              <a:ext uri="{FF2B5EF4-FFF2-40B4-BE49-F238E27FC236}">
+                <a16:creationId xmlns:a16="http://schemas.microsoft.com/office/drawing/2014/main" id="{8CCFB271-FF66-7175-5938-E8026B70A28E}"/>
+              </a:ext>
+            </a:extLst>
+          </p:cNvPr>
+          <p:cNvPicPr>
+            <a:picLocks noChangeAspect="1"/>
+          </p:cNvPicPr>
+          <p:nvPr/>
+        </p:nvPicPr>
+        <p:blipFill>
+          <a:blip r:embed="rId2"/>
+          <a:stretch>
+            <a:fillRect/>
+          </a:stretch>
+        </p:blipFill>
+        <p:spPr>
+          <a:xfrm>
+            <a:off x="5082308" y="2624148"/>
+            <a:ext cx="6705600" cy="2888500"/>
+          </a:xfrm>
+          <a:prstGeom prst="rect">
+            <a:avLst/>
+          </a:prstGeom>
+        </p:spPr>
+      </p:pic>
+    </p:spTree>
+    <p:extLst>
+      <p:ext uri="{BB962C8B-B14F-4D97-AF65-F5344CB8AC3E}">
+        <p14:creationId xmlns:p14="http://schemas.microsoft.com/office/powerpoint/2010/main" val="1524795027"/>
+      </p:ext>
+    </p:extLst>
+  </p:cSld>
+  <p:clrMapOvr>
+    <a:masterClrMapping/>
+  </p:clrMapOvr>
+</p:sld>
+</file>
+
+<file path=ppt/slides/slide31.xml><?xml version="1.0" encoding="utf-8"?>
+<p:sld xmlns:a="http://schemas.openxmlformats.org/drawingml/2006/main" xmlns:r="http://schemas.openxmlformats.org/officeDocument/2006/relationships" xmlns:p="http://schemas.openxmlformats.org/presentationml/2006/main">
+  <p:cSld>
+    <p:spTree>
+      <p:nvGrpSpPr>
+        <p:cNvPr id="1" name=""/>
+        <p:cNvGrpSpPr/>
+        <p:nvPr/>
+      </p:nvGrpSpPr>
+      <p:grpSpPr>
+        <a:xfrm>
+          <a:off x="0" y="0"/>
+          <a:ext cx="0" cy="0"/>
+          <a:chOff x="0" y="0"/>
+          <a:chExt cx="0" cy="0"/>
+        </a:xfrm>
+      </p:grpSpPr>
+      <p:sp>
+        <p:nvSpPr>
+          <p:cNvPr id="2" name="Title 1">
+            <a:extLst>
+              <a:ext uri="{FF2B5EF4-FFF2-40B4-BE49-F238E27FC236}">
+                <a16:creationId xmlns:a16="http://schemas.microsoft.com/office/drawing/2014/main" id="{F8CC8597-C696-A85C-D5BF-4E865E6AC595}"/>
+              </a:ext>
+            </a:extLst>
+          </p:cNvPr>
+          <p:cNvSpPr>
+            <a:spLocks noGrp="1"/>
+          </p:cNvSpPr>
+          <p:nvPr>
+            <p:ph type="title"/>
+          </p:nvPr>
+        </p:nvSpPr>
+        <p:spPr/>
+        <p:txBody>
+          <a:bodyPr/>
+          <a:lstStyle/>
+          <a:p>
+            <a:r>
+              <a:rPr lang="en-US" dirty="0"/>
+              <a:t>Risk Conditions</a:t>
+            </a:r>
+          </a:p>
+        </p:txBody>
+      </p:sp>
+      <p:sp>
+        <p:nvSpPr>
+          <p:cNvPr id="3" name="Content Placeholder 2">
+            <a:extLst>
+              <a:ext uri="{FF2B5EF4-FFF2-40B4-BE49-F238E27FC236}">
+                <a16:creationId xmlns:a16="http://schemas.microsoft.com/office/drawing/2014/main" id="{80B2CE4A-A1DE-0EA7-6D50-5E5028ADCF06}"/>
+              </a:ext>
+            </a:extLst>
+          </p:cNvPr>
+          <p:cNvSpPr>
+            <a:spLocks noGrp="1"/>
+          </p:cNvSpPr>
+          <p:nvPr>
+            <p:ph idx="1"/>
+          </p:nvPr>
+        </p:nvSpPr>
+        <p:spPr>
+          <a:xfrm>
+            <a:off x="581192" y="2180497"/>
+            <a:ext cx="11029615" cy="1013800"/>
+          </a:xfrm>
+        </p:spPr>
+        <p:txBody>
+          <a:bodyPr>
+            <a:normAutofit fontScale="92500" lnSpcReduction="20000"/>
+          </a:bodyPr>
+          <a:lstStyle/>
+          <a:p>
+            <a:r>
+              <a:rPr lang="en-US" dirty="0"/>
+              <a:t>Find ‘Risk Conditions’ with the filter navigator</a:t>
+            </a:r>
+          </a:p>
+          <a:p>
+            <a:r>
+              <a:rPr lang="en-US" dirty="0"/>
+              <a:t>Set the conditions that a change record must meet</a:t>
+            </a:r>
+          </a:p>
+          <a:p>
+            <a:r>
+              <a:rPr lang="en-US" dirty="0"/>
+              <a:t>Determine what risk and impact to set as a result</a:t>
+            </a:r>
+          </a:p>
+        </p:txBody>
+      </p:sp>
+      <p:pic>
+        <p:nvPicPr>
+          <p:cNvPr id="5" name="Picture 4">
+            <a:extLst>
+              <a:ext uri="{FF2B5EF4-FFF2-40B4-BE49-F238E27FC236}">
+                <a16:creationId xmlns:a16="http://schemas.microsoft.com/office/drawing/2014/main" id="{31A1ED5A-560A-2E97-FE0E-1D56D1940B0D}"/>
+              </a:ext>
+            </a:extLst>
+          </p:cNvPr>
+          <p:cNvPicPr>
+            <a:picLocks noChangeAspect="1"/>
+          </p:cNvPicPr>
+          <p:nvPr/>
+        </p:nvPicPr>
+        <p:blipFill>
+          <a:blip r:embed="rId2"/>
+          <a:stretch>
+            <a:fillRect/>
+          </a:stretch>
+        </p:blipFill>
+        <p:spPr>
+          <a:xfrm>
+            <a:off x="1056279" y="3476725"/>
+            <a:ext cx="10079442" cy="2679119"/>
+          </a:xfrm>
+          <a:prstGeom prst="rect">
+            <a:avLst/>
+          </a:prstGeom>
+        </p:spPr>
+      </p:pic>
+    </p:spTree>
+    <p:extLst>
+      <p:ext uri="{BB962C8B-B14F-4D97-AF65-F5344CB8AC3E}">
+        <p14:creationId xmlns:p14="http://schemas.microsoft.com/office/powerpoint/2010/main" val="3024211928"/>
+      </p:ext>
+    </p:extLst>
+  </p:cSld>
+  <p:clrMapOvr>
+    <a:masterClrMapping/>
+  </p:clrMapOvr>
+</p:sld>
+</file>
+
+<file path=ppt/slides/slide32.xml><?xml version="1.0" encoding="utf-8"?>
+<p:sld xmlns:a="http://schemas.openxmlformats.org/drawingml/2006/main" xmlns:r="http://schemas.openxmlformats.org/officeDocument/2006/relationships" xmlns:p="http://schemas.openxmlformats.org/presentationml/2006/main">
+  <p:cSld>
+    <p:spTree>
+      <p:nvGrpSpPr>
+        <p:cNvPr id="1" name="">
+          <a:extLst>
+            <a:ext uri="{FF2B5EF4-FFF2-40B4-BE49-F238E27FC236}">
+              <a16:creationId xmlns:a16="http://schemas.microsoft.com/office/drawing/2014/main" id="{35A4C0E0-4B5F-4D04-CF0D-371E3EF35BCA}"/>
+            </a:ext>
+          </a:extLst>
+        </p:cNvPr>
+        <p:cNvGrpSpPr/>
+        <p:nvPr/>
+      </p:nvGrpSpPr>
+      <p:grpSpPr>
+        <a:xfrm>
+          <a:off x="0" y="0"/>
+          <a:ext cx="0" cy="0"/>
+          <a:chOff x="0" y="0"/>
+          <a:chExt cx="0" cy="0"/>
+        </a:xfrm>
+      </p:grpSpPr>
+      <p:sp>
+        <p:nvSpPr>
+          <p:cNvPr id="2" name="Title 1">
+            <a:extLst>
+              <a:ext uri="{FF2B5EF4-FFF2-40B4-BE49-F238E27FC236}">
+                <a16:creationId xmlns:a16="http://schemas.microsoft.com/office/drawing/2014/main" id="{B423DC1A-F80A-6741-1DEC-475D69122E5A}"/>
+              </a:ext>
+            </a:extLst>
+          </p:cNvPr>
+          <p:cNvSpPr>
+            <a:spLocks noGrp="1"/>
+          </p:cNvSpPr>
+          <p:nvPr>
+            <p:ph type="title"/>
+          </p:nvPr>
+        </p:nvSpPr>
+        <p:spPr/>
+        <p:txBody>
+          <a:bodyPr/>
+          <a:lstStyle/>
+          <a:p>
+            <a:r>
+              <a:rPr lang="en-US" dirty="0"/>
+              <a:t>Challenge</a:t>
+            </a:r>
+          </a:p>
+        </p:txBody>
+      </p:sp>
+      <p:sp>
+        <p:nvSpPr>
+          <p:cNvPr id="3" name="Content Placeholder 2">
+            <a:extLst>
+              <a:ext uri="{FF2B5EF4-FFF2-40B4-BE49-F238E27FC236}">
+                <a16:creationId xmlns:a16="http://schemas.microsoft.com/office/drawing/2014/main" id="{3CFC8E64-5FC8-F426-4F76-6CF217290115}"/>
+              </a:ext>
+            </a:extLst>
+          </p:cNvPr>
+          <p:cNvSpPr>
+            <a:spLocks noGrp="1"/>
+          </p:cNvSpPr>
+          <p:nvPr>
+            <p:ph idx="1"/>
+          </p:nvPr>
+        </p:nvSpPr>
+        <p:spPr>
+          <a:xfrm>
+            <a:off x="6418729" y="2382416"/>
+            <a:ext cx="5192079" cy="2093167"/>
+          </a:xfrm>
+        </p:spPr>
+        <p:txBody>
+          <a:bodyPr>
+            <a:normAutofit/>
+          </a:bodyPr>
+          <a:lstStyle/>
+          <a:p>
+            <a:pPr marL="0" indent="0">
+              <a:buNone/>
+            </a:pPr>
+            <a:r>
+              <a:rPr lang="en-US" b="1" dirty="0"/>
+              <a:t>Scenario: </a:t>
+            </a:r>
+          </a:p>
+          <a:p>
+            <a:pPr marL="305435" indent="-305435"/>
+            <a:r>
+              <a:rPr lang="en-US" dirty="0">
+                <a:ea typeface="+mn-lt"/>
+                <a:cs typeface="+mn-lt"/>
+              </a:rPr>
+              <a:t>When a change request is made and category is ‘Hardware’ and the service offering is ‘Training’, set the risk and impact to ‘High’ </a:t>
+            </a:r>
+          </a:p>
+        </p:txBody>
+      </p:sp>
+      <p:sp>
+        <p:nvSpPr>
+          <p:cNvPr id="4" name="Content Placeholder 2">
+            <a:extLst>
+              <a:ext uri="{FF2B5EF4-FFF2-40B4-BE49-F238E27FC236}">
+                <a16:creationId xmlns:a16="http://schemas.microsoft.com/office/drawing/2014/main" id="{48E7896F-2A6C-ED21-CB0F-6237AEC1BED7}"/>
+              </a:ext>
+            </a:extLst>
+          </p:cNvPr>
+          <p:cNvSpPr txBox="1">
+            <a:spLocks/>
+          </p:cNvSpPr>
+          <p:nvPr/>
+        </p:nvSpPr>
+        <p:spPr>
+          <a:xfrm>
+            <a:off x="903921" y="2666662"/>
+            <a:ext cx="5192079" cy="1013801"/>
+          </a:xfrm>
+          <a:prstGeom prst="rect">
+            <a:avLst/>
+          </a:prstGeom>
+        </p:spPr>
+        <p:txBody>
+          <a:bodyPr vert="horz" lIns="91440" tIns="45720" rIns="91440" bIns="45720" rtlCol="0" anchor="ctr">
+            <a:normAutofit/>
+          </a:bodyPr>
+          <a:lstStyle>
+            <a:lvl1pPr marL="306000" indent="-306000" algn="l" defTabSz="457200" rtl="0" eaLnBrk="1" latinLnBrk="0" hangingPunct="1">
+              <a:spcBef>
+                <a:spcPct val="20000"/>
+              </a:spcBef>
+              <a:spcAft>
+                <a:spcPts val="600"/>
+              </a:spcAft>
+              <a:buClr>
+                <a:schemeClr val="accent2"/>
+              </a:buClr>
+              <a:buSzPct val="92000"/>
+              <a:buFont typeface="Wingdings 2" panose="05020102010507070707" pitchFamily="18" charset="2"/>
+              <a:buChar char=""/>
+              <a:defRPr sz="1800" kern="1200">
+                <a:solidFill>
+                  <a:schemeClr val="tx2"/>
+                </a:solidFill>
+                <a:latin typeface="+mn-lt"/>
+                <a:ea typeface="+mn-ea"/>
+                <a:cs typeface="+mn-cs"/>
+              </a:defRPr>
+            </a:lvl1pPr>
+            <a:lvl2pPr marL="630000" indent="-306000" algn="l" defTabSz="457200" rtl="0" eaLnBrk="1" latinLnBrk="0" hangingPunct="1">
+              <a:spcBef>
+                <a:spcPct val="20000"/>
+              </a:spcBef>
+              <a:spcAft>
+                <a:spcPts val="600"/>
+              </a:spcAft>
+              <a:buClr>
+                <a:schemeClr val="accent2"/>
+              </a:buClr>
+              <a:buSzPct val="92000"/>
+              <a:buFont typeface="Wingdings 2" panose="05020102010507070707" pitchFamily="18" charset="2"/>
+              <a:buChar char=""/>
+              <a:defRPr sz="1600" kern="1200">
+                <a:solidFill>
+                  <a:schemeClr val="tx2"/>
+                </a:solidFill>
+                <a:latin typeface="+mn-lt"/>
+                <a:ea typeface="+mn-ea"/>
+                <a:cs typeface="+mn-cs"/>
+              </a:defRPr>
+            </a:lvl2pPr>
+            <a:lvl3pPr marL="900000" indent="-270000" algn="l" defTabSz="457200" rtl="0" eaLnBrk="1" latinLnBrk="0" hangingPunct="1">
+              <a:spcBef>
+                <a:spcPct val="20000"/>
+              </a:spcBef>
+              <a:spcAft>
+                <a:spcPts val="600"/>
+              </a:spcAft>
+              <a:buClr>
+                <a:schemeClr val="accent2"/>
+              </a:buClr>
+              <a:buSzPct val="92000"/>
+              <a:buFont typeface="Wingdings 2" panose="05020102010507070707" pitchFamily="18" charset="2"/>
+              <a:buChar char=""/>
+              <a:defRPr sz="1400" kern="1200">
+                <a:solidFill>
+                  <a:schemeClr val="tx2"/>
+                </a:solidFill>
+                <a:latin typeface="+mn-lt"/>
+                <a:ea typeface="+mn-ea"/>
+                <a:cs typeface="+mn-cs"/>
+              </a:defRPr>
+            </a:lvl3pPr>
+            <a:lvl4pPr marL="1242000" indent="-234000" algn="l" defTabSz="457200" rtl="0" eaLnBrk="1" latinLnBrk="0" hangingPunct="1">
+              <a:spcBef>
+                <a:spcPct val="20000"/>
+              </a:spcBef>
+              <a:spcAft>
+                <a:spcPts val="600"/>
+              </a:spcAft>
+              <a:buClr>
+                <a:schemeClr val="accent2"/>
+              </a:buClr>
+              <a:buSzPct val="92000"/>
+              <a:buFont typeface="Wingdings 2" panose="05020102010507070707" pitchFamily="18" charset="2"/>
+              <a:buChar char=""/>
+              <a:defRPr sz="1200" kern="1200">
+                <a:solidFill>
+                  <a:schemeClr val="tx2"/>
+                </a:solidFill>
+                <a:latin typeface="+mn-lt"/>
+                <a:ea typeface="+mn-ea"/>
+                <a:cs typeface="+mn-cs"/>
+              </a:defRPr>
+            </a:lvl4pPr>
+            <a:lvl5pPr marL="1602000" indent="-234000" algn="l" defTabSz="457200" rtl="0" eaLnBrk="1" latinLnBrk="0" hangingPunct="1">
+              <a:spcBef>
+                <a:spcPct val="20000"/>
+              </a:spcBef>
+              <a:spcAft>
+                <a:spcPts val="600"/>
+              </a:spcAft>
+              <a:buClr>
+                <a:schemeClr val="accent2"/>
+              </a:buClr>
+              <a:buSzPct val="92000"/>
+              <a:buFont typeface="Wingdings 2" panose="05020102010507070707" pitchFamily="18" charset="2"/>
+              <a:buChar char=""/>
+              <a:defRPr sz="1200" kern="1200">
+                <a:solidFill>
+                  <a:schemeClr val="tx2"/>
+                </a:solidFill>
+                <a:latin typeface="+mn-lt"/>
+                <a:ea typeface="+mn-ea"/>
+                <a:cs typeface="+mn-cs"/>
+              </a:defRPr>
+            </a:lvl5pPr>
+            <a:lvl6pPr marL="1900000" indent="-228600" algn="l" defTabSz="457200" rtl="0" eaLnBrk="1" latinLnBrk="0" hangingPunct="1">
+              <a:spcBef>
+                <a:spcPct val="20000"/>
+              </a:spcBef>
+              <a:spcAft>
+                <a:spcPts val="600"/>
+              </a:spcAft>
+              <a:buClr>
+                <a:schemeClr val="accent2"/>
+              </a:buClr>
+              <a:buSzPct val="92000"/>
+              <a:buFont typeface="Wingdings 2" panose="05020102010507070707" pitchFamily="18" charset="2"/>
+              <a:buChar char=""/>
+              <a:defRPr sz="1200" kern="1200">
+                <a:solidFill>
+                  <a:schemeClr val="tx2"/>
+                </a:solidFill>
+                <a:latin typeface="+mn-lt"/>
+                <a:ea typeface="+mn-ea"/>
+                <a:cs typeface="+mn-cs"/>
+              </a:defRPr>
+            </a:lvl6pPr>
+            <a:lvl7pPr marL="2200000" indent="-228600" algn="l" defTabSz="457200" rtl="0" eaLnBrk="1" latinLnBrk="0" hangingPunct="1">
+              <a:spcBef>
+                <a:spcPct val="20000"/>
+              </a:spcBef>
+              <a:spcAft>
+                <a:spcPts val="600"/>
+              </a:spcAft>
+              <a:buClr>
+                <a:schemeClr val="accent2"/>
+              </a:buClr>
+              <a:buSzPct val="92000"/>
+              <a:buFont typeface="Wingdings 2" panose="05020102010507070707" pitchFamily="18" charset="2"/>
+              <a:buChar char=""/>
+              <a:defRPr sz="1200" kern="1200">
+                <a:solidFill>
+                  <a:schemeClr val="tx2"/>
+                </a:solidFill>
+                <a:latin typeface="+mn-lt"/>
+                <a:ea typeface="+mn-ea"/>
+                <a:cs typeface="+mn-cs"/>
+              </a:defRPr>
+            </a:lvl7pPr>
+            <a:lvl8pPr marL="2500000" indent="-228600" algn="l" defTabSz="457200" rtl="0" eaLnBrk="1" latinLnBrk="0" hangingPunct="1">
+              <a:spcBef>
+                <a:spcPct val="20000"/>
+              </a:spcBef>
+              <a:spcAft>
+                <a:spcPts val="600"/>
+              </a:spcAft>
+              <a:buClr>
+                <a:schemeClr val="accent2"/>
+              </a:buClr>
+              <a:buSzPct val="92000"/>
+              <a:buFont typeface="Wingdings 2" panose="05020102010507070707" pitchFamily="18" charset="2"/>
+              <a:buChar char=""/>
+              <a:defRPr sz="1200" kern="1200">
+                <a:solidFill>
+                  <a:schemeClr val="tx2"/>
+                </a:solidFill>
+                <a:latin typeface="+mn-lt"/>
+                <a:ea typeface="+mn-ea"/>
+                <a:cs typeface="+mn-cs"/>
+              </a:defRPr>
+            </a:lvl8pPr>
+            <a:lvl9pPr marL="2800000" indent="-228600" algn="l" defTabSz="457200" rtl="0" eaLnBrk="1" latinLnBrk="0" hangingPunct="1">
+              <a:spcBef>
+                <a:spcPct val="20000"/>
+              </a:spcBef>
+              <a:spcAft>
+                <a:spcPts val="600"/>
+              </a:spcAft>
+              <a:buClr>
+                <a:schemeClr val="accent2"/>
+              </a:buClr>
+              <a:buSzPct val="92000"/>
+              <a:buFont typeface="Wingdings 2" panose="05020102010507070707" pitchFamily="18" charset="2"/>
+              <a:buChar char=""/>
+              <a:defRPr sz="1200" kern="1200">
+                <a:solidFill>
+                  <a:schemeClr val="tx2"/>
+                </a:solidFill>
+                <a:latin typeface="+mn-lt"/>
+                <a:ea typeface="+mn-ea"/>
+                <a:cs typeface="+mn-cs"/>
+              </a:defRPr>
+            </a:lvl9pPr>
+          </a:lstStyle>
+          <a:p>
+            <a:pPr marL="0" indent="0">
+              <a:buFont typeface="Wingdings 2" panose="05020102010507070707" pitchFamily="18" charset="2"/>
+              <a:buNone/>
+            </a:pPr>
+            <a:r>
+              <a:rPr lang="en-US" b="1" dirty="0"/>
+              <a:t>Goal: </a:t>
+            </a:r>
+          </a:p>
+          <a:p>
+            <a:pPr marL="305435" indent="-305435"/>
+            <a:r>
+              <a:rPr lang="en-US" dirty="0"/>
+              <a:t>Create a new risk condition</a:t>
+            </a:r>
+            <a:endParaRPr lang="en-US" dirty="0">
+              <a:ea typeface="+mn-lt"/>
+              <a:cs typeface="+mn-lt"/>
+            </a:endParaRPr>
+          </a:p>
+        </p:txBody>
+      </p:sp>
+    </p:spTree>
+    <p:extLst>
+      <p:ext uri="{BB962C8B-B14F-4D97-AF65-F5344CB8AC3E}">
+        <p14:creationId xmlns:p14="http://schemas.microsoft.com/office/powerpoint/2010/main" val="2005833916"/>
+      </p:ext>
+    </p:extLst>
+  </p:cSld>
+  <p:clrMapOvr>
+    <a:masterClrMapping/>
+  </p:clrMapOvr>
+</p:sld>
+</file>
+
+<file path=ppt/slides/slide33.xml><?xml version="1.0" encoding="utf-8"?>
+<p:sld xmlns:a="http://schemas.openxmlformats.org/drawingml/2006/main" xmlns:r="http://schemas.openxmlformats.org/officeDocument/2006/relationships" xmlns:p="http://schemas.openxmlformats.org/presentationml/2006/main">
+  <p:cSld>
+    <p:spTree>
+      <p:nvGrpSpPr>
+        <p:cNvPr id="1" name=""/>
+        <p:cNvGrpSpPr/>
+        <p:nvPr/>
+      </p:nvGrpSpPr>
+      <p:grpSpPr>
+        <a:xfrm>
+          <a:off x="0" y="0"/>
+          <a:ext cx="0" cy="0"/>
+          <a:chOff x="0" y="0"/>
+          <a:chExt cx="0" cy="0"/>
+        </a:xfrm>
+      </p:grpSpPr>
+      <p:sp>
+        <p:nvSpPr>
+          <p:cNvPr id="2" name="Title 1">
+            <a:extLst>
+              <a:ext uri="{FF2B5EF4-FFF2-40B4-BE49-F238E27FC236}">
+                <a16:creationId xmlns:a16="http://schemas.microsoft.com/office/drawing/2014/main" id="{3E213EBF-3735-403A-79BD-0226395D0E64}"/>
+              </a:ext>
+            </a:extLst>
+          </p:cNvPr>
+          <p:cNvSpPr>
+            <a:spLocks noGrp="1"/>
+          </p:cNvSpPr>
+          <p:nvPr>
+            <p:ph type="title"/>
+          </p:nvPr>
+        </p:nvSpPr>
+        <p:spPr/>
+        <p:txBody>
+          <a:bodyPr/>
+          <a:lstStyle/>
+          <a:p>
+            <a:r>
+              <a:rPr lang="en-US" dirty="0"/>
+              <a:t>Change Schedules</a:t>
+            </a:r>
+          </a:p>
+        </p:txBody>
+      </p:sp>
+      <p:sp>
+        <p:nvSpPr>
+          <p:cNvPr id="3" name="Content Placeholder 2">
+            <a:extLst>
+              <a:ext uri="{FF2B5EF4-FFF2-40B4-BE49-F238E27FC236}">
+                <a16:creationId xmlns:a16="http://schemas.microsoft.com/office/drawing/2014/main" id="{9EC66ED6-7014-E0DF-81F1-FC9B13A09A01}"/>
+              </a:ext>
+            </a:extLst>
+          </p:cNvPr>
+          <p:cNvSpPr>
+            <a:spLocks noGrp="1"/>
+          </p:cNvSpPr>
+          <p:nvPr>
+            <p:ph idx="1"/>
+          </p:nvPr>
+        </p:nvSpPr>
+        <p:spPr>
+          <a:xfrm>
+            <a:off x="581192" y="2180497"/>
+            <a:ext cx="11029615" cy="1013800"/>
+          </a:xfrm>
+        </p:spPr>
+        <p:txBody>
+          <a:bodyPr/>
+          <a:lstStyle/>
+          <a:p>
+            <a:r>
+              <a:rPr lang="en-US" dirty="0"/>
+              <a:t>Set blackout &amp; maintenance windows</a:t>
+            </a:r>
+          </a:p>
+          <a:p>
+            <a:r>
+              <a:rPr lang="en-US" dirty="0"/>
+              <a:t>View them on your change schedule to detect conflicts</a:t>
+            </a:r>
+          </a:p>
+        </p:txBody>
+      </p:sp>
+      <p:pic>
+        <p:nvPicPr>
+          <p:cNvPr id="5" name="Picture 4">
+            <a:extLst>
+              <a:ext uri="{FF2B5EF4-FFF2-40B4-BE49-F238E27FC236}">
+                <a16:creationId xmlns:a16="http://schemas.microsoft.com/office/drawing/2014/main" id="{B7ED8633-E9B9-96C7-A719-F97C0107DED7}"/>
+              </a:ext>
+            </a:extLst>
+          </p:cNvPr>
+          <p:cNvPicPr>
+            <a:picLocks noChangeAspect="1"/>
+          </p:cNvPicPr>
+          <p:nvPr/>
+        </p:nvPicPr>
+        <p:blipFill>
+          <a:blip r:embed="rId2"/>
+          <a:stretch>
+            <a:fillRect/>
+          </a:stretch>
+        </p:blipFill>
+        <p:spPr>
+          <a:xfrm>
+            <a:off x="1198604" y="3336512"/>
+            <a:ext cx="9794789" cy="3157177"/>
+          </a:xfrm>
+          <a:prstGeom prst="rect">
+            <a:avLst/>
+          </a:prstGeom>
+        </p:spPr>
+      </p:pic>
+    </p:spTree>
+    <p:extLst>
+      <p:ext uri="{BB962C8B-B14F-4D97-AF65-F5344CB8AC3E}">
+        <p14:creationId xmlns:p14="http://schemas.microsoft.com/office/powerpoint/2010/main" val="1074714061"/>
+      </p:ext>
+    </p:extLst>
+  </p:cSld>
+  <p:clrMapOvr>
+    <a:masterClrMapping/>
+  </p:clrMapOvr>
+</p:sld>
+</file>
+
+<file path=ppt/slides/slide34.xml><?xml version="1.0" encoding="utf-8"?>
+<p:sld xmlns:a="http://schemas.openxmlformats.org/drawingml/2006/main" xmlns:r="http://schemas.openxmlformats.org/officeDocument/2006/relationships" xmlns:p="http://schemas.openxmlformats.org/presentationml/2006/main">
+  <p:cSld>
+    <p:spTree>
+      <p:nvGrpSpPr>
+        <p:cNvPr id="1" name=""/>
+        <p:cNvGrpSpPr/>
+        <p:nvPr/>
+      </p:nvGrpSpPr>
+      <p:grpSpPr>
+        <a:xfrm>
+          <a:off x="0" y="0"/>
+          <a:ext cx="0" cy="0"/>
+          <a:chOff x="0" y="0"/>
+          <a:chExt cx="0" cy="0"/>
+        </a:xfrm>
+      </p:grpSpPr>
+      <p:sp>
+        <p:nvSpPr>
+          <p:cNvPr id="2" name="Title 1">
+            <a:extLst>
+              <a:ext uri="{FF2B5EF4-FFF2-40B4-BE49-F238E27FC236}">
+                <a16:creationId xmlns:a16="http://schemas.microsoft.com/office/drawing/2014/main" id="{9040E40E-35E1-073A-345E-6ABA648153AA}"/>
+              </a:ext>
+            </a:extLst>
+          </p:cNvPr>
+          <p:cNvSpPr>
+            <a:spLocks noGrp="1"/>
+          </p:cNvSpPr>
+          <p:nvPr>
+            <p:ph type="title"/>
+          </p:nvPr>
+        </p:nvSpPr>
+        <p:spPr/>
+        <p:txBody>
+          <a:bodyPr/>
+          <a:lstStyle/>
+          <a:p>
+            <a:r>
+              <a:rPr lang="en-US" dirty="0"/>
+              <a:t>Change Approval Policies</a:t>
+            </a:r>
+          </a:p>
+        </p:txBody>
+      </p:sp>
+      <p:sp>
+        <p:nvSpPr>
+          <p:cNvPr id="3" name="Content Placeholder 2">
+            <a:extLst>
+              <a:ext uri="{FF2B5EF4-FFF2-40B4-BE49-F238E27FC236}">
+                <a16:creationId xmlns:a16="http://schemas.microsoft.com/office/drawing/2014/main" id="{A2382674-8BC2-EDF3-0DC4-9B6C7D17E56B}"/>
+              </a:ext>
+            </a:extLst>
+          </p:cNvPr>
+          <p:cNvSpPr>
+            <a:spLocks noGrp="1"/>
+          </p:cNvSpPr>
+          <p:nvPr>
+            <p:ph idx="1"/>
+          </p:nvPr>
+        </p:nvSpPr>
+        <p:spPr>
+          <a:xfrm>
+            <a:off x="581193" y="2180496"/>
+            <a:ext cx="4639393" cy="3678303"/>
+          </a:xfrm>
+        </p:spPr>
+        <p:txBody>
+          <a:bodyPr/>
+          <a:lstStyle/>
+          <a:p>
+            <a:r>
+              <a:rPr lang="en-US" dirty="0"/>
+              <a:t>Define rules to automate change approvals</a:t>
+            </a:r>
+          </a:p>
+          <a:p>
+            <a:r>
+              <a:rPr lang="en-US" dirty="0"/>
+              <a:t>Policy Inputs – the data that the change approval policy will evaluate</a:t>
+            </a:r>
+          </a:p>
+          <a:p>
+            <a:r>
+              <a:rPr lang="en-US" dirty="0"/>
+              <a:t>Decisions – conditions that when met trigger an answer </a:t>
+            </a:r>
+          </a:p>
+          <a:p>
+            <a:r>
+              <a:rPr lang="en-US" dirty="0"/>
+              <a:t>Approval Definitions (Answers) – what to create: user/group approvals, auto-approve, or auto-reject</a:t>
+            </a:r>
+          </a:p>
+        </p:txBody>
+      </p:sp>
+      <p:pic>
+        <p:nvPicPr>
+          <p:cNvPr id="5" name="Picture 4">
+            <a:extLst>
+              <a:ext uri="{FF2B5EF4-FFF2-40B4-BE49-F238E27FC236}">
+                <a16:creationId xmlns:a16="http://schemas.microsoft.com/office/drawing/2014/main" id="{ECE1C4D3-EA96-C413-F1CE-EF5DCB023D83}"/>
+              </a:ext>
+            </a:extLst>
+          </p:cNvPr>
+          <p:cNvPicPr>
+            <a:picLocks noChangeAspect="1"/>
+          </p:cNvPicPr>
+          <p:nvPr/>
+        </p:nvPicPr>
+        <p:blipFill>
+          <a:blip r:embed="rId2"/>
+          <a:stretch>
+            <a:fillRect/>
+          </a:stretch>
+        </p:blipFill>
+        <p:spPr>
+          <a:xfrm>
+            <a:off x="5475768" y="2555046"/>
+            <a:ext cx="5865821" cy="2929202"/>
+          </a:xfrm>
+          <a:prstGeom prst="rect">
+            <a:avLst/>
+          </a:prstGeom>
+        </p:spPr>
+      </p:pic>
+    </p:spTree>
+    <p:extLst>
+      <p:ext uri="{BB962C8B-B14F-4D97-AF65-F5344CB8AC3E}">
+        <p14:creationId xmlns:p14="http://schemas.microsoft.com/office/powerpoint/2010/main" val="3945583105"/>
+      </p:ext>
+    </p:extLst>
+  </p:cSld>
+  <p:clrMapOvr>
+    <a:masterClrMapping/>
+  </p:clrMapOvr>
+</p:sld>
+</file>
+
+<file path=ppt/slides/slide35.xml><?xml version="1.0" encoding="utf-8"?>
+<p:sld xmlns:a="http://schemas.openxmlformats.org/drawingml/2006/main" xmlns:r="http://schemas.openxmlformats.org/officeDocument/2006/relationships" xmlns:p="http://schemas.openxmlformats.org/presentationml/2006/main">
+  <p:cSld>
+    <p:spTree>
+      <p:nvGrpSpPr>
+        <p:cNvPr id="1" name=""/>
+        <p:cNvGrpSpPr/>
+        <p:nvPr/>
+      </p:nvGrpSpPr>
+      <p:grpSpPr>
+        <a:xfrm>
+          <a:off x="0" y="0"/>
+          <a:ext cx="0" cy="0"/>
+          <a:chOff x="0" y="0"/>
+          <a:chExt cx="0" cy="0"/>
+        </a:xfrm>
+      </p:grpSpPr>
+      <p:sp>
+        <p:nvSpPr>
+          <p:cNvPr id="2" name="Title 1">
+            <a:extLst>
+              <a:ext uri="{FF2B5EF4-FFF2-40B4-BE49-F238E27FC236}">
+                <a16:creationId xmlns:a16="http://schemas.microsoft.com/office/drawing/2014/main" id="{7E1C87AB-5550-AABF-EE1F-D321DA7D4427}"/>
+              </a:ext>
+            </a:extLst>
+          </p:cNvPr>
+          <p:cNvSpPr>
+            <a:spLocks noGrp="1"/>
+          </p:cNvSpPr>
+          <p:nvPr>
+            <p:ph type="title"/>
+          </p:nvPr>
+        </p:nvSpPr>
+        <p:spPr/>
+        <p:txBody>
+          <a:bodyPr/>
+          <a:lstStyle/>
+          <a:p>
+            <a:r>
+              <a:rPr lang="en-US" dirty="0"/>
+              <a:t>The CAB Workbench</a:t>
+            </a:r>
+          </a:p>
+        </p:txBody>
+      </p:sp>
+      <p:sp>
+        <p:nvSpPr>
+          <p:cNvPr id="3" name="Content Placeholder 2">
+            <a:extLst>
+              <a:ext uri="{FF2B5EF4-FFF2-40B4-BE49-F238E27FC236}">
+                <a16:creationId xmlns:a16="http://schemas.microsoft.com/office/drawing/2014/main" id="{58816F36-12BB-2B32-96C0-39E86EAC6D19}"/>
+              </a:ext>
+            </a:extLst>
+          </p:cNvPr>
+          <p:cNvSpPr>
+            <a:spLocks noGrp="1"/>
+          </p:cNvSpPr>
+          <p:nvPr>
+            <p:ph idx="1"/>
+          </p:nvPr>
+        </p:nvSpPr>
+        <p:spPr>
+          <a:xfrm>
+            <a:off x="581193" y="2180496"/>
+            <a:ext cx="4745720" cy="3678303"/>
+          </a:xfrm>
+        </p:spPr>
+        <p:txBody>
+          <a:bodyPr/>
+          <a:lstStyle/>
+          <a:p>
+            <a:r>
+              <a:rPr lang="en-US" dirty="0"/>
+              <a:t>Create CAB definitions and related CAB meeting records</a:t>
+            </a:r>
+          </a:p>
+          <a:p>
+            <a:r>
+              <a:rPr lang="en-US" dirty="0"/>
+              <a:t>The records display on the CAB Workbench calendar </a:t>
+            </a:r>
+          </a:p>
+        </p:txBody>
+      </p:sp>
+      <p:pic>
+        <p:nvPicPr>
+          <p:cNvPr id="5" name="Picture 4">
+            <a:extLst>
+              <a:ext uri="{FF2B5EF4-FFF2-40B4-BE49-F238E27FC236}">
+                <a16:creationId xmlns:a16="http://schemas.microsoft.com/office/drawing/2014/main" id="{6AD7CBBF-689F-8148-21C3-63BEB9F7403F}"/>
+              </a:ext>
+            </a:extLst>
+          </p:cNvPr>
+          <p:cNvPicPr>
+            <a:picLocks noChangeAspect="1"/>
+          </p:cNvPicPr>
+          <p:nvPr/>
+        </p:nvPicPr>
+        <p:blipFill>
+          <a:blip r:embed="rId2"/>
+          <a:stretch>
+            <a:fillRect/>
+          </a:stretch>
+        </p:blipFill>
+        <p:spPr>
+          <a:xfrm>
+            <a:off x="6096000" y="2105246"/>
+            <a:ext cx="4912234" cy="4406563"/>
+          </a:xfrm>
+          <a:prstGeom prst="rect">
+            <a:avLst/>
+          </a:prstGeom>
+        </p:spPr>
+      </p:pic>
+    </p:spTree>
+    <p:extLst>
+      <p:ext uri="{BB962C8B-B14F-4D97-AF65-F5344CB8AC3E}">
+        <p14:creationId xmlns:p14="http://schemas.microsoft.com/office/powerpoint/2010/main" val="708682024"/>
+      </p:ext>
+    </p:extLst>
+  </p:cSld>
+  <p:clrMapOvr>
+    <a:masterClrMapping/>
+  </p:clrMapOvr>
+</p:sld>
+</file>
+
+<file path=ppt/slides/slide36.xml><?xml version="1.0" encoding="utf-8"?>
+<p:sld xmlns:a="http://schemas.openxmlformats.org/drawingml/2006/main" xmlns:r="http://schemas.openxmlformats.org/officeDocument/2006/relationships" xmlns:p="http://schemas.openxmlformats.org/presentationml/2006/main">
+  <p:cSld>
+    <p:spTree>
+      <p:nvGrpSpPr>
+        <p:cNvPr id="1" name=""/>
+        <p:cNvGrpSpPr/>
+        <p:nvPr/>
+      </p:nvGrpSpPr>
+      <p:grpSpPr>
+        <a:xfrm>
+          <a:off x="0" y="0"/>
+          <a:ext cx="0" cy="0"/>
+          <a:chOff x="0" y="0"/>
+          <a:chExt cx="0" cy="0"/>
+        </a:xfrm>
+      </p:grpSpPr>
+      <p:sp>
+        <p:nvSpPr>
+          <p:cNvPr id="2" name="Title 1">
+            <a:extLst>
+              <a:ext uri="{FF2B5EF4-FFF2-40B4-BE49-F238E27FC236}">
+                <a16:creationId xmlns:a16="http://schemas.microsoft.com/office/drawing/2014/main" id="{DDB11514-5BD4-CF8E-C026-7B5D300DA9FC}"/>
+              </a:ext>
+            </a:extLst>
+          </p:cNvPr>
+          <p:cNvSpPr>
+            <a:spLocks noGrp="1"/>
+          </p:cNvSpPr>
+          <p:nvPr>
+            <p:ph type="title"/>
+          </p:nvPr>
+        </p:nvSpPr>
+        <p:spPr/>
+        <p:txBody>
+          <a:bodyPr/>
+          <a:lstStyle/>
+          <a:p>
+            <a:r>
+              <a:rPr lang="en-US" dirty="0"/>
+              <a:t>Creating New Standard Changes</a:t>
+            </a:r>
+          </a:p>
+        </p:txBody>
+      </p:sp>
+      <p:pic>
+        <p:nvPicPr>
+          <p:cNvPr id="5" name="Picture 4">
+            <a:extLst>
+              <a:ext uri="{FF2B5EF4-FFF2-40B4-BE49-F238E27FC236}">
+                <a16:creationId xmlns:a16="http://schemas.microsoft.com/office/drawing/2014/main" id="{505F9061-F9D5-BDCF-AC6B-3612DB8B393E}"/>
+              </a:ext>
+            </a:extLst>
+          </p:cNvPr>
+          <p:cNvPicPr>
+            <a:picLocks noChangeAspect="1"/>
+          </p:cNvPicPr>
+          <p:nvPr/>
+        </p:nvPicPr>
+        <p:blipFill>
+          <a:blip r:embed="rId2"/>
+          <a:stretch>
+            <a:fillRect/>
+          </a:stretch>
+        </p:blipFill>
+        <p:spPr>
+          <a:xfrm>
+            <a:off x="1013722" y="3429000"/>
+            <a:ext cx="10164555" cy="2563380"/>
+          </a:xfrm>
+          <a:prstGeom prst="rect">
+            <a:avLst/>
+          </a:prstGeom>
+        </p:spPr>
+      </p:pic>
+      <p:sp>
+        <p:nvSpPr>
+          <p:cNvPr id="6" name="TextBox 5">
+            <a:extLst>
+              <a:ext uri="{FF2B5EF4-FFF2-40B4-BE49-F238E27FC236}">
+                <a16:creationId xmlns:a16="http://schemas.microsoft.com/office/drawing/2014/main" id="{74F138A8-E15D-9483-26CD-A27E3A9B3709}"/>
+              </a:ext>
+            </a:extLst>
+          </p:cNvPr>
+          <p:cNvSpPr txBox="1"/>
+          <p:nvPr/>
+        </p:nvSpPr>
+        <p:spPr>
+          <a:xfrm>
+            <a:off x="2326757" y="2372423"/>
+            <a:ext cx="7538484" cy="400110"/>
+          </a:xfrm>
+          <a:prstGeom prst="rect">
+            <a:avLst/>
+          </a:prstGeom>
+          <a:noFill/>
+        </p:spPr>
+        <p:txBody>
+          <a:bodyPr wrap="square" rtlCol="0">
+            <a:spAutoFit/>
+          </a:bodyPr>
+          <a:lstStyle/>
+          <a:p>
+            <a:r>
+              <a:rPr lang="en-US" sz="2000" dirty="0"/>
+              <a:t>Create new standard changes through the Standard Change Catalog</a:t>
+            </a:r>
+          </a:p>
+        </p:txBody>
+      </p:sp>
+    </p:spTree>
+    <p:extLst>
+      <p:ext uri="{BB962C8B-B14F-4D97-AF65-F5344CB8AC3E}">
+        <p14:creationId xmlns:p14="http://schemas.microsoft.com/office/powerpoint/2010/main" val="894199377"/>
+      </p:ext>
+    </p:extLst>
+  </p:cSld>
+  <p:clrMapOvr>
+    <a:masterClrMapping/>
+  </p:clrMapOvr>
+</p:sld>
+</file>
+
+<file path=ppt/slides/slide37.xml><?xml version="1.0" encoding="utf-8"?>
+<p:sld xmlns:a="http://schemas.openxmlformats.org/drawingml/2006/main" xmlns:r="http://schemas.openxmlformats.org/officeDocument/2006/relationships" xmlns:p="http://schemas.openxmlformats.org/presentationml/2006/main">
+  <p:cSld>
+    <p:spTree>
+      <p:nvGrpSpPr>
+        <p:cNvPr id="1" name=""/>
+        <p:cNvGrpSpPr/>
+        <p:nvPr/>
+      </p:nvGrpSpPr>
+      <p:grpSpPr>
+        <a:xfrm>
+          <a:off x="0" y="0"/>
+          <a:ext cx="0" cy="0"/>
+          <a:chOff x="0" y="0"/>
+          <a:chExt cx="0" cy="0"/>
+        </a:xfrm>
+      </p:grpSpPr>
+      <p:sp>
+        <p:nvSpPr>
+          <p:cNvPr id="2" name="Title 1">
+            <a:extLst>
+              <a:ext uri="{FF2B5EF4-FFF2-40B4-BE49-F238E27FC236}">
+                <a16:creationId xmlns:a16="http://schemas.microsoft.com/office/drawing/2014/main" id="{40774FC6-5679-58D6-FECF-2EF95D065C85}"/>
+              </a:ext>
+            </a:extLst>
+          </p:cNvPr>
+          <p:cNvSpPr>
+            <a:spLocks noGrp="1"/>
+          </p:cNvSpPr>
+          <p:nvPr>
+            <p:ph type="title"/>
+          </p:nvPr>
+        </p:nvSpPr>
+        <p:spPr/>
+        <p:txBody>
+          <a:bodyPr/>
+          <a:lstStyle/>
+          <a:p>
+            <a:r>
+              <a:rPr lang="en-US" dirty="0"/>
+              <a:t>Emergency Changes, Major Incidents, Problems</a:t>
+            </a:r>
+          </a:p>
+        </p:txBody>
+      </p:sp>
+      <p:sp>
+        <p:nvSpPr>
+          <p:cNvPr id="3" name="Content Placeholder 2">
+            <a:extLst>
+              <a:ext uri="{FF2B5EF4-FFF2-40B4-BE49-F238E27FC236}">
+                <a16:creationId xmlns:a16="http://schemas.microsoft.com/office/drawing/2014/main" id="{09BD7FAF-2E94-3940-31F3-C7CE0D955A76}"/>
+              </a:ext>
+            </a:extLst>
+          </p:cNvPr>
+          <p:cNvSpPr>
+            <a:spLocks noGrp="1"/>
+          </p:cNvSpPr>
+          <p:nvPr>
+            <p:ph idx="1"/>
+          </p:nvPr>
+        </p:nvSpPr>
+        <p:spPr>
+          <a:xfrm>
+            <a:off x="581193" y="2180496"/>
+            <a:ext cx="5394306" cy="3678303"/>
+          </a:xfrm>
+        </p:spPr>
+        <p:txBody>
+          <a:bodyPr>
+            <a:normAutofit lnSpcReduction="10000"/>
+          </a:bodyPr>
+          <a:lstStyle/>
+          <a:p>
+            <a:r>
+              <a:rPr lang="en-US" dirty="0"/>
+              <a:t>Major Incident is detected </a:t>
+            </a:r>
+          </a:p>
+          <a:p>
+            <a:r>
+              <a:rPr lang="en-US" dirty="0"/>
+              <a:t>Workaround involves a system update</a:t>
+            </a:r>
+          </a:p>
+          <a:p>
+            <a:pPr lvl="1"/>
+            <a:r>
+              <a:rPr lang="en-US" dirty="0"/>
+              <a:t>Change Manager creates an Emergency Change linked to the incident </a:t>
+            </a:r>
+          </a:p>
+          <a:p>
+            <a:r>
+              <a:rPr lang="en-US" dirty="0"/>
+              <a:t>ECAB convenes and gives approval for emergency change</a:t>
+            </a:r>
+          </a:p>
+          <a:p>
+            <a:r>
+              <a:rPr lang="en-US" dirty="0"/>
+              <a:t>Change implemented and incident closed </a:t>
+            </a:r>
+          </a:p>
+          <a:p>
+            <a:r>
+              <a:rPr lang="en-US" dirty="0"/>
+              <a:t>Post-Implementation Review</a:t>
+            </a:r>
+          </a:p>
+          <a:p>
+            <a:pPr lvl="1"/>
+            <a:r>
+              <a:rPr lang="en-US" dirty="0"/>
+              <a:t>Output: A problem record is initiated to perform root cause analysis</a:t>
+            </a:r>
+          </a:p>
+          <a:p>
+            <a:pPr lvl="1"/>
+            <a:r>
+              <a:rPr lang="en-US" dirty="0"/>
+              <a:t>A normal change is implemented from the problem </a:t>
+            </a:r>
+          </a:p>
+        </p:txBody>
+      </p:sp>
+      <p:pic>
+        <p:nvPicPr>
+          <p:cNvPr id="5" name="Picture 4">
+            <a:extLst>
+              <a:ext uri="{FF2B5EF4-FFF2-40B4-BE49-F238E27FC236}">
+                <a16:creationId xmlns:a16="http://schemas.microsoft.com/office/drawing/2014/main" id="{69765288-10E7-FD7B-7AE0-14D4366C62B0}"/>
+              </a:ext>
+            </a:extLst>
+          </p:cNvPr>
+          <p:cNvPicPr>
+            <a:picLocks noChangeAspect="1"/>
+          </p:cNvPicPr>
+          <p:nvPr/>
+        </p:nvPicPr>
+        <p:blipFill>
+          <a:blip r:embed="rId2"/>
+          <a:stretch>
+            <a:fillRect/>
+          </a:stretch>
+        </p:blipFill>
+        <p:spPr>
+          <a:xfrm>
+            <a:off x="6613452" y="3601693"/>
+            <a:ext cx="4593319" cy="1098762"/>
+          </a:xfrm>
+          <a:prstGeom prst="rect">
+            <a:avLst/>
+          </a:prstGeom>
+        </p:spPr>
+      </p:pic>
+      <p:sp>
+        <p:nvSpPr>
+          <p:cNvPr id="6" name="TextBox 5">
+            <a:extLst>
+              <a:ext uri="{FF2B5EF4-FFF2-40B4-BE49-F238E27FC236}">
+                <a16:creationId xmlns:a16="http://schemas.microsoft.com/office/drawing/2014/main" id="{0938E0CB-A0D3-34F4-0E83-DDA6709EB338}"/>
+              </a:ext>
+            </a:extLst>
+          </p:cNvPr>
+          <p:cNvSpPr txBox="1"/>
+          <p:nvPr/>
+        </p:nvSpPr>
+        <p:spPr>
+          <a:xfrm>
+            <a:off x="7108977" y="3256307"/>
+            <a:ext cx="3602268" cy="307777"/>
+          </a:xfrm>
+          <a:prstGeom prst="rect">
+            <a:avLst/>
+          </a:prstGeom>
+          <a:noFill/>
+        </p:spPr>
+        <p:txBody>
+          <a:bodyPr wrap="none" rtlCol="0">
+            <a:spAutoFit/>
+          </a:bodyPr>
+          <a:lstStyle/>
+          <a:p>
+            <a:r>
+              <a:rPr lang="en-US" sz="1400" dirty="0"/>
+              <a:t>The Major Incident plugin needs to be installed</a:t>
+            </a:r>
+          </a:p>
+        </p:txBody>
+      </p:sp>
+    </p:spTree>
+    <p:extLst>
+      <p:ext uri="{BB962C8B-B14F-4D97-AF65-F5344CB8AC3E}">
+        <p14:creationId xmlns:p14="http://schemas.microsoft.com/office/powerpoint/2010/main" val="4134919614"/>
+      </p:ext>
+    </p:extLst>
+  </p:cSld>
+  <p:clrMapOvr>
+    <a:masterClrMapping/>
+  </p:clrMapOvr>
+</p:sld>
+</file>
+
+<file path=ppt/slides/slide38.xml><?xml version="1.0" encoding="utf-8"?>
+<p:sld xmlns:a="http://schemas.openxmlformats.org/drawingml/2006/main" xmlns:r="http://schemas.openxmlformats.org/officeDocument/2006/relationships" xmlns:p="http://schemas.openxmlformats.org/presentationml/2006/main">
+  <p:cSld>
+    <p:spTree>
+      <p:nvGrpSpPr>
+        <p:cNvPr id="1" name="">
+          <a:extLst>
+            <a:ext uri="{FF2B5EF4-FFF2-40B4-BE49-F238E27FC236}">
+              <a16:creationId xmlns:a16="http://schemas.microsoft.com/office/drawing/2014/main" id="{60374D77-DC61-9670-DF01-BC71FDE66CF6}"/>
+            </a:ext>
+          </a:extLst>
+        </p:cNvPr>
+        <p:cNvGrpSpPr/>
+        <p:nvPr/>
+      </p:nvGrpSpPr>
+      <p:grpSpPr>
+        <a:xfrm>
+          <a:off x="0" y="0"/>
+          <a:ext cx="0" cy="0"/>
+          <a:chOff x="0" y="0"/>
+          <a:chExt cx="0" cy="0"/>
+        </a:xfrm>
+      </p:grpSpPr>
+      <p:sp>
+        <p:nvSpPr>
+          <p:cNvPr id="2" name="Title 1">
+            <a:extLst>
+              <a:ext uri="{FF2B5EF4-FFF2-40B4-BE49-F238E27FC236}">
+                <a16:creationId xmlns:a16="http://schemas.microsoft.com/office/drawing/2014/main" id="{9D0FA40F-B7CA-AFCD-E883-0291C3284BE6}"/>
+              </a:ext>
+            </a:extLst>
+          </p:cNvPr>
+          <p:cNvSpPr>
+            <a:spLocks noGrp="1"/>
+          </p:cNvSpPr>
+          <p:nvPr>
+            <p:ph type="title"/>
+          </p:nvPr>
+        </p:nvSpPr>
+        <p:spPr/>
+        <p:txBody>
+          <a:bodyPr/>
+          <a:lstStyle/>
+          <a:p>
+            <a:r>
+              <a:rPr lang="en-US" dirty="0"/>
+              <a:t>Challenge</a:t>
+            </a:r>
+          </a:p>
+        </p:txBody>
+      </p:sp>
+      <p:sp>
+        <p:nvSpPr>
+          <p:cNvPr id="3" name="Content Placeholder 2">
+            <a:extLst>
+              <a:ext uri="{FF2B5EF4-FFF2-40B4-BE49-F238E27FC236}">
+                <a16:creationId xmlns:a16="http://schemas.microsoft.com/office/drawing/2014/main" id="{FF2CF868-5036-1A29-D09B-483FEDFAC861}"/>
+              </a:ext>
+            </a:extLst>
+          </p:cNvPr>
+          <p:cNvSpPr>
+            <a:spLocks noGrp="1"/>
+          </p:cNvSpPr>
+          <p:nvPr>
+            <p:ph idx="1"/>
+          </p:nvPr>
+        </p:nvSpPr>
+        <p:spPr>
+          <a:xfrm>
+            <a:off x="6248608" y="2382416"/>
+            <a:ext cx="5192079" cy="2093167"/>
+          </a:xfrm>
+        </p:spPr>
+        <p:txBody>
+          <a:bodyPr>
+            <a:normAutofit/>
+          </a:bodyPr>
+          <a:lstStyle/>
+          <a:p>
+            <a:pPr marL="0" indent="0">
+              <a:buNone/>
+            </a:pPr>
+            <a:r>
+              <a:rPr lang="en-US" b="1" dirty="0"/>
+              <a:t>Scenario: </a:t>
+            </a:r>
+          </a:p>
+          <a:p>
+            <a:pPr marL="305435" indent="-305435"/>
+            <a:r>
+              <a:rPr lang="en-US" dirty="0">
+                <a:ea typeface="+mn-lt"/>
+                <a:cs typeface="+mn-lt"/>
+              </a:rPr>
+              <a:t>Install the plugin: </a:t>
+            </a:r>
+            <a:r>
+              <a:rPr lang="en-US" dirty="0" err="1">
+                <a:ea typeface="+mn-lt"/>
+                <a:cs typeface="+mn-lt"/>
+              </a:rPr>
+              <a:t>com.snc.incident.mim</a:t>
+            </a:r>
+            <a:endParaRPr lang="en-US" dirty="0">
+              <a:ea typeface="+mn-lt"/>
+              <a:cs typeface="+mn-lt"/>
+            </a:endParaRPr>
+          </a:p>
+          <a:p>
+            <a:pPr marL="305435" indent="-305435"/>
+            <a:r>
+              <a:rPr lang="en-US" dirty="0">
+                <a:ea typeface="+mn-lt"/>
+                <a:cs typeface="+mn-lt"/>
+              </a:rPr>
+              <a:t>Create a Major Incident</a:t>
+            </a:r>
+          </a:p>
+          <a:p>
+            <a:pPr marL="305435" indent="-305435"/>
+            <a:r>
+              <a:rPr lang="en-US" dirty="0">
+                <a:ea typeface="+mn-lt"/>
+                <a:cs typeface="+mn-lt"/>
+              </a:rPr>
+              <a:t>Create a related Emergency Change</a:t>
+            </a:r>
+          </a:p>
+        </p:txBody>
+      </p:sp>
+      <p:sp>
+        <p:nvSpPr>
+          <p:cNvPr id="4" name="Content Placeholder 2">
+            <a:extLst>
+              <a:ext uri="{FF2B5EF4-FFF2-40B4-BE49-F238E27FC236}">
+                <a16:creationId xmlns:a16="http://schemas.microsoft.com/office/drawing/2014/main" id="{99BAAA6A-F22A-252A-791F-A09313473335}"/>
+              </a:ext>
+            </a:extLst>
+          </p:cNvPr>
+          <p:cNvSpPr txBox="1">
+            <a:spLocks/>
+          </p:cNvSpPr>
+          <p:nvPr/>
+        </p:nvSpPr>
+        <p:spPr>
+          <a:xfrm>
+            <a:off x="903921" y="2666662"/>
+            <a:ext cx="5192079" cy="1013801"/>
+          </a:xfrm>
+          <a:prstGeom prst="rect">
+            <a:avLst/>
+          </a:prstGeom>
+        </p:spPr>
+        <p:txBody>
+          <a:bodyPr vert="horz" lIns="91440" tIns="45720" rIns="91440" bIns="45720" rtlCol="0" anchor="ctr">
+            <a:normAutofit lnSpcReduction="10000"/>
+          </a:bodyPr>
+          <a:lstStyle>
+            <a:lvl1pPr marL="306000" indent="-306000" algn="l" defTabSz="457200" rtl="0" eaLnBrk="1" latinLnBrk="0" hangingPunct="1">
+              <a:spcBef>
+                <a:spcPct val="20000"/>
+              </a:spcBef>
+              <a:spcAft>
+                <a:spcPts val="600"/>
+              </a:spcAft>
+              <a:buClr>
+                <a:schemeClr val="accent2"/>
+              </a:buClr>
+              <a:buSzPct val="92000"/>
+              <a:buFont typeface="Wingdings 2" panose="05020102010507070707" pitchFamily="18" charset="2"/>
+              <a:buChar char=""/>
+              <a:defRPr sz="1800" kern="1200">
+                <a:solidFill>
+                  <a:schemeClr val="tx2"/>
+                </a:solidFill>
+                <a:latin typeface="+mn-lt"/>
+                <a:ea typeface="+mn-ea"/>
+                <a:cs typeface="+mn-cs"/>
+              </a:defRPr>
+            </a:lvl1pPr>
+            <a:lvl2pPr marL="630000" indent="-306000" algn="l" defTabSz="457200" rtl="0" eaLnBrk="1" latinLnBrk="0" hangingPunct="1">
+              <a:spcBef>
+                <a:spcPct val="20000"/>
+              </a:spcBef>
+              <a:spcAft>
+                <a:spcPts val="600"/>
+              </a:spcAft>
+              <a:buClr>
+                <a:schemeClr val="accent2"/>
+              </a:buClr>
+              <a:buSzPct val="92000"/>
+              <a:buFont typeface="Wingdings 2" panose="05020102010507070707" pitchFamily="18" charset="2"/>
+              <a:buChar char=""/>
+              <a:defRPr sz="1600" kern="1200">
+                <a:solidFill>
+                  <a:schemeClr val="tx2"/>
+                </a:solidFill>
+                <a:latin typeface="+mn-lt"/>
+                <a:ea typeface="+mn-ea"/>
+                <a:cs typeface="+mn-cs"/>
+              </a:defRPr>
+            </a:lvl2pPr>
+            <a:lvl3pPr marL="900000" indent="-270000" algn="l" defTabSz="457200" rtl="0" eaLnBrk="1" latinLnBrk="0" hangingPunct="1">
+              <a:spcBef>
+                <a:spcPct val="20000"/>
+              </a:spcBef>
+              <a:spcAft>
+                <a:spcPts val="600"/>
+              </a:spcAft>
+              <a:buClr>
+                <a:schemeClr val="accent2"/>
+              </a:buClr>
+              <a:buSzPct val="92000"/>
+              <a:buFont typeface="Wingdings 2" panose="05020102010507070707" pitchFamily="18" charset="2"/>
+              <a:buChar char=""/>
+              <a:defRPr sz="1400" kern="1200">
+                <a:solidFill>
+                  <a:schemeClr val="tx2"/>
+                </a:solidFill>
+                <a:latin typeface="+mn-lt"/>
+                <a:ea typeface="+mn-ea"/>
+                <a:cs typeface="+mn-cs"/>
+              </a:defRPr>
+            </a:lvl3pPr>
+            <a:lvl4pPr marL="1242000" indent="-234000" algn="l" defTabSz="457200" rtl="0" eaLnBrk="1" latinLnBrk="0" hangingPunct="1">
+              <a:spcBef>
+                <a:spcPct val="20000"/>
+              </a:spcBef>
+              <a:spcAft>
+                <a:spcPts val="600"/>
+              </a:spcAft>
+              <a:buClr>
+                <a:schemeClr val="accent2"/>
+              </a:buClr>
+              <a:buSzPct val="92000"/>
+              <a:buFont typeface="Wingdings 2" panose="05020102010507070707" pitchFamily="18" charset="2"/>
+              <a:buChar char=""/>
+              <a:defRPr sz="1200" kern="1200">
+                <a:solidFill>
+                  <a:schemeClr val="tx2"/>
+                </a:solidFill>
+                <a:latin typeface="+mn-lt"/>
+                <a:ea typeface="+mn-ea"/>
+                <a:cs typeface="+mn-cs"/>
+              </a:defRPr>
+            </a:lvl4pPr>
+            <a:lvl5pPr marL="1602000" indent="-234000" algn="l" defTabSz="457200" rtl="0" eaLnBrk="1" latinLnBrk="0" hangingPunct="1">
+              <a:spcBef>
+                <a:spcPct val="20000"/>
+              </a:spcBef>
+              <a:spcAft>
+                <a:spcPts val="600"/>
+              </a:spcAft>
+              <a:buClr>
+                <a:schemeClr val="accent2"/>
+              </a:buClr>
+              <a:buSzPct val="92000"/>
+              <a:buFont typeface="Wingdings 2" panose="05020102010507070707" pitchFamily="18" charset="2"/>
+              <a:buChar char=""/>
+              <a:defRPr sz="1200" kern="1200">
+                <a:solidFill>
+                  <a:schemeClr val="tx2"/>
+                </a:solidFill>
+                <a:latin typeface="+mn-lt"/>
+                <a:ea typeface="+mn-ea"/>
+                <a:cs typeface="+mn-cs"/>
+              </a:defRPr>
+            </a:lvl5pPr>
+            <a:lvl6pPr marL="1900000" indent="-228600" algn="l" defTabSz="457200" rtl="0" eaLnBrk="1" latinLnBrk="0" hangingPunct="1">
+              <a:spcBef>
+                <a:spcPct val="20000"/>
+              </a:spcBef>
+              <a:spcAft>
+                <a:spcPts val="600"/>
+              </a:spcAft>
+              <a:buClr>
+                <a:schemeClr val="accent2"/>
+              </a:buClr>
+              <a:buSzPct val="92000"/>
+              <a:buFont typeface="Wingdings 2" panose="05020102010507070707" pitchFamily="18" charset="2"/>
+              <a:buChar char=""/>
+              <a:defRPr sz="1200" kern="1200">
+                <a:solidFill>
+                  <a:schemeClr val="tx2"/>
+                </a:solidFill>
+                <a:latin typeface="+mn-lt"/>
+                <a:ea typeface="+mn-ea"/>
+                <a:cs typeface="+mn-cs"/>
+              </a:defRPr>
+            </a:lvl6pPr>
+            <a:lvl7pPr marL="2200000" indent="-228600" algn="l" defTabSz="457200" rtl="0" eaLnBrk="1" latinLnBrk="0" hangingPunct="1">
+              <a:spcBef>
+                <a:spcPct val="20000"/>
+              </a:spcBef>
+              <a:spcAft>
+                <a:spcPts val="600"/>
+              </a:spcAft>
+              <a:buClr>
+                <a:schemeClr val="accent2"/>
+              </a:buClr>
+              <a:buSzPct val="92000"/>
+              <a:buFont typeface="Wingdings 2" panose="05020102010507070707" pitchFamily="18" charset="2"/>
+              <a:buChar char=""/>
+              <a:defRPr sz="1200" kern="1200">
+                <a:solidFill>
+                  <a:schemeClr val="tx2"/>
+                </a:solidFill>
+                <a:latin typeface="+mn-lt"/>
+                <a:ea typeface="+mn-ea"/>
+                <a:cs typeface="+mn-cs"/>
+              </a:defRPr>
+            </a:lvl7pPr>
+            <a:lvl8pPr marL="2500000" indent="-228600" algn="l" defTabSz="457200" rtl="0" eaLnBrk="1" latinLnBrk="0" hangingPunct="1">
+              <a:spcBef>
+                <a:spcPct val="20000"/>
+              </a:spcBef>
+              <a:spcAft>
+                <a:spcPts val="600"/>
+              </a:spcAft>
+              <a:buClr>
+                <a:schemeClr val="accent2"/>
+              </a:buClr>
+              <a:buSzPct val="92000"/>
+              <a:buFont typeface="Wingdings 2" panose="05020102010507070707" pitchFamily="18" charset="2"/>
+              <a:buChar char=""/>
+              <a:defRPr sz="1200" kern="1200">
+                <a:solidFill>
+                  <a:schemeClr val="tx2"/>
+                </a:solidFill>
+                <a:latin typeface="+mn-lt"/>
+                <a:ea typeface="+mn-ea"/>
+                <a:cs typeface="+mn-cs"/>
+              </a:defRPr>
+            </a:lvl8pPr>
+            <a:lvl9pPr marL="2800000" indent="-228600" algn="l" defTabSz="457200" rtl="0" eaLnBrk="1" latinLnBrk="0" hangingPunct="1">
+              <a:spcBef>
+                <a:spcPct val="20000"/>
+              </a:spcBef>
+              <a:spcAft>
+                <a:spcPts val="600"/>
+              </a:spcAft>
+              <a:buClr>
+                <a:schemeClr val="accent2"/>
+              </a:buClr>
+              <a:buSzPct val="92000"/>
+              <a:buFont typeface="Wingdings 2" panose="05020102010507070707" pitchFamily="18" charset="2"/>
+              <a:buChar char=""/>
+              <a:defRPr sz="1200" kern="1200">
+                <a:solidFill>
+                  <a:schemeClr val="tx2"/>
+                </a:solidFill>
+                <a:latin typeface="+mn-lt"/>
+                <a:ea typeface="+mn-ea"/>
+                <a:cs typeface="+mn-cs"/>
+              </a:defRPr>
+            </a:lvl9pPr>
+          </a:lstStyle>
+          <a:p>
+            <a:pPr marL="0" indent="0">
+              <a:buFont typeface="Wingdings 2" panose="05020102010507070707" pitchFamily="18" charset="2"/>
+              <a:buNone/>
+            </a:pPr>
+            <a:r>
+              <a:rPr lang="en-US" b="1" dirty="0"/>
+              <a:t>Goal: </a:t>
+            </a:r>
+          </a:p>
+          <a:p>
+            <a:pPr marL="305435" indent="-305435"/>
+            <a:r>
+              <a:rPr lang="en-US" dirty="0">
+                <a:ea typeface="+mn-lt"/>
+                <a:cs typeface="+mn-lt"/>
+              </a:rPr>
+              <a:t>Create a new Major Incident and link it to an emergency change</a:t>
+            </a:r>
+          </a:p>
+        </p:txBody>
+      </p:sp>
+    </p:spTree>
+    <p:extLst>
+      <p:ext uri="{BB962C8B-B14F-4D97-AF65-F5344CB8AC3E}">
+        <p14:creationId xmlns:p14="http://schemas.microsoft.com/office/powerpoint/2010/main" val="896463295"/>
+      </p:ext>
+    </p:extLst>
+  </p:cSld>
+  <p:clrMapOvr>
+    <a:masterClrMapping/>
+  </p:clrMapOvr>
+</p:sld>
+</file>
+
+<file path=ppt/slides/slide39.xml><?xml version="1.0" encoding="utf-8"?>
+<p:sld xmlns:a="http://schemas.openxmlformats.org/drawingml/2006/main" xmlns:r="http://schemas.openxmlformats.org/officeDocument/2006/relationships" xmlns:p="http://schemas.openxmlformats.org/presentationml/2006/main">
+  <p:cSld>
+    <p:spTree>
+      <p:nvGrpSpPr>
+        <p:cNvPr id="1" name="">
+          <a:extLst>
+            <a:ext uri="{FF2B5EF4-FFF2-40B4-BE49-F238E27FC236}">
+              <a16:creationId xmlns:a16="http://schemas.microsoft.com/office/drawing/2014/main" id="{163F29BE-5D6D-2F42-2A1F-393302B1B1E0}"/>
+            </a:ext>
+          </a:extLst>
+        </p:cNvPr>
+        <p:cNvGrpSpPr/>
+        <p:nvPr/>
+      </p:nvGrpSpPr>
+      <p:grpSpPr>
+        <a:xfrm>
+          <a:off x="0" y="0"/>
+          <a:ext cx="0" cy="0"/>
+          <a:chOff x="0" y="0"/>
+          <a:chExt cx="0" cy="0"/>
+        </a:xfrm>
+      </p:grpSpPr>
+      <p:sp>
+        <p:nvSpPr>
+          <p:cNvPr id="2" name="Title 1">
+            <a:extLst>
+              <a:ext uri="{FF2B5EF4-FFF2-40B4-BE49-F238E27FC236}">
+                <a16:creationId xmlns:a16="http://schemas.microsoft.com/office/drawing/2014/main" id="{E3B4165A-E25C-23C3-0B6F-376400DDB386}"/>
+              </a:ext>
+            </a:extLst>
+          </p:cNvPr>
+          <p:cNvSpPr>
+            <a:spLocks noGrp="1"/>
+          </p:cNvSpPr>
+          <p:nvPr>
+            <p:ph type="ctrTitle"/>
+          </p:nvPr>
+        </p:nvSpPr>
+        <p:spPr/>
+        <p:txBody>
+          <a:bodyPr/>
+          <a:lstStyle/>
+          <a:p>
+            <a:r>
+              <a:rPr lang="en-US" dirty="0"/>
+              <a:t>Knowledge Management</a:t>
+            </a:r>
+          </a:p>
+        </p:txBody>
+      </p:sp>
+    </p:spTree>
+    <p:extLst>
+      <p:ext uri="{BB962C8B-B14F-4D97-AF65-F5344CB8AC3E}">
+        <p14:creationId xmlns:p14="http://schemas.microsoft.com/office/powerpoint/2010/main" val="2508246095"/>
+      </p:ext>
+    </p:extLst>
+  </p:cSld>
+  <p:clrMapOvr>
+    <a:masterClrMapping/>
+  </p:clrMapOvr>
+</p:sld>
+</file>
+
 <file path=ppt/slides/slide4.xml><?xml version="1.0" encoding="utf-8"?>
 <p:sld xmlns:a="http://schemas.openxmlformats.org/drawingml/2006/main" xmlns:r="http://schemas.openxmlformats.org/officeDocument/2006/relationships" xmlns:p="http://schemas.openxmlformats.org/presentationml/2006/main">
   <p:cSld>
@@ -7174,6 +9916,1135 @@
     <p:extLst>
       <p:ext uri="{BB962C8B-B14F-4D97-AF65-F5344CB8AC3E}">
         <p14:creationId xmlns:p14="http://schemas.microsoft.com/office/powerpoint/2010/main" val="1795188108"/>
+      </p:ext>
+    </p:extLst>
+  </p:cSld>
+  <p:clrMapOvr>
+    <a:masterClrMapping/>
+  </p:clrMapOvr>
+</p:sld>
+</file>
+
+<file path=ppt/slides/slide40.xml><?xml version="1.0" encoding="utf-8"?>
+<p:sld xmlns:a="http://schemas.openxmlformats.org/drawingml/2006/main" xmlns:r="http://schemas.openxmlformats.org/officeDocument/2006/relationships" xmlns:p="http://schemas.openxmlformats.org/presentationml/2006/main">
+  <p:cSld>
+    <p:spTree>
+      <p:nvGrpSpPr>
+        <p:cNvPr id="1" name=""/>
+        <p:cNvGrpSpPr/>
+        <p:nvPr/>
+      </p:nvGrpSpPr>
+      <p:grpSpPr>
+        <a:xfrm>
+          <a:off x="0" y="0"/>
+          <a:ext cx="0" cy="0"/>
+          <a:chOff x="0" y="0"/>
+          <a:chExt cx="0" cy="0"/>
+        </a:xfrm>
+      </p:grpSpPr>
+      <p:sp>
+        <p:nvSpPr>
+          <p:cNvPr id="2" name="Title 1">
+            <a:extLst>
+              <a:ext uri="{FF2B5EF4-FFF2-40B4-BE49-F238E27FC236}">
+                <a16:creationId xmlns:a16="http://schemas.microsoft.com/office/drawing/2014/main" id="{046470B8-1416-2A79-27C7-CA16703C67C3}"/>
+              </a:ext>
+            </a:extLst>
+          </p:cNvPr>
+          <p:cNvSpPr>
+            <a:spLocks noGrp="1"/>
+          </p:cNvSpPr>
+          <p:nvPr>
+            <p:ph type="title"/>
+          </p:nvPr>
+        </p:nvSpPr>
+        <p:spPr/>
+        <p:txBody>
+          <a:bodyPr/>
+          <a:lstStyle/>
+          <a:p>
+            <a:r>
+              <a:rPr lang="en-US" dirty="0"/>
+              <a:t>What is Knowledge management?</a:t>
+            </a:r>
+          </a:p>
+        </p:txBody>
+      </p:sp>
+      <p:sp>
+        <p:nvSpPr>
+          <p:cNvPr id="3" name="Content Placeholder 2">
+            <a:extLst>
+              <a:ext uri="{FF2B5EF4-FFF2-40B4-BE49-F238E27FC236}">
+                <a16:creationId xmlns:a16="http://schemas.microsoft.com/office/drawing/2014/main" id="{CA095179-F491-2C74-CC80-3262BFC22108}"/>
+              </a:ext>
+            </a:extLst>
+          </p:cNvPr>
+          <p:cNvSpPr>
+            <a:spLocks noGrp="1"/>
+          </p:cNvSpPr>
+          <p:nvPr>
+            <p:ph idx="1"/>
+          </p:nvPr>
+        </p:nvSpPr>
+        <p:spPr/>
+        <p:txBody>
+          <a:bodyPr/>
+          <a:lstStyle/>
+          <a:p>
+            <a:r>
+              <a:rPr lang="en-US" dirty="0"/>
+              <a:t>Definition: </a:t>
+            </a:r>
+            <a:r>
+              <a:rPr lang="en-US" dirty="0">
+                <a:solidFill>
+                  <a:schemeClr val="accent2"/>
+                </a:solidFill>
+              </a:rPr>
+              <a:t>Knowledge Management </a:t>
+            </a:r>
+            <a:r>
+              <a:rPr lang="en-US" dirty="0"/>
+              <a:t>is the practice of effective, efficient, and convenient use of information and knowledge across the organization</a:t>
+            </a:r>
+          </a:p>
+          <a:p>
+            <a:pPr lvl="1"/>
+            <a:r>
+              <a:rPr lang="en-US" dirty="0"/>
+              <a:t>Helps people make better decisions </a:t>
+            </a:r>
+          </a:p>
+          <a:p>
+            <a:pPr lvl="1"/>
+            <a:r>
+              <a:rPr lang="en-US" dirty="0"/>
+              <a:t>Resolve issues faster</a:t>
+            </a:r>
+          </a:p>
+          <a:p>
+            <a:pPr lvl="1"/>
+            <a:r>
+              <a:rPr lang="en-US" dirty="0"/>
+              <a:t>Reduce backtracking over work </a:t>
+            </a:r>
+          </a:p>
+        </p:txBody>
+      </p:sp>
+    </p:spTree>
+    <p:extLst>
+      <p:ext uri="{BB962C8B-B14F-4D97-AF65-F5344CB8AC3E}">
+        <p14:creationId xmlns:p14="http://schemas.microsoft.com/office/powerpoint/2010/main" val="3592671714"/>
+      </p:ext>
+    </p:extLst>
+  </p:cSld>
+  <p:clrMapOvr>
+    <a:masterClrMapping/>
+  </p:clrMapOvr>
+</p:sld>
+</file>
+
+<file path=ppt/slides/slide41.xml><?xml version="1.0" encoding="utf-8"?>
+<p:sld xmlns:a="http://schemas.openxmlformats.org/drawingml/2006/main" xmlns:r="http://schemas.openxmlformats.org/officeDocument/2006/relationships" xmlns:p="http://schemas.openxmlformats.org/presentationml/2006/main">
+  <p:cSld>
+    <p:spTree>
+      <p:nvGrpSpPr>
+        <p:cNvPr id="1" name=""/>
+        <p:cNvGrpSpPr/>
+        <p:nvPr/>
+      </p:nvGrpSpPr>
+      <p:grpSpPr>
+        <a:xfrm>
+          <a:off x="0" y="0"/>
+          <a:ext cx="0" cy="0"/>
+          <a:chOff x="0" y="0"/>
+          <a:chExt cx="0" cy="0"/>
+        </a:xfrm>
+      </p:grpSpPr>
+      <p:sp>
+        <p:nvSpPr>
+          <p:cNvPr id="2" name="Title 1">
+            <a:extLst>
+              <a:ext uri="{FF2B5EF4-FFF2-40B4-BE49-F238E27FC236}">
+                <a16:creationId xmlns:a16="http://schemas.microsoft.com/office/drawing/2014/main" id="{AC987EB1-8925-CAA5-5991-A7A1921E276C}"/>
+              </a:ext>
+            </a:extLst>
+          </p:cNvPr>
+          <p:cNvSpPr>
+            <a:spLocks noGrp="1"/>
+          </p:cNvSpPr>
+          <p:nvPr>
+            <p:ph type="title"/>
+          </p:nvPr>
+        </p:nvSpPr>
+        <p:spPr/>
+        <p:txBody>
+          <a:bodyPr/>
+          <a:lstStyle/>
+          <a:p>
+            <a:r>
+              <a:rPr lang="en-US" dirty="0"/>
+              <a:t>Roles &amp; Access</a:t>
+            </a:r>
+          </a:p>
+        </p:txBody>
+      </p:sp>
+      <p:sp>
+        <p:nvSpPr>
+          <p:cNvPr id="3" name="Content Placeholder 2">
+            <a:extLst>
+              <a:ext uri="{FF2B5EF4-FFF2-40B4-BE49-F238E27FC236}">
+                <a16:creationId xmlns:a16="http://schemas.microsoft.com/office/drawing/2014/main" id="{374704E5-4470-E7C4-8714-E006F2F8B957}"/>
+              </a:ext>
+            </a:extLst>
+          </p:cNvPr>
+          <p:cNvSpPr>
+            <a:spLocks noGrp="1"/>
+          </p:cNvSpPr>
+          <p:nvPr>
+            <p:ph idx="1"/>
+          </p:nvPr>
+        </p:nvSpPr>
+        <p:spPr/>
+        <p:txBody>
+          <a:bodyPr/>
+          <a:lstStyle/>
+          <a:p>
+            <a:r>
+              <a:rPr lang="en-US" dirty="0" err="1"/>
+              <a:t>knowledge_admin</a:t>
+            </a:r>
+            <a:r>
+              <a:rPr lang="en-US" dirty="0"/>
+              <a:t> – full KM administration </a:t>
+            </a:r>
+          </a:p>
+          <a:p>
+            <a:r>
+              <a:rPr lang="en-US" dirty="0" err="1"/>
+              <a:t>knowledge_manager</a:t>
+            </a:r>
+            <a:r>
+              <a:rPr lang="en-US" dirty="0"/>
+              <a:t> – administer assigned knowledge bases; approve, curate, manage categories &amp; contributors</a:t>
+            </a:r>
+          </a:p>
+        </p:txBody>
+      </p:sp>
+    </p:spTree>
+    <p:extLst>
+      <p:ext uri="{BB962C8B-B14F-4D97-AF65-F5344CB8AC3E}">
+        <p14:creationId xmlns:p14="http://schemas.microsoft.com/office/powerpoint/2010/main" val="1635818680"/>
+      </p:ext>
+    </p:extLst>
+  </p:cSld>
+  <p:clrMapOvr>
+    <a:masterClrMapping/>
+  </p:clrMapOvr>
+</p:sld>
+</file>
+
+<file path=ppt/slides/slide42.xml><?xml version="1.0" encoding="utf-8"?>
+<p:sld xmlns:a="http://schemas.openxmlformats.org/drawingml/2006/main" xmlns:r="http://schemas.openxmlformats.org/officeDocument/2006/relationships" xmlns:p="http://schemas.openxmlformats.org/presentationml/2006/main">
+  <p:cSld>
+    <p:spTree>
+      <p:nvGrpSpPr>
+        <p:cNvPr id="1" name=""/>
+        <p:cNvGrpSpPr/>
+        <p:nvPr/>
+      </p:nvGrpSpPr>
+      <p:grpSpPr>
+        <a:xfrm>
+          <a:off x="0" y="0"/>
+          <a:ext cx="0" cy="0"/>
+          <a:chOff x="0" y="0"/>
+          <a:chExt cx="0" cy="0"/>
+        </a:xfrm>
+      </p:grpSpPr>
+      <p:sp>
+        <p:nvSpPr>
+          <p:cNvPr id="2" name="Title 1">
+            <a:extLst>
+              <a:ext uri="{FF2B5EF4-FFF2-40B4-BE49-F238E27FC236}">
+                <a16:creationId xmlns:a16="http://schemas.microsoft.com/office/drawing/2014/main" id="{EF912792-D845-A6A1-9937-32FB27D33F55}"/>
+              </a:ext>
+            </a:extLst>
+          </p:cNvPr>
+          <p:cNvSpPr>
+            <a:spLocks noGrp="1"/>
+          </p:cNvSpPr>
+          <p:nvPr>
+            <p:ph type="title"/>
+          </p:nvPr>
+        </p:nvSpPr>
+        <p:spPr/>
+        <p:txBody>
+          <a:bodyPr/>
+          <a:lstStyle/>
+          <a:p>
+            <a:r>
+              <a:rPr lang="en-US" dirty="0"/>
+              <a:t>The Knowledge Homepage</a:t>
+            </a:r>
+          </a:p>
+        </p:txBody>
+      </p:sp>
+      <p:sp>
+        <p:nvSpPr>
+          <p:cNvPr id="3" name="Content Placeholder 2">
+            <a:extLst>
+              <a:ext uri="{FF2B5EF4-FFF2-40B4-BE49-F238E27FC236}">
+                <a16:creationId xmlns:a16="http://schemas.microsoft.com/office/drawing/2014/main" id="{6C412B00-AE4D-CDED-9763-48D2D671073E}"/>
+              </a:ext>
+            </a:extLst>
+          </p:cNvPr>
+          <p:cNvSpPr>
+            <a:spLocks noGrp="1"/>
+          </p:cNvSpPr>
+          <p:nvPr>
+            <p:ph idx="1"/>
+          </p:nvPr>
+        </p:nvSpPr>
+        <p:spPr>
+          <a:xfrm>
+            <a:off x="581192" y="2180496"/>
+            <a:ext cx="11029615" cy="626499"/>
+          </a:xfrm>
+        </p:spPr>
+        <p:txBody>
+          <a:bodyPr/>
+          <a:lstStyle/>
+          <a:p>
+            <a:pPr marL="0" indent="0" algn="ctr">
+              <a:buNone/>
+            </a:pPr>
+            <a:r>
+              <a:rPr lang="en-US" dirty="0"/>
+              <a:t>The Knowledge Homepage provides a space for self-serve users to get assistance</a:t>
+            </a:r>
+          </a:p>
+        </p:txBody>
+      </p:sp>
+      <p:pic>
+        <p:nvPicPr>
+          <p:cNvPr id="5" name="Picture 4">
+            <a:extLst>
+              <a:ext uri="{FF2B5EF4-FFF2-40B4-BE49-F238E27FC236}">
+                <a16:creationId xmlns:a16="http://schemas.microsoft.com/office/drawing/2014/main" id="{D3772585-173E-2CB9-B88E-32ECD9039FD1}"/>
+              </a:ext>
+            </a:extLst>
+          </p:cNvPr>
+          <p:cNvPicPr>
+            <a:picLocks noChangeAspect="1"/>
+          </p:cNvPicPr>
+          <p:nvPr/>
+        </p:nvPicPr>
+        <p:blipFill>
+          <a:blip r:embed="rId2"/>
+          <a:stretch>
+            <a:fillRect/>
+          </a:stretch>
+        </p:blipFill>
+        <p:spPr>
+          <a:xfrm>
+            <a:off x="1648046" y="2986755"/>
+            <a:ext cx="8895907" cy="3336584"/>
+          </a:xfrm>
+          <a:prstGeom prst="rect">
+            <a:avLst/>
+          </a:prstGeom>
+        </p:spPr>
+      </p:pic>
+    </p:spTree>
+    <p:extLst>
+      <p:ext uri="{BB962C8B-B14F-4D97-AF65-F5344CB8AC3E}">
+        <p14:creationId xmlns:p14="http://schemas.microsoft.com/office/powerpoint/2010/main" val="2970403563"/>
+      </p:ext>
+    </p:extLst>
+  </p:cSld>
+  <p:clrMapOvr>
+    <a:masterClrMapping/>
+  </p:clrMapOvr>
+</p:sld>
+</file>
+
+<file path=ppt/slides/slide43.xml><?xml version="1.0" encoding="utf-8"?>
+<p:sld xmlns:a="http://schemas.openxmlformats.org/drawingml/2006/main" xmlns:r="http://schemas.openxmlformats.org/officeDocument/2006/relationships" xmlns:p="http://schemas.openxmlformats.org/presentationml/2006/main">
+  <p:cSld>
+    <p:spTree>
+      <p:nvGrpSpPr>
+        <p:cNvPr id="1" name=""/>
+        <p:cNvGrpSpPr/>
+        <p:nvPr/>
+      </p:nvGrpSpPr>
+      <p:grpSpPr>
+        <a:xfrm>
+          <a:off x="0" y="0"/>
+          <a:ext cx="0" cy="0"/>
+          <a:chOff x="0" y="0"/>
+          <a:chExt cx="0" cy="0"/>
+        </a:xfrm>
+      </p:grpSpPr>
+      <p:sp>
+        <p:nvSpPr>
+          <p:cNvPr id="2" name="Title 1">
+            <a:extLst>
+              <a:ext uri="{FF2B5EF4-FFF2-40B4-BE49-F238E27FC236}">
+                <a16:creationId xmlns:a16="http://schemas.microsoft.com/office/drawing/2014/main" id="{9CC1F023-E0E2-6422-7121-7438874E6633}"/>
+              </a:ext>
+            </a:extLst>
+          </p:cNvPr>
+          <p:cNvSpPr>
+            <a:spLocks noGrp="1"/>
+          </p:cNvSpPr>
+          <p:nvPr>
+            <p:ph type="title"/>
+          </p:nvPr>
+        </p:nvSpPr>
+        <p:spPr/>
+        <p:txBody>
+          <a:bodyPr/>
+          <a:lstStyle/>
+          <a:p>
+            <a:r>
+              <a:rPr lang="en-US" dirty="0"/>
+              <a:t>Knowledge Base vs Knowledge Article</a:t>
+            </a:r>
+          </a:p>
+        </p:txBody>
+      </p:sp>
+      <p:sp>
+        <p:nvSpPr>
+          <p:cNvPr id="3" name="Content Placeholder 2">
+            <a:extLst>
+              <a:ext uri="{FF2B5EF4-FFF2-40B4-BE49-F238E27FC236}">
+                <a16:creationId xmlns:a16="http://schemas.microsoft.com/office/drawing/2014/main" id="{E02F339B-4AD9-31CC-D724-73A9C0B1B627}"/>
+              </a:ext>
+            </a:extLst>
+          </p:cNvPr>
+          <p:cNvSpPr>
+            <a:spLocks noGrp="1"/>
+          </p:cNvSpPr>
+          <p:nvPr>
+            <p:ph idx="1"/>
+          </p:nvPr>
+        </p:nvSpPr>
+        <p:spPr>
+          <a:xfrm>
+            <a:off x="581192" y="2180496"/>
+            <a:ext cx="5351775" cy="3678303"/>
+          </a:xfrm>
+        </p:spPr>
+        <p:txBody>
+          <a:bodyPr/>
+          <a:lstStyle/>
+          <a:p>
+            <a:r>
+              <a:rPr lang="en-US" dirty="0"/>
+              <a:t>Definition: The </a:t>
+            </a:r>
+            <a:r>
+              <a:rPr lang="en-US" dirty="0">
+                <a:solidFill>
+                  <a:schemeClr val="accent2"/>
+                </a:solidFill>
+              </a:rPr>
+              <a:t>knowledge base </a:t>
+            </a:r>
+            <a:r>
+              <a:rPr lang="en-US" dirty="0"/>
+              <a:t>is a governed repository of knowledge articles</a:t>
+            </a:r>
+          </a:p>
+          <a:p>
+            <a:pPr lvl="1"/>
+            <a:r>
+              <a:rPr lang="en-US" dirty="0"/>
+              <a:t>Example: Known Error</a:t>
+            </a:r>
+          </a:p>
+          <a:p>
+            <a:pPr lvl="1"/>
+            <a:r>
+              <a:rPr lang="en-US" dirty="0"/>
+              <a:t>Table name: </a:t>
+            </a:r>
+            <a:r>
+              <a:rPr lang="en-US" dirty="0" err="1"/>
+              <a:t>kb_knowledge_base</a:t>
+            </a:r>
+            <a:endParaRPr lang="en-US" dirty="0"/>
+          </a:p>
+          <a:p>
+            <a:r>
+              <a:rPr lang="en-US" dirty="0"/>
+              <a:t>Definition: A </a:t>
+            </a:r>
+            <a:r>
+              <a:rPr lang="en-US" dirty="0">
+                <a:solidFill>
+                  <a:schemeClr val="accent2"/>
+                </a:solidFill>
+              </a:rPr>
+              <a:t>knowledge article </a:t>
+            </a:r>
+            <a:r>
+              <a:rPr lang="en-US" dirty="0"/>
+              <a:t>is a single, reusable unit of content that answers a question or solves a specific problem </a:t>
+            </a:r>
+          </a:p>
+          <a:p>
+            <a:pPr lvl="1"/>
+            <a:r>
+              <a:rPr lang="en-US" dirty="0"/>
+              <a:t>Table name: </a:t>
+            </a:r>
+            <a:r>
+              <a:rPr lang="en-US" dirty="0" err="1"/>
+              <a:t>kb_knowledge</a:t>
+            </a:r>
+            <a:endParaRPr lang="en-US" dirty="0"/>
+          </a:p>
+        </p:txBody>
+      </p:sp>
+      <p:pic>
+        <p:nvPicPr>
+          <p:cNvPr id="5" name="Picture 4">
+            <a:extLst>
+              <a:ext uri="{FF2B5EF4-FFF2-40B4-BE49-F238E27FC236}">
+                <a16:creationId xmlns:a16="http://schemas.microsoft.com/office/drawing/2014/main" id="{AB7955C4-1A0D-9F8B-A6E4-01AA0800F59A}"/>
+              </a:ext>
+            </a:extLst>
+          </p:cNvPr>
+          <p:cNvPicPr>
+            <a:picLocks noChangeAspect="1"/>
+          </p:cNvPicPr>
+          <p:nvPr/>
+        </p:nvPicPr>
+        <p:blipFill>
+          <a:blip r:embed="rId2"/>
+          <a:stretch>
+            <a:fillRect/>
+          </a:stretch>
+        </p:blipFill>
+        <p:spPr>
+          <a:xfrm>
+            <a:off x="7113181" y="2314419"/>
+            <a:ext cx="3042956" cy="1465128"/>
+          </a:xfrm>
+          <a:prstGeom prst="rect">
+            <a:avLst/>
+          </a:prstGeom>
+        </p:spPr>
+      </p:pic>
+      <p:pic>
+        <p:nvPicPr>
+          <p:cNvPr id="7" name="Picture 6">
+            <a:extLst>
+              <a:ext uri="{FF2B5EF4-FFF2-40B4-BE49-F238E27FC236}">
+                <a16:creationId xmlns:a16="http://schemas.microsoft.com/office/drawing/2014/main" id="{C2881229-72F1-82E3-127B-B0DA4055A1D3}"/>
+              </a:ext>
+            </a:extLst>
+          </p:cNvPr>
+          <p:cNvPicPr>
+            <a:picLocks noChangeAspect="1"/>
+          </p:cNvPicPr>
+          <p:nvPr/>
+        </p:nvPicPr>
+        <p:blipFill>
+          <a:blip r:embed="rId3"/>
+          <a:stretch>
+            <a:fillRect/>
+          </a:stretch>
+        </p:blipFill>
+        <p:spPr>
+          <a:xfrm>
+            <a:off x="7784373" y="3909302"/>
+            <a:ext cx="1853749" cy="2691188"/>
+          </a:xfrm>
+          <a:prstGeom prst="rect">
+            <a:avLst/>
+          </a:prstGeom>
+        </p:spPr>
+      </p:pic>
+    </p:spTree>
+    <p:extLst>
+      <p:ext uri="{BB962C8B-B14F-4D97-AF65-F5344CB8AC3E}">
+        <p14:creationId xmlns:p14="http://schemas.microsoft.com/office/powerpoint/2010/main" val="2494886121"/>
+      </p:ext>
+    </p:extLst>
+  </p:cSld>
+  <p:clrMapOvr>
+    <a:masterClrMapping/>
+  </p:clrMapOvr>
+</p:sld>
+</file>
+
+<file path=ppt/slides/slide44.xml><?xml version="1.0" encoding="utf-8"?>
+<p:sld xmlns:a="http://schemas.openxmlformats.org/drawingml/2006/main" xmlns:r="http://schemas.openxmlformats.org/officeDocument/2006/relationships" xmlns:p="http://schemas.openxmlformats.org/presentationml/2006/main">
+  <p:cSld>
+    <p:spTree>
+      <p:nvGrpSpPr>
+        <p:cNvPr id="1" name=""/>
+        <p:cNvGrpSpPr/>
+        <p:nvPr/>
+      </p:nvGrpSpPr>
+      <p:grpSpPr>
+        <a:xfrm>
+          <a:off x="0" y="0"/>
+          <a:ext cx="0" cy="0"/>
+          <a:chOff x="0" y="0"/>
+          <a:chExt cx="0" cy="0"/>
+        </a:xfrm>
+      </p:grpSpPr>
+      <p:sp>
+        <p:nvSpPr>
+          <p:cNvPr id="2" name="Title 1">
+            <a:extLst>
+              <a:ext uri="{FF2B5EF4-FFF2-40B4-BE49-F238E27FC236}">
+                <a16:creationId xmlns:a16="http://schemas.microsoft.com/office/drawing/2014/main" id="{E3652D30-2CC5-9008-4ADC-4E7EBED711B3}"/>
+              </a:ext>
+            </a:extLst>
+          </p:cNvPr>
+          <p:cNvSpPr>
+            <a:spLocks noGrp="1"/>
+          </p:cNvSpPr>
+          <p:nvPr>
+            <p:ph type="title"/>
+          </p:nvPr>
+        </p:nvSpPr>
+        <p:spPr/>
+        <p:txBody>
+          <a:bodyPr/>
+          <a:lstStyle/>
+          <a:p>
+            <a:r>
+              <a:rPr lang="en-US" dirty="0"/>
+              <a:t>Knowledge Article States</a:t>
+            </a:r>
+          </a:p>
+        </p:txBody>
+      </p:sp>
+      <p:sp>
+        <p:nvSpPr>
+          <p:cNvPr id="3" name="Content Placeholder 2">
+            <a:extLst>
+              <a:ext uri="{FF2B5EF4-FFF2-40B4-BE49-F238E27FC236}">
+                <a16:creationId xmlns:a16="http://schemas.microsoft.com/office/drawing/2014/main" id="{F665A246-F795-4B90-AF0D-91611C35A2A8}"/>
+              </a:ext>
+            </a:extLst>
+          </p:cNvPr>
+          <p:cNvSpPr>
+            <a:spLocks noGrp="1"/>
+          </p:cNvSpPr>
+          <p:nvPr>
+            <p:ph idx="1"/>
+          </p:nvPr>
+        </p:nvSpPr>
+        <p:spPr/>
+        <p:txBody>
+          <a:bodyPr/>
+          <a:lstStyle/>
+          <a:p>
+            <a:r>
+              <a:rPr lang="en-US" dirty="0"/>
+              <a:t>Draft – in the process of being created</a:t>
+            </a:r>
+          </a:p>
+          <a:p>
+            <a:r>
+              <a:rPr lang="en-US" dirty="0"/>
+              <a:t>Review – draft version sent to reviewers to approve or reject, we can recall to send back to draft</a:t>
+            </a:r>
+          </a:p>
+          <a:p>
+            <a:r>
+              <a:rPr lang="en-US" dirty="0"/>
+              <a:t>Scheduled for publish – draft version of knowledge article is scheduled at future date</a:t>
+            </a:r>
+          </a:p>
+          <a:p>
+            <a:r>
+              <a:rPr lang="en-US" dirty="0"/>
+              <a:t>Published – article is approved and published we can checkout to create new version in draft</a:t>
+            </a:r>
+          </a:p>
+          <a:p>
+            <a:r>
+              <a:rPr lang="en-US" dirty="0"/>
+              <a:t>Pending retirement – published article is selected for retirement, pending approval </a:t>
+            </a:r>
+          </a:p>
+          <a:p>
+            <a:r>
+              <a:rPr lang="en-US" dirty="0"/>
+              <a:t>Retired – published article is retired </a:t>
+            </a:r>
+          </a:p>
+          <a:p>
+            <a:r>
+              <a:rPr lang="en-US" dirty="0"/>
+              <a:t>Outdated – more recent version of the article has been published </a:t>
+            </a:r>
+          </a:p>
+        </p:txBody>
+      </p:sp>
+      <p:pic>
+        <p:nvPicPr>
+          <p:cNvPr id="5" name="Picture 4">
+            <a:extLst>
+              <a:ext uri="{FF2B5EF4-FFF2-40B4-BE49-F238E27FC236}">
+                <a16:creationId xmlns:a16="http://schemas.microsoft.com/office/drawing/2014/main" id="{DCA3E9F8-82C6-1C2A-E2B2-82BA1FEACAF4}"/>
+              </a:ext>
+            </a:extLst>
+          </p:cNvPr>
+          <p:cNvPicPr>
+            <a:picLocks noChangeAspect="1"/>
+          </p:cNvPicPr>
+          <p:nvPr/>
+        </p:nvPicPr>
+        <p:blipFill>
+          <a:blip r:embed="rId2"/>
+          <a:stretch>
+            <a:fillRect/>
+          </a:stretch>
+        </p:blipFill>
+        <p:spPr>
+          <a:xfrm>
+            <a:off x="9578314" y="3819594"/>
+            <a:ext cx="1009791" cy="400106"/>
+          </a:xfrm>
+          <a:prstGeom prst="rect">
+            <a:avLst/>
+          </a:prstGeom>
+        </p:spPr>
+      </p:pic>
+      <p:pic>
+        <p:nvPicPr>
+          <p:cNvPr id="7" name="Picture 6">
+            <a:extLst>
+              <a:ext uri="{FF2B5EF4-FFF2-40B4-BE49-F238E27FC236}">
+                <a16:creationId xmlns:a16="http://schemas.microsoft.com/office/drawing/2014/main" id="{1CE44298-7B24-9D63-E81D-B3D1E21C4C12}"/>
+              </a:ext>
+            </a:extLst>
+          </p:cNvPr>
+          <p:cNvPicPr>
+            <a:picLocks noChangeAspect="1"/>
+          </p:cNvPicPr>
+          <p:nvPr/>
+        </p:nvPicPr>
+        <p:blipFill>
+          <a:blip r:embed="rId3"/>
+          <a:stretch>
+            <a:fillRect/>
+          </a:stretch>
+        </p:blipFill>
+        <p:spPr>
+          <a:xfrm>
+            <a:off x="10083209" y="2944297"/>
+            <a:ext cx="676369" cy="428685"/>
+          </a:xfrm>
+          <a:prstGeom prst="rect">
+            <a:avLst/>
+          </a:prstGeom>
+        </p:spPr>
+      </p:pic>
+    </p:spTree>
+    <p:extLst>
+      <p:ext uri="{BB962C8B-B14F-4D97-AF65-F5344CB8AC3E}">
+        <p14:creationId xmlns:p14="http://schemas.microsoft.com/office/powerpoint/2010/main" val="553371134"/>
+      </p:ext>
+    </p:extLst>
+  </p:cSld>
+  <p:clrMapOvr>
+    <a:masterClrMapping/>
+  </p:clrMapOvr>
+</p:sld>
+</file>
+
+<file path=ppt/slides/slide45.xml><?xml version="1.0" encoding="utf-8"?>
+<p:sld xmlns:a="http://schemas.openxmlformats.org/drawingml/2006/main" xmlns:r="http://schemas.openxmlformats.org/officeDocument/2006/relationships" xmlns:p="http://schemas.openxmlformats.org/presentationml/2006/main">
+  <p:cSld>
+    <p:spTree>
+      <p:nvGrpSpPr>
+        <p:cNvPr id="1" name="">
+          <a:extLst>
+            <a:ext uri="{FF2B5EF4-FFF2-40B4-BE49-F238E27FC236}">
+              <a16:creationId xmlns:a16="http://schemas.microsoft.com/office/drawing/2014/main" id="{BE29B798-A9EE-4644-2382-1E3A43649C2E}"/>
+            </a:ext>
+          </a:extLst>
+        </p:cNvPr>
+        <p:cNvGrpSpPr/>
+        <p:nvPr/>
+      </p:nvGrpSpPr>
+      <p:grpSpPr>
+        <a:xfrm>
+          <a:off x="0" y="0"/>
+          <a:ext cx="0" cy="0"/>
+          <a:chOff x="0" y="0"/>
+          <a:chExt cx="0" cy="0"/>
+        </a:xfrm>
+      </p:grpSpPr>
+      <p:sp>
+        <p:nvSpPr>
+          <p:cNvPr id="2" name="Title 1">
+            <a:extLst>
+              <a:ext uri="{FF2B5EF4-FFF2-40B4-BE49-F238E27FC236}">
+                <a16:creationId xmlns:a16="http://schemas.microsoft.com/office/drawing/2014/main" id="{F2BD1D23-32B4-D796-5CDF-7F6E31273E2B}"/>
+              </a:ext>
+            </a:extLst>
+          </p:cNvPr>
+          <p:cNvSpPr>
+            <a:spLocks noGrp="1"/>
+          </p:cNvSpPr>
+          <p:nvPr>
+            <p:ph type="title"/>
+          </p:nvPr>
+        </p:nvSpPr>
+        <p:spPr/>
+        <p:txBody>
+          <a:bodyPr/>
+          <a:lstStyle/>
+          <a:p>
+            <a:r>
+              <a:rPr lang="en-US" dirty="0"/>
+              <a:t>Challenge</a:t>
+            </a:r>
+          </a:p>
+        </p:txBody>
+      </p:sp>
+      <p:sp>
+        <p:nvSpPr>
+          <p:cNvPr id="3" name="Content Placeholder 2">
+            <a:extLst>
+              <a:ext uri="{FF2B5EF4-FFF2-40B4-BE49-F238E27FC236}">
+                <a16:creationId xmlns:a16="http://schemas.microsoft.com/office/drawing/2014/main" id="{A1611850-C33C-BAE4-0C82-14D951842433}"/>
+              </a:ext>
+            </a:extLst>
+          </p:cNvPr>
+          <p:cNvSpPr>
+            <a:spLocks noGrp="1"/>
+          </p:cNvSpPr>
+          <p:nvPr>
+            <p:ph idx="1"/>
+          </p:nvPr>
+        </p:nvSpPr>
+        <p:spPr>
+          <a:xfrm>
+            <a:off x="6418729" y="2382416"/>
+            <a:ext cx="5192079" cy="3337900"/>
+          </a:xfrm>
+        </p:spPr>
+        <p:txBody>
+          <a:bodyPr>
+            <a:normAutofit/>
+          </a:bodyPr>
+          <a:lstStyle/>
+          <a:p>
+            <a:pPr marL="0" indent="0">
+              <a:buNone/>
+            </a:pPr>
+            <a:r>
+              <a:rPr lang="en-US" b="1" dirty="0"/>
+              <a:t>Scenario: </a:t>
+            </a:r>
+          </a:p>
+          <a:p>
+            <a:pPr marL="305435" indent="-305435"/>
+            <a:r>
+              <a:rPr lang="en-US" dirty="0">
+                <a:ea typeface="+mn-lt"/>
+                <a:cs typeface="+mn-lt"/>
+              </a:rPr>
+              <a:t>HR needs their own knowledge base</a:t>
+            </a:r>
+          </a:p>
+          <a:p>
+            <a:pPr marL="305435" indent="-305435"/>
+            <a:r>
+              <a:rPr lang="en-US" dirty="0">
+                <a:ea typeface="+mn-lt"/>
+                <a:cs typeface="+mn-lt"/>
+              </a:rPr>
+              <a:t>Create a new knowledge base called ‘HR’ and make sure only members of the HR department can read articles from it</a:t>
+            </a:r>
+          </a:p>
+          <a:p>
+            <a:pPr marL="305435" indent="-305435"/>
+            <a:r>
+              <a:rPr lang="en-US" dirty="0">
+                <a:ea typeface="+mn-lt"/>
+                <a:cs typeface="+mn-lt"/>
+              </a:rPr>
+              <a:t>Create the first knowledge article</a:t>
+            </a:r>
+          </a:p>
+          <a:p>
+            <a:pPr marL="305435" indent="-305435"/>
+            <a:r>
+              <a:rPr lang="en-US" dirty="0">
+                <a:ea typeface="+mn-lt"/>
+                <a:cs typeface="+mn-lt"/>
+              </a:rPr>
+              <a:t>You can use dummy data where necessary</a:t>
+            </a:r>
+          </a:p>
+        </p:txBody>
+      </p:sp>
+      <p:sp>
+        <p:nvSpPr>
+          <p:cNvPr id="4" name="Content Placeholder 2">
+            <a:extLst>
+              <a:ext uri="{FF2B5EF4-FFF2-40B4-BE49-F238E27FC236}">
+                <a16:creationId xmlns:a16="http://schemas.microsoft.com/office/drawing/2014/main" id="{A181499C-88A3-C112-B418-24CD4A34FEDA}"/>
+              </a:ext>
+            </a:extLst>
+          </p:cNvPr>
+          <p:cNvSpPr txBox="1">
+            <a:spLocks/>
+          </p:cNvSpPr>
+          <p:nvPr/>
+        </p:nvSpPr>
+        <p:spPr>
+          <a:xfrm>
+            <a:off x="903921" y="2666662"/>
+            <a:ext cx="5192079" cy="1013801"/>
+          </a:xfrm>
+          <a:prstGeom prst="rect">
+            <a:avLst/>
+          </a:prstGeom>
+        </p:spPr>
+        <p:txBody>
+          <a:bodyPr vert="horz" lIns="91440" tIns="45720" rIns="91440" bIns="45720" rtlCol="0" anchor="ctr">
+            <a:normAutofit/>
+          </a:bodyPr>
+          <a:lstStyle>
+            <a:lvl1pPr marL="306000" indent="-306000" algn="l" defTabSz="457200" rtl="0" eaLnBrk="1" latinLnBrk="0" hangingPunct="1">
+              <a:spcBef>
+                <a:spcPct val="20000"/>
+              </a:spcBef>
+              <a:spcAft>
+                <a:spcPts val="600"/>
+              </a:spcAft>
+              <a:buClr>
+                <a:schemeClr val="accent2"/>
+              </a:buClr>
+              <a:buSzPct val="92000"/>
+              <a:buFont typeface="Wingdings 2" panose="05020102010507070707" pitchFamily="18" charset="2"/>
+              <a:buChar char=""/>
+              <a:defRPr sz="1800" kern="1200">
+                <a:solidFill>
+                  <a:schemeClr val="tx2"/>
+                </a:solidFill>
+                <a:latin typeface="+mn-lt"/>
+                <a:ea typeface="+mn-ea"/>
+                <a:cs typeface="+mn-cs"/>
+              </a:defRPr>
+            </a:lvl1pPr>
+            <a:lvl2pPr marL="630000" indent="-306000" algn="l" defTabSz="457200" rtl="0" eaLnBrk="1" latinLnBrk="0" hangingPunct="1">
+              <a:spcBef>
+                <a:spcPct val="20000"/>
+              </a:spcBef>
+              <a:spcAft>
+                <a:spcPts val="600"/>
+              </a:spcAft>
+              <a:buClr>
+                <a:schemeClr val="accent2"/>
+              </a:buClr>
+              <a:buSzPct val="92000"/>
+              <a:buFont typeface="Wingdings 2" panose="05020102010507070707" pitchFamily="18" charset="2"/>
+              <a:buChar char=""/>
+              <a:defRPr sz="1600" kern="1200">
+                <a:solidFill>
+                  <a:schemeClr val="tx2"/>
+                </a:solidFill>
+                <a:latin typeface="+mn-lt"/>
+                <a:ea typeface="+mn-ea"/>
+                <a:cs typeface="+mn-cs"/>
+              </a:defRPr>
+            </a:lvl2pPr>
+            <a:lvl3pPr marL="900000" indent="-270000" algn="l" defTabSz="457200" rtl="0" eaLnBrk="1" latinLnBrk="0" hangingPunct="1">
+              <a:spcBef>
+                <a:spcPct val="20000"/>
+              </a:spcBef>
+              <a:spcAft>
+                <a:spcPts val="600"/>
+              </a:spcAft>
+              <a:buClr>
+                <a:schemeClr val="accent2"/>
+              </a:buClr>
+              <a:buSzPct val="92000"/>
+              <a:buFont typeface="Wingdings 2" panose="05020102010507070707" pitchFamily="18" charset="2"/>
+              <a:buChar char=""/>
+              <a:defRPr sz="1400" kern="1200">
+                <a:solidFill>
+                  <a:schemeClr val="tx2"/>
+                </a:solidFill>
+                <a:latin typeface="+mn-lt"/>
+                <a:ea typeface="+mn-ea"/>
+                <a:cs typeface="+mn-cs"/>
+              </a:defRPr>
+            </a:lvl3pPr>
+            <a:lvl4pPr marL="1242000" indent="-234000" algn="l" defTabSz="457200" rtl="0" eaLnBrk="1" latinLnBrk="0" hangingPunct="1">
+              <a:spcBef>
+                <a:spcPct val="20000"/>
+              </a:spcBef>
+              <a:spcAft>
+                <a:spcPts val="600"/>
+              </a:spcAft>
+              <a:buClr>
+                <a:schemeClr val="accent2"/>
+              </a:buClr>
+              <a:buSzPct val="92000"/>
+              <a:buFont typeface="Wingdings 2" panose="05020102010507070707" pitchFamily="18" charset="2"/>
+              <a:buChar char=""/>
+              <a:defRPr sz="1200" kern="1200">
+                <a:solidFill>
+                  <a:schemeClr val="tx2"/>
+                </a:solidFill>
+                <a:latin typeface="+mn-lt"/>
+                <a:ea typeface="+mn-ea"/>
+                <a:cs typeface="+mn-cs"/>
+              </a:defRPr>
+            </a:lvl4pPr>
+            <a:lvl5pPr marL="1602000" indent="-234000" algn="l" defTabSz="457200" rtl="0" eaLnBrk="1" latinLnBrk="0" hangingPunct="1">
+              <a:spcBef>
+                <a:spcPct val="20000"/>
+              </a:spcBef>
+              <a:spcAft>
+                <a:spcPts val="600"/>
+              </a:spcAft>
+              <a:buClr>
+                <a:schemeClr val="accent2"/>
+              </a:buClr>
+              <a:buSzPct val="92000"/>
+              <a:buFont typeface="Wingdings 2" panose="05020102010507070707" pitchFamily="18" charset="2"/>
+              <a:buChar char=""/>
+              <a:defRPr sz="1200" kern="1200">
+                <a:solidFill>
+                  <a:schemeClr val="tx2"/>
+                </a:solidFill>
+                <a:latin typeface="+mn-lt"/>
+                <a:ea typeface="+mn-ea"/>
+                <a:cs typeface="+mn-cs"/>
+              </a:defRPr>
+            </a:lvl5pPr>
+            <a:lvl6pPr marL="1900000" indent="-228600" algn="l" defTabSz="457200" rtl="0" eaLnBrk="1" latinLnBrk="0" hangingPunct="1">
+              <a:spcBef>
+                <a:spcPct val="20000"/>
+              </a:spcBef>
+              <a:spcAft>
+                <a:spcPts val="600"/>
+              </a:spcAft>
+              <a:buClr>
+                <a:schemeClr val="accent2"/>
+              </a:buClr>
+              <a:buSzPct val="92000"/>
+              <a:buFont typeface="Wingdings 2" panose="05020102010507070707" pitchFamily="18" charset="2"/>
+              <a:buChar char=""/>
+              <a:defRPr sz="1200" kern="1200">
+                <a:solidFill>
+                  <a:schemeClr val="tx2"/>
+                </a:solidFill>
+                <a:latin typeface="+mn-lt"/>
+                <a:ea typeface="+mn-ea"/>
+                <a:cs typeface="+mn-cs"/>
+              </a:defRPr>
+            </a:lvl6pPr>
+            <a:lvl7pPr marL="2200000" indent="-228600" algn="l" defTabSz="457200" rtl="0" eaLnBrk="1" latinLnBrk="0" hangingPunct="1">
+              <a:spcBef>
+                <a:spcPct val="20000"/>
+              </a:spcBef>
+              <a:spcAft>
+                <a:spcPts val="600"/>
+              </a:spcAft>
+              <a:buClr>
+                <a:schemeClr val="accent2"/>
+              </a:buClr>
+              <a:buSzPct val="92000"/>
+              <a:buFont typeface="Wingdings 2" panose="05020102010507070707" pitchFamily="18" charset="2"/>
+              <a:buChar char=""/>
+              <a:defRPr sz="1200" kern="1200">
+                <a:solidFill>
+                  <a:schemeClr val="tx2"/>
+                </a:solidFill>
+                <a:latin typeface="+mn-lt"/>
+                <a:ea typeface="+mn-ea"/>
+                <a:cs typeface="+mn-cs"/>
+              </a:defRPr>
+            </a:lvl7pPr>
+            <a:lvl8pPr marL="2500000" indent="-228600" algn="l" defTabSz="457200" rtl="0" eaLnBrk="1" latinLnBrk="0" hangingPunct="1">
+              <a:spcBef>
+                <a:spcPct val="20000"/>
+              </a:spcBef>
+              <a:spcAft>
+                <a:spcPts val="600"/>
+              </a:spcAft>
+              <a:buClr>
+                <a:schemeClr val="accent2"/>
+              </a:buClr>
+              <a:buSzPct val="92000"/>
+              <a:buFont typeface="Wingdings 2" panose="05020102010507070707" pitchFamily="18" charset="2"/>
+              <a:buChar char=""/>
+              <a:defRPr sz="1200" kern="1200">
+                <a:solidFill>
+                  <a:schemeClr val="tx2"/>
+                </a:solidFill>
+                <a:latin typeface="+mn-lt"/>
+                <a:ea typeface="+mn-ea"/>
+                <a:cs typeface="+mn-cs"/>
+              </a:defRPr>
+            </a:lvl8pPr>
+            <a:lvl9pPr marL="2800000" indent="-228600" algn="l" defTabSz="457200" rtl="0" eaLnBrk="1" latinLnBrk="0" hangingPunct="1">
+              <a:spcBef>
+                <a:spcPct val="20000"/>
+              </a:spcBef>
+              <a:spcAft>
+                <a:spcPts val="600"/>
+              </a:spcAft>
+              <a:buClr>
+                <a:schemeClr val="accent2"/>
+              </a:buClr>
+              <a:buSzPct val="92000"/>
+              <a:buFont typeface="Wingdings 2" panose="05020102010507070707" pitchFamily="18" charset="2"/>
+              <a:buChar char=""/>
+              <a:defRPr sz="1200" kern="1200">
+                <a:solidFill>
+                  <a:schemeClr val="tx2"/>
+                </a:solidFill>
+                <a:latin typeface="+mn-lt"/>
+                <a:ea typeface="+mn-ea"/>
+                <a:cs typeface="+mn-cs"/>
+              </a:defRPr>
+            </a:lvl9pPr>
+          </a:lstStyle>
+          <a:p>
+            <a:pPr marL="0" indent="0">
+              <a:buFont typeface="Wingdings 2" panose="05020102010507070707" pitchFamily="18" charset="2"/>
+              <a:buNone/>
+            </a:pPr>
+            <a:r>
+              <a:rPr lang="en-US" b="1" dirty="0"/>
+              <a:t>Goal: </a:t>
+            </a:r>
+          </a:p>
+          <a:p>
+            <a:pPr marL="305435" indent="-305435"/>
+            <a:r>
+              <a:rPr lang="en-US" dirty="0"/>
+              <a:t>Create a new knowledge base and article</a:t>
+            </a:r>
+            <a:endParaRPr lang="en-US" dirty="0">
+              <a:ea typeface="+mn-lt"/>
+              <a:cs typeface="+mn-lt"/>
+            </a:endParaRPr>
+          </a:p>
+        </p:txBody>
+      </p:sp>
+    </p:spTree>
+    <p:extLst>
+      <p:ext uri="{BB962C8B-B14F-4D97-AF65-F5344CB8AC3E}">
+        <p14:creationId xmlns:p14="http://schemas.microsoft.com/office/powerpoint/2010/main" val="1076334379"/>
       </p:ext>
     </p:extLst>
   </p:cSld>

--- a/Week_3/Incident_Problem_Management.pptx
+++ b/Week_3/Incident_Problem_Management.pptx
@@ -49,7 +49,8 @@
     <p:sldId id="314" r:id="rId43"/>
     <p:sldId id="311" r:id="rId44"/>
     <p:sldId id="312" r:id="rId45"/>
-    <p:sldId id="313" r:id="rId46"/>
+    <p:sldId id="317" r:id="rId46"/>
+    <p:sldId id="313" r:id="rId47"/>
   </p:sldIdLst>
   <p:sldSz cx="12192000" cy="6858000"/>
   <p:notesSz cx="6858000" cy="9144000"/>
@@ -416,7 +417,7 @@
             <a:fld id="{B61BEF0D-F0BB-DE4B-95CE-6DB70DBA9567}" type="datetimeFigureOut">
               <a:rPr lang="en-US" dirty="0"/>
               <a:pPr/>
-              <a:t>10/9/2025</a:t>
+              <a:t>10/10/2025</a:t>
             </a:fld>
             <a:endParaRPr lang="en-US" dirty="0"/>
           </a:p>
@@ -678,7 +679,7 @@
             <a:fld id="{B61BEF0D-F0BB-DE4B-95CE-6DB70DBA9567}" type="datetimeFigureOut">
               <a:rPr lang="en-US" dirty="0"/>
               <a:pPr/>
-              <a:t>10/9/2025</a:t>
+              <a:t>10/10/2025</a:t>
             </a:fld>
             <a:endParaRPr lang="en-US" dirty="0"/>
           </a:p>
@@ -913,7 +914,7 @@
             <a:fld id="{B61BEF0D-F0BB-DE4B-95CE-6DB70DBA9567}" type="datetimeFigureOut">
               <a:rPr lang="en-US" dirty="0"/>
               <a:pPr/>
-              <a:t>10/9/2025</a:t>
+              <a:t>10/10/2025</a:t>
             </a:fld>
             <a:endParaRPr lang="en-US" dirty="0"/>
           </a:p>
@@ -1153,7 +1154,7 @@
             <a:fld id="{B61BEF0D-F0BB-DE4B-95CE-6DB70DBA9567}" type="datetimeFigureOut">
               <a:rPr lang="en-US" dirty="0"/>
               <a:pPr/>
-              <a:t>10/9/2025</a:t>
+              <a:t>10/10/2025</a:t>
             </a:fld>
             <a:endParaRPr lang="en-US" dirty="0"/>
           </a:p>
@@ -1461,7 +1462,7 @@
             <a:fld id="{B61BEF0D-F0BB-DE4B-95CE-6DB70DBA9567}" type="datetimeFigureOut">
               <a:rPr lang="en-US" dirty="0"/>
               <a:pPr/>
-              <a:t>10/9/2025</a:t>
+              <a:t>10/10/2025</a:t>
             </a:fld>
             <a:endParaRPr lang="en-US" dirty="0"/>
           </a:p>
@@ -1762,7 +1763,7 @@
             <a:fld id="{B61BEF0D-F0BB-DE4B-95CE-6DB70DBA9567}" type="datetimeFigureOut">
               <a:rPr lang="en-US" dirty="0"/>
               <a:pPr/>
-              <a:t>10/9/2025</a:t>
+              <a:t>10/10/2025</a:t>
             </a:fld>
             <a:endParaRPr lang="en-US" dirty="0"/>
           </a:p>
@@ -2183,7 +2184,7 @@
             <a:fld id="{B61BEF0D-F0BB-DE4B-95CE-6DB70DBA9567}" type="datetimeFigureOut">
               <a:rPr lang="en-US" dirty="0"/>
               <a:pPr/>
-              <a:t>10/9/2025</a:t>
+              <a:t>10/10/2025</a:t>
             </a:fld>
             <a:endParaRPr lang="en-US" dirty="0"/>
           </a:p>
@@ -2346,7 +2347,7 @@
             <a:fld id="{B61BEF0D-F0BB-DE4B-95CE-6DB70DBA9567}" type="datetimeFigureOut">
               <a:rPr lang="en-US" dirty="0"/>
               <a:pPr/>
-              <a:t>10/9/2025</a:t>
+              <a:t>10/10/2025</a:t>
             </a:fld>
             <a:endParaRPr lang="en-US" dirty="0"/>
           </a:p>
@@ -2443,7 +2444,7 @@
             <a:fld id="{B61BEF0D-F0BB-DE4B-95CE-6DB70DBA9567}" type="datetimeFigureOut">
               <a:rPr lang="en-US" dirty="0"/>
               <a:pPr/>
-              <a:t>10/9/2025</a:t>
+              <a:t>10/10/2025</a:t>
             </a:fld>
             <a:endParaRPr lang="en-US" dirty="0"/>
           </a:p>
@@ -2821,7 +2822,7 @@
             <a:fld id="{B61BEF0D-F0BB-DE4B-95CE-6DB70DBA9567}" type="datetimeFigureOut">
               <a:rPr lang="en-US" dirty="0"/>
               <a:pPr/>
-              <a:t>10/9/2025</a:t>
+              <a:t>10/10/2025</a:t>
             </a:fld>
             <a:endParaRPr lang="en-US" dirty="0"/>
           </a:p>
@@ -3107,7 +3108,7 @@
             <a:fld id="{B61BEF0D-F0BB-DE4B-95CE-6DB70DBA9567}" type="datetimeFigureOut">
               <a:rPr lang="en-US" dirty="0"/>
               <a:pPr/>
-              <a:t>10/9/2025</a:t>
+              <a:t>10/10/2025</a:t>
             </a:fld>
             <a:endParaRPr lang="en-US" dirty="0"/>
           </a:p>
@@ -3346,7 +3347,7 @@
             <a:fld id="{B61BEF0D-F0BB-DE4B-95CE-6DB70DBA9567}" type="datetimeFigureOut">
               <a:rPr lang="en-US" dirty="0"/>
               <a:pPr/>
-              <a:t>10/9/2025</a:t>
+              <a:t>10/10/2025</a:t>
             </a:fld>
             <a:endParaRPr lang="en-US" dirty="0"/>
           </a:p>
@@ -10663,6 +10664,127 @@
 </file>
 
 <file path=ppt/slides/slide45.xml><?xml version="1.0" encoding="utf-8"?>
+<p:sld xmlns:a="http://schemas.openxmlformats.org/drawingml/2006/main" xmlns:r="http://schemas.openxmlformats.org/officeDocument/2006/relationships" xmlns:p="http://schemas.openxmlformats.org/presentationml/2006/main">
+  <p:cSld>
+    <p:spTree>
+      <p:nvGrpSpPr>
+        <p:cNvPr id="1" name=""/>
+        <p:cNvGrpSpPr/>
+        <p:nvPr/>
+      </p:nvGrpSpPr>
+      <p:grpSpPr>
+        <a:xfrm>
+          <a:off x="0" y="0"/>
+          <a:ext cx="0" cy="0"/>
+          <a:chOff x="0" y="0"/>
+          <a:chExt cx="0" cy="0"/>
+        </a:xfrm>
+      </p:grpSpPr>
+      <p:sp>
+        <p:nvSpPr>
+          <p:cNvPr id="2" name="Title 1">
+            <a:extLst>
+              <a:ext uri="{FF2B5EF4-FFF2-40B4-BE49-F238E27FC236}">
+                <a16:creationId xmlns:a16="http://schemas.microsoft.com/office/drawing/2014/main" id="{FF3CCAEC-40E8-EDE8-4AF5-9821D8141A87}"/>
+              </a:ext>
+            </a:extLst>
+          </p:cNvPr>
+          <p:cNvSpPr>
+            <a:spLocks noGrp="1"/>
+          </p:cNvSpPr>
+          <p:nvPr>
+            <p:ph type="title"/>
+          </p:nvPr>
+        </p:nvSpPr>
+        <p:spPr/>
+        <p:txBody>
+          <a:bodyPr/>
+          <a:lstStyle/>
+          <a:p>
+            <a:r>
+              <a:rPr lang="en-US" dirty="0"/>
+              <a:t>Knowledge Flows</a:t>
+            </a:r>
+          </a:p>
+        </p:txBody>
+      </p:sp>
+      <p:sp>
+        <p:nvSpPr>
+          <p:cNvPr id="3" name="Content Placeholder 2">
+            <a:extLst>
+              <a:ext uri="{FF2B5EF4-FFF2-40B4-BE49-F238E27FC236}">
+                <a16:creationId xmlns:a16="http://schemas.microsoft.com/office/drawing/2014/main" id="{77F17AAA-93A0-DBA2-E8AF-063008DE5A69}"/>
+              </a:ext>
+            </a:extLst>
+          </p:cNvPr>
+          <p:cNvSpPr>
+            <a:spLocks noGrp="1"/>
+          </p:cNvSpPr>
+          <p:nvPr>
+            <p:ph idx="1"/>
+          </p:nvPr>
+        </p:nvSpPr>
+        <p:spPr>
+          <a:xfrm>
+            <a:off x="581193" y="2180496"/>
+            <a:ext cx="4779702" cy="3678303"/>
+          </a:xfrm>
+        </p:spPr>
+        <p:txBody>
+          <a:bodyPr/>
+          <a:lstStyle/>
+          <a:p>
+            <a:r>
+              <a:rPr lang="en-US" dirty="0"/>
+              <a:t>Knowledge Flows are process automations that control the state of our articles all the way from Draft to Published and everything in between</a:t>
+            </a:r>
+          </a:p>
+        </p:txBody>
+      </p:sp>
+      <p:pic>
+        <p:nvPicPr>
+          <p:cNvPr id="5" name="Picture 4">
+            <a:extLst>
+              <a:ext uri="{FF2B5EF4-FFF2-40B4-BE49-F238E27FC236}">
+                <a16:creationId xmlns:a16="http://schemas.microsoft.com/office/drawing/2014/main" id="{CED0BF57-7BF4-9A4F-CF38-0E516C3DC9E0}"/>
+              </a:ext>
+            </a:extLst>
+          </p:cNvPr>
+          <p:cNvPicPr>
+            <a:picLocks noChangeAspect="1"/>
+          </p:cNvPicPr>
+          <p:nvPr/>
+        </p:nvPicPr>
+        <p:blipFill>
+          <a:blip r:embed="rId2"/>
+          <a:stretch>
+            <a:fillRect/>
+          </a:stretch>
+        </p:blipFill>
+        <p:spPr>
+          <a:xfrm>
+            <a:off x="6025044" y="2180496"/>
+            <a:ext cx="5144218" cy="3734321"/>
+          </a:xfrm>
+          <a:prstGeom prst="rect">
+            <a:avLst/>
+          </a:prstGeom>
+        </p:spPr>
+      </p:pic>
+    </p:spTree>
+    <p:extLst>
+      <p:ext uri="{BB962C8B-B14F-4D97-AF65-F5344CB8AC3E}">
+        <p14:creationId xmlns:p14="http://schemas.microsoft.com/office/powerpoint/2010/main" val="3521354350"/>
+      </p:ext>
+    </p:extLst>
+  </p:cSld>
+  <p:clrMapOvr>
+    <a:masterClrMapping/>
+  </p:clrMapOvr>
+</p:sld>
+</file>
+
+<file path=ppt/slides/slide46.xml><?xml version="1.0" encoding="utf-8"?>
 <p:sld xmlns:a="http://schemas.openxmlformats.org/drawingml/2006/main" xmlns:r="http://schemas.openxmlformats.org/officeDocument/2006/relationships" xmlns:p="http://schemas.openxmlformats.org/presentationml/2006/main">
   <p:cSld>
     <p:spTree>

--- a/Week_3/Incident_Problem_Management.pptx
+++ b/Week_3/Incident_Problem_Management.pptx
@@ -16,41 +16,42 @@
     <p:sldId id="272" r:id="rId10"/>
     <p:sldId id="278" r:id="rId11"/>
     <p:sldId id="280" r:id="rId12"/>
-    <p:sldId id="281" r:id="rId13"/>
-    <p:sldId id="282" r:id="rId14"/>
-    <p:sldId id="283" r:id="rId15"/>
-    <p:sldId id="294" r:id="rId16"/>
-    <p:sldId id="293" r:id="rId17"/>
-    <p:sldId id="285" r:id="rId18"/>
-    <p:sldId id="286" r:id="rId19"/>
-    <p:sldId id="287" r:id="rId20"/>
-    <p:sldId id="289" r:id="rId21"/>
-    <p:sldId id="291" r:id="rId22"/>
-    <p:sldId id="288" r:id="rId23"/>
-    <p:sldId id="290" r:id="rId24"/>
-    <p:sldId id="292" r:id="rId25"/>
-    <p:sldId id="295" r:id="rId26"/>
-    <p:sldId id="296" r:id="rId27"/>
-    <p:sldId id="297" r:id="rId28"/>
-    <p:sldId id="299" r:id="rId29"/>
-    <p:sldId id="298" r:id="rId30"/>
-    <p:sldId id="307" r:id="rId31"/>
-    <p:sldId id="300" r:id="rId32"/>
-    <p:sldId id="305" r:id="rId33"/>
-    <p:sldId id="301" r:id="rId34"/>
-    <p:sldId id="303" r:id="rId35"/>
-    <p:sldId id="304" r:id="rId36"/>
-    <p:sldId id="306" r:id="rId37"/>
-    <p:sldId id="315" r:id="rId38"/>
-    <p:sldId id="316" r:id="rId39"/>
-    <p:sldId id="308" r:id="rId40"/>
-    <p:sldId id="309" r:id="rId41"/>
-    <p:sldId id="310" r:id="rId42"/>
-    <p:sldId id="314" r:id="rId43"/>
-    <p:sldId id="311" r:id="rId44"/>
-    <p:sldId id="312" r:id="rId45"/>
-    <p:sldId id="317" r:id="rId46"/>
-    <p:sldId id="313" r:id="rId47"/>
+    <p:sldId id="318" r:id="rId13"/>
+    <p:sldId id="281" r:id="rId14"/>
+    <p:sldId id="282" r:id="rId15"/>
+    <p:sldId id="283" r:id="rId16"/>
+    <p:sldId id="294" r:id="rId17"/>
+    <p:sldId id="293" r:id="rId18"/>
+    <p:sldId id="285" r:id="rId19"/>
+    <p:sldId id="286" r:id="rId20"/>
+    <p:sldId id="287" r:id="rId21"/>
+    <p:sldId id="289" r:id="rId22"/>
+    <p:sldId id="291" r:id="rId23"/>
+    <p:sldId id="288" r:id="rId24"/>
+    <p:sldId id="290" r:id="rId25"/>
+    <p:sldId id="292" r:id="rId26"/>
+    <p:sldId id="295" r:id="rId27"/>
+    <p:sldId id="296" r:id="rId28"/>
+    <p:sldId id="297" r:id="rId29"/>
+    <p:sldId id="299" r:id="rId30"/>
+    <p:sldId id="298" r:id="rId31"/>
+    <p:sldId id="307" r:id="rId32"/>
+    <p:sldId id="300" r:id="rId33"/>
+    <p:sldId id="305" r:id="rId34"/>
+    <p:sldId id="301" r:id="rId35"/>
+    <p:sldId id="303" r:id="rId36"/>
+    <p:sldId id="304" r:id="rId37"/>
+    <p:sldId id="306" r:id="rId38"/>
+    <p:sldId id="315" r:id="rId39"/>
+    <p:sldId id="316" r:id="rId40"/>
+    <p:sldId id="308" r:id="rId41"/>
+    <p:sldId id="309" r:id="rId42"/>
+    <p:sldId id="310" r:id="rId43"/>
+    <p:sldId id="314" r:id="rId44"/>
+    <p:sldId id="311" r:id="rId45"/>
+    <p:sldId id="312" r:id="rId46"/>
+    <p:sldId id="317" r:id="rId47"/>
+    <p:sldId id="313" r:id="rId48"/>
   </p:sldIdLst>
   <p:sldSz cx="12192000" cy="6858000"/>
   <p:notesSz cx="6858000" cy="9144000"/>
@@ -417,7 +418,7 @@
             <a:fld id="{B61BEF0D-F0BB-DE4B-95CE-6DB70DBA9567}" type="datetimeFigureOut">
               <a:rPr lang="en-US" dirty="0"/>
               <a:pPr/>
-              <a:t>10/10/2025</a:t>
+              <a:t>10/31/2025</a:t>
             </a:fld>
             <a:endParaRPr lang="en-US" dirty="0"/>
           </a:p>
@@ -679,7 +680,7 @@
             <a:fld id="{B61BEF0D-F0BB-DE4B-95CE-6DB70DBA9567}" type="datetimeFigureOut">
               <a:rPr lang="en-US" dirty="0"/>
               <a:pPr/>
-              <a:t>10/10/2025</a:t>
+              <a:t>10/31/2025</a:t>
             </a:fld>
             <a:endParaRPr lang="en-US" dirty="0"/>
           </a:p>
@@ -914,7 +915,7 @@
             <a:fld id="{B61BEF0D-F0BB-DE4B-95CE-6DB70DBA9567}" type="datetimeFigureOut">
               <a:rPr lang="en-US" dirty="0"/>
               <a:pPr/>
-              <a:t>10/10/2025</a:t>
+              <a:t>10/31/2025</a:t>
             </a:fld>
             <a:endParaRPr lang="en-US" dirty="0"/>
           </a:p>
@@ -1154,7 +1155,7 @@
             <a:fld id="{B61BEF0D-F0BB-DE4B-95CE-6DB70DBA9567}" type="datetimeFigureOut">
               <a:rPr lang="en-US" dirty="0"/>
               <a:pPr/>
-              <a:t>10/10/2025</a:t>
+              <a:t>10/31/2025</a:t>
             </a:fld>
             <a:endParaRPr lang="en-US" dirty="0"/>
           </a:p>
@@ -1462,7 +1463,7 @@
             <a:fld id="{B61BEF0D-F0BB-DE4B-95CE-6DB70DBA9567}" type="datetimeFigureOut">
               <a:rPr lang="en-US" dirty="0"/>
               <a:pPr/>
-              <a:t>10/10/2025</a:t>
+              <a:t>10/31/2025</a:t>
             </a:fld>
             <a:endParaRPr lang="en-US" dirty="0"/>
           </a:p>
@@ -1763,7 +1764,7 @@
             <a:fld id="{B61BEF0D-F0BB-DE4B-95CE-6DB70DBA9567}" type="datetimeFigureOut">
               <a:rPr lang="en-US" dirty="0"/>
               <a:pPr/>
-              <a:t>10/10/2025</a:t>
+              <a:t>10/31/2025</a:t>
             </a:fld>
             <a:endParaRPr lang="en-US" dirty="0"/>
           </a:p>
@@ -2184,7 +2185,7 @@
             <a:fld id="{B61BEF0D-F0BB-DE4B-95CE-6DB70DBA9567}" type="datetimeFigureOut">
               <a:rPr lang="en-US" dirty="0"/>
               <a:pPr/>
-              <a:t>10/10/2025</a:t>
+              <a:t>10/31/2025</a:t>
             </a:fld>
             <a:endParaRPr lang="en-US" dirty="0"/>
           </a:p>
@@ -2347,7 +2348,7 @@
             <a:fld id="{B61BEF0D-F0BB-DE4B-95CE-6DB70DBA9567}" type="datetimeFigureOut">
               <a:rPr lang="en-US" dirty="0"/>
               <a:pPr/>
-              <a:t>10/10/2025</a:t>
+              <a:t>10/31/2025</a:t>
             </a:fld>
             <a:endParaRPr lang="en-US" dirty="0"/>
           </a:p>
@@ -2444,7 +2445,7 @@
             <a:fld id="{B61BEF0D-F0BB-DE4B-95CE-6DB70DBA9567}" type="datetimeFigureOut">
               <a:rPr lang="en-US" dirty="0"/>
               <a:pPr/>
-              <a:t>10/10/2025</a:t>
+              <a:t>10/31/2025</a:t>
             </a:fld>
             <a:endParaRPr lang="en-US" dirty="0"/>
           </a:p>
@@ -2822,7 +2823,7 @@
             <a:fld id="{B61BEF0D-F0BB-DE4B-95CE-6DB70DBA9567}" type="datetimeFigureOut">
               <a:rPr lang="en-US" dirty="0"/>
               <a:pPr/>
-              <a:t>10/10/2025</a:t>
+              <a:t>10/31/2025</a:t>
             </a:fld>
             <a:endParaRPr lang="en-US" dirty="0"/>
           </a:p>
@@ -3108,7 +3109,7 @@
             <a:fld id="{B61BEF0D-F0BB-DE4B-95CE-6DB70DBA9567}" type="datetimeFigureOut">
               <a:rPr lang="en-US" dirty="0"/>
               <a:pPr/>
-              <a:t>10/10/2025</a:t>
+              <a:t>10/31/2025</a:t>
             </a:fld>
             <a:endParaRPr lang="en-US" dirty="0"/>
           </a:p>
@@ -3347,7 +3348,7 @@
             <a:fld id="{B61BEF0D-F0BB-DE4B-95CE-6DB70DBA9567}" type="datetimeFigureOut">
               <a:rPr lang="en-US" dirty="0"/>
               <a:pPr/>
-              <a:t>10/10/2025</a:t>
+              <a:t>10/31/2025</a:t>
             </a:fld>
             <a:endParaRPr lang="en-US" dirty="0"/>
           </a:p>
@@ -4084,7 +4085,42 @@
           <a:p>
             <a:r>
               <a:rPr lang="en-US" dirty="0"/>
-              <a:t>Definition: Assignment Rules are a set of automated instructions that determine how incidents are routed to the appropriate support group or individual</a:t>
+              <a:t>Definition: </a:t>
+            </a:r>
+            <a:r>
+              <a:rPr lang="en-US" dirty="0">
+                <a:solidFill>
+                  <a:schemeClr val="accent2"/>
+                </a:solidFill>
+              </a:rPr>
+              <a:t>Assignment Rules </a:t>
+            </a:r>
+            <a:r>
+              <a:rPr lang="en-US" dirty="0"/>
+              <a:t>are a set of automated instructions that determine how incidents are routed to the appropriate support group or individual</a:t>
+            </a:r>
+          </a:p>
+          <a:p>
+            <a:pPr lvl="1"/>
+            <a:r>
+              <a:rPr lang="en-US" dirty="0"/>
+              <a:t>Only works if both the ‘</a:t>
+            </a:r>
+            <a:r>
+              <a:rPr lang="en-US" dirty="0" err="1"/>
+              <a:t>assigned_to</a:t>
+            </a:r>
+            <a:r>
+              <a:rPr lang="en-US" dirty="0"/>
+              <a:t>’ and ‘</a:t>
+            </a:r>
+            <a:r>
+              <a:rPr lang="en-US" dirty="0" err="1"/>
+              <a:t>assignment_group</a:t>
+            </a:r>
+            <a:r>
+              <a:rPr lang="en-US" dirty="0"/>
+              <a:t>’ fields are already empty </a:t>
             </a:r>
           </a:p>
           <a:p>
@@ -4306,6 +4342,123 @@
   <p:cSld>
     <p:spTree>
       <p:nvGrpSpPr>
+        <p:cNvPr id="1" name=""/>
+        <p:cNvGrpSpPr/>
+        <p:nvPr/>
+      </p:nvGrpSpPr>
+      <p:grpSpPr>
+        <a:xfrm>
+          <a:off x="0" y="0"/>
+          <a:ext cx="0" cy="0"/>
+          <a:chOff x="0" y="0"/>
+          <a:chExt cx="0" cy="0"/>
+        </a:xfrm>
+      </p:grpSpPr>
+      <p:sp>
+        <p:nvSpPr>
+          <p:cNvPr id="2" name="Title 1">
+            <a:extLst>
+              <a:ext uri="{FF2B5EF4-FFF2-40B4-BE49-F238E27FC236}">
+                <a16:creationId xmlns:a16="http://schemas.microsoft.com/office/drawing/2014/main" id="{9C262D1E-A5AD-195C-2611-8A3C701F99B5}"/>
+              </a:ext>
+            </a:extLst>
+          </p:cNvPr>
+          <p:cNvSpPr>
+            <a:spLocks noGrp="1"/>
+          </p:cNvSpPr>
+          <p:nvPr>
+            <p:ph type="title"/>
+          </p:nvPr>
+        </p:nvSpPr>
+        <p:spPr/>
+        <p:txBody>
+          <a:bodyPr/>
+          <a:lstStyle/>
+          <a:p>
+            <a:r>
+              <a:rPr lang="en-US" dirty="0"/>
+              <a:t>Best practice Note</a:t>
+            </a:r>
+          </a:p>
+        </p:txBody>
+      </p:sp>
+      <p:sp>
+        <p:nvSpPr>
+          <p:cNvPr id="3" name="Content Placeholder 2">
+            <a:extLst>
+              <a:ext uri="{FF2B5EF4-FFF2-40B4-BE49-F238E27FC236}">
+                <a16:creationId xmlns:a16="http://schemas.microsoft.com/office/drawing/2014/main" id="{A058AD8C-851A-B9A8-A9A8-C0C80850206E}"/>
+              </a:ext>
+            </a:extLst>
+          </p:cNvPr>
+          <p:cNvSpPr>
+            <a:spLocks noGrp="1"/>
+          </p:cNvSpPr>
+          <p:nvPr>
+            <p:ph idx="1"/>
+          </p:nvPr>
+        </p:nvSpPr>
+        <p:spPr/>
+        <p:txBody>
+          <a:bodyPr/>
+          <a:lstStyle/>
+          <a:p>
+            <a:r>
+              <a:rPr lang="en-US" dirty="0"/>
+              <a:t>Many process automations/scripts can change the ‘</a:t>
+            </a:r>
+            <a:r>
+              <a:rPr lang="en-US" dirty="0" err="1"/>
+              <a:t>assigned_to</a:t>
+            </a:r>
+            <a:r>
+              <a:rPr lang="en-US" dirty="0"/>
+              <a:t>’ and ‘</a:t>
+            </a:r>
+            <a:r>
+              <a:rPr lang="en-US" dirty="0" err="1"/>
+              <a:t>assignment_group</a:t>
+            </a:r>
+            <a:r>
+              <a:rPr lang="en-US" dirty="0"/>
+              <a:t>’ fields</a:t>
+            </a:r>
+          </a:p>
+          <a:p>
+            <a:r>
+              <a:rPr lang="en-US" dirty="0"/>
+              <a:t>Choose only one solution/script/automation to centralize all logic for these fields  </a:t>
+            </a:r>
+          </a:p>
+          <a:p>
+            <a:r>
+              <a:rPr lang="en-US" dirty="0"/>
+              <a:t>This is a best practice because it helps us debug issues better and provides more consistent results</a:t>
+            </a:r>
+          </a:p>
+          <a:p>
+            <a:endParaRPr lang="en-US" dirty="0"/>
+          </a:p>
+        </p:txBody>
+      </p:sp>
+    </p:spTree>
+    <p:extLst>
+      <p:ext uri="{BB962C8B-B14F-4D97-AF65-F5344CB8AC3E}">
+        <p14:creationId xmlns:p14="http://schemas.microsoft.com/office/powerpoint/2010/main" val="3052960208"/>
+      </p:ext>
+    </p:extLst>
+  </p:cSld>
+  <p:clrMapOvr>
+    <a:masterClrMapping/>
+  </p:clrMapOvr>
+</p:sld>
+</file>
+
+<file path=ppt/slides/slide13.xml><?xml version="1.0" encoding="utf-8"?>
+<p:sld xmlns:a="http://schemas.openxmlformats.org/drawingml/2006/main" xmlns:r="http://schemas.openxmlformats.org/officeDocument/2006/relationships" xmlns:p="http://schemas.openxmlformats.org/presentationml/2006/main">
+  <p:cSld>
+    <p:spTree>
+      <p:nvGrpSpPr>
         <p:cNvPr id="1" name="">
           <a:extLst>
             <a:ext uri="{FF2B5EF4-FFF2-40B4-BE49-F238E27FC236}">
@@ -4371,7 +4524,7 @@
         <p:spPr>
           <a:xfrm>
             <a:off x="6418729" y="2691484"/>
-            <a:ext cx="5192079" cy="1405387"/>
+            <a:ext cx="5192079" cy="2104634"/>
           </a:xfrm>
         </p:spPr>
         <p:txBody>
@@ -4394,10 +4547,16 @@
               <a:rPr lang="en-US" dirty="0"/>
               <a:t>All critical priority incidents, where the ‘Channel’ is ‘Walk-In’, should be routed to our ‘ITSM Agents’ group</a:t>
             </a:r>
-            <a:endParaRPr lang="en-US" dirty="0">
-              <a:ea typeface="+mn-lt"/>
-              <a:cs typeface="+mn-lt"/>
-            </a:endParaRPr>
+          </a:p>
+          <a:p>
+            <a:pPr marL="305435" indent="-305435"/>
+            <a:r>
+              <a:rPr lang="en-US" dirty="0">
+                <a:ea typeface="+mn-lt"/>
+                <a:cs typeface="+mn-lt"/>
+              </a:rPr>
+              <a:t>Test the functionality and then deactivate this Assignment Rule</a:t>
+            </a:r>
           </a:p>
         </p:txBody>
       </p:sp>
@@ -4664,7 +4823,7 @@
 </p:sld>
 </file>
 
-<file path=ppt/slides/slide13.xml><?xml version="1.0" encoding="utf-8"?>
+<file path=ppt/slides/slide14.xml><?xml version="1.0" encoding="utf-8"?>
 <p:sld xmlns:a="http://schemas.openxmlformats.org/drawingml/2006/main" xmlns:r="http://schemas.openxmlformats.org/officeDocument/2006/relationships" xmlns:p="http://schemas.openxmlformats.org/presentationml/2006/main">
   <p:cSld>
     <p:spTree>
@@ -4728,7 +4887,7 @@
 </p:sld>
 </file>
 
-<file path=ppt/slides/slide14.xml><?xml version="1.0" encoding="utf-8"?>
+<file path=ppt/slides/slide15.xml><?xml version="1.0" encoding="utf-8"?>
 <p:sld xmlns:a="http://schemas.openxmlformats.org/drawingml/2006/main" xmlns:r="http://schemas.openxmlformats.org/officeDocument/2006/relationships" xmlns:p="http://schemas.openxmlformats.org/presentationml/2006/main">
   <p:cSld>
     <p:spTree>
@@ -4840,7 +4999,7 @@
 </p:sld>
 </file>
 
-<file path=ppt/slides/slide15.xml><?xml version="1.0" encoding="utf-8"?>
+<file path=ppt/slides/slide16.xml><?xml version="1.0" encoding="utf-8"?>
 <p:sld xmlns:a="http://schemas.openxmlformats.org/drawingml/2006/main" xmlns:r="http://schemas.openxmlformats.org/officeDocument/2006/relationships" xmlns:p="http://schemas.openxmlformats.org/presentationml/2006/main">
   <p:cSld>
     <p:spTree>
@@ -5006,140 +5165,6 @@
 </p:sld>
 </file>
 
-<file path=ppt/slides/slide16.xml><?xml version="1.0" encoding="utf-8"?>
-<p:sld xmlns:a="http://schemas.openxmlformats.org/drawingml/2006/main" xmlns:r="http://schemas.openxmlformats.org/officeDocument/2006/relationships" xmlns:p="http://schemas.openxmlformats.org/presentationml/2006/main">
-  <p:cSld>
-    <p:spTree>
-      <p:nvGrpSpPr>
-        <p:cNvPr id="1" name=""/>
-        <p:cNvGrpSpPr/>
-        <p:nvPr/>
-      </p:nvGrpSpPr>
-      <p:grpSpPr>
-        <a:xfrm>
-          <a:off x="0" y="0"/>
-          <a:ext cx="0" cy="0"/>
-          <a:chOff x="0" y="0"/>
-          <a:chExt cx="0" cy="0"/>
-        </a:xfrm>
-      </p:grpSpPr>
-      <p:sp>
-        <p:nvSpPr>
-          <p:cNvPr id="2" name="Title 1">
-            <a:extLst>
-              <a:ext uri="{FF2B5EF4-FFF2-40B4-BE49-F238E27FC236}">
-                <a16:creationId xmlns:a16="http://schemas.microsoft.com/office/drawing/2014/main" id="{5EB90051-E65F-E0C9-488E-F59B15C2258C}"/>
-              </a:ext>
-            </a:extLst>
-          </p:cNvPr>
-          <p:cNvSpPr>
-            <a:spLocks noGrp="1"/>
-          </p:cNvSpPr>
-          <p:nvPr>
-            <p:ph type="title"/>
-          </p:nvPr>
-        </p:nvSpPr>
-        <p:spPr/>
-        <p:txBody>
-          <a:bodyPr/>
-          <a:lstStyle/>
-          <a:p>
-            <a:r>
-              <a:rPr lang="en-US" dirty="0"/>
-              <a:t>Reactive vs Proactive</a:t>
-            </a:r>
-          </a:p>
-        </p:txBody>
-      </p:sp>
-      <p:sp>
-        <p:nvSpPr>
-          <p:cNvPr id="3" name="Content Placeholder 2">
-            <a:extLst>
-              <a:ext uri="{FF2B5EF4-FFF2-40B4-BE49-F238E27FC236}">
-                <a16:creationId xmlns:a16="http://schemas.microsoft.com/office/drawing/2014/main" id="{47743F3E-73A2-0AA6-ACBF-98C8BAF173CC}"/>
-              </a:ext>
-            </a:extLst>
-          </p:cNvPr>
-          <p:cNvSpPr>
-            <a:spLocks noGrp="1"/>
-          </p:cNvSpPr>
-          <p:nvPr>
-            <p:ph idx="1"/>
-          </p:nvPr>
-        </p:nvSpPr>
-        <p:spPr/>
-        <p:txBody>
-          <a:bodyPr/>
-          <a:lstStyle/>
-          <a:p>
-            <a:r>
-              <a:rPr lang="en-US" dirty="0"/>
-              <a:t>Definition: </a:t>
-            </a:r>
-            <a:r>
-              <a:rPr lang="en-US" dirty="0">
-                <a:solidFill>
-                  <a:schemeClr val="accent2"/>
-                </a:solidFill>
-              </a:rPr>
-              <a:t>Reactive Problem Management </a:t>
-            </a:r>
-            <a:r>
-              <a:rPr lang="en-US" dirty="0"/>
-              <a:t>is triggered after an incident has occurred, and its goal is to identify and remove the root cause</a:t>
-            </a:r>
-          </a:p>
-          <a:p>
-            <a:pPr lvl="1"/>
-            <a:r>
-              <a:rPr lang="en-US" dirty="0"/>
-              <a:t>Problem records created from existing incidents</a:t>
-            </a:r>
-          </a:p>
-          <a:p>
-            <a:r>
-              <a:rPr lang="en-US" dirty="0"/>
-              <a:t>Definition: </a:t>
-            </a:r>
-            <a:r>
-              <a:rPr lang="en-US" dirty="0">
-                <a:solidFill>
-                  <a:schemeClr val="accent2"/>
-                </a:solidFill>
-              </a:rPr>
-              <a:t>Proactive Problem Management </a:t>
-            </a:r>
-            <a:r>
-              <a:rPr lang="en-US" dirty="0"/>
-              <a:t>aims to identify and prevent problems before they cause incidents</a:t>
-            </a:r>
-          </a:p>
-          <a:p>
-            <a:pPr lvl="1"/>
-            <a:r>
-              <a:rPr lang="en-US" dirty="0"/>
-              <a:t>Use trend analysis, monitoring data, and continuous improvement to detect issues early </a:t>
-            </a:r>
-          </a:p>
-          <a:p>
-            <a:pPr lvl="1"/>
-            <a:endParaRPr lang="en-US" dirty="0"/>
-          </a:p>
-        </p:txBody>
-      </p:sp>
-    </p:spTree>
-    <p:extLst>
-      <p:ext uri="{BB962C8B-B14F-4D97-AF65-F5344CB8AC3E}">
-        <p14:creationId xmlns:p14="http://schemas.microsoft.com/office/powerpoint/2010/main" val="1472518551"/>
-      </p:ext>
-    </p:extLst>
-  </p:cSld>
-  <p:clrMapOvr>
-    <a:masterClrMapping/>
-  </p:clrMapOvr>
-</p:sld>
-</file>
-
 <file path=ppt/slides/slide17.xml><?xml version="1.0" encoding="utf-8"?>
 <p:sld xmlns:a="http://schemas.openxmlformats.org/drawingml/2006/main" xmlns:r="http://schemas.openxmlformats.org/officeDocument/2006/relationships" xmlns:p="http://schemas.openxmlformats.org/presentationml/2006/main">
   <p:cSld>
@@ -5162,7 +5187,7 @@
           <p:cNvPr id="2" name="Title 1">
             <a:extLst>
               <a:ext uri="{FF2B5EF4-FFF2-40B4-BE49-F238E27FC236}">
-                <a16:creationId xmlns:a16="http://schemas.microsoft.com/office/drawing/2014/main" id="{23FFC745-70F1-2EEF-8C2F-71D334B9DF8B}"/>
+                <a16:creationId xmlns:a16="http://schemas.microsoft.com/office/drawing/2014/main" id="{5EB90051-E65F-E0C9-488E-F59B15C2258C}"/>
               </a:ext>
             </a:extLst>
           </p:cNvPr>
@@ -5180,7 +5205,7 @@
           <a:p>
             <a:r>
               <a:rPr lang="en-US" dirty="0"/>
-              <a:t>Key Problem Management Features</a:t>
+              <a:t>Reactive vs Proactive</a:t>
             </a:r>
           </a:p>
         </p:txBody>
@@ -5190,7 +5215,7 @@
           <p:cNvPr id="3" name="Content Placeholder 2">
             <a:extLst>
               <a:ext uri="{FF2B5EF4-FFF2-40B4-BE49-F238E27FC236}">
-                <a16:creationId xmlns:a16="http://schemas.microsoft.com/office/drawing/2014/main" id="{18C168EC-9684-3E21-8BEA-2CCD41D4C786}"/>
+                <a16:creationId xmlns:a16="http://schemas.microsoft.com/office/drawing/2014/main" id="{47743F3E-73A2-0AA6-ACBF-98C8BAF173CC}"/>
               </a:ext>
             </a:extLst>
           </p:cNvPr>
@@ -5207,94 +5232,64 @@
           <a:lstStyle/>
           <a:p>
             <a:r>
+              <a:rPr lang="en-US" dirty="0"/>
+              <a:t>Definition: </a:t>
+            </a:r>
+            <a:r>
               <a:rPr lang="en-US" dirty="0">
                 <a:solidFill>
                   <a:schemeClr val="accent2"/>
                 </a:solidFill>
               </a:rPr>
-              <a:t>The Problem record </a:t>
-            </a:r>
-            <a:r>
-              <a:rPr lang="en-US" dirty="0"/>
-              <a:t>– link related incidents; log problem details; handle resolution/closure</a:t>
-            </a:r>
-          </a:p>
-          <a:p>
+              <a:t>Reactive Problem Management </a:t>
+            </a:r>
+            <a:r>
+              <a:rPr lang="en-US" dirty="0"/>
+              <a:t>is triggered after an incident has occurred, and its goal is to identify and remove the root cause</a:t>
+            </a:r>
+          </a:p>
+          <a:p>
+            <a:pPr lvl="1"/>
+            <a:r>
+              <a:rPr lang="en-US" dirty="0"/>
+              <a:t>Problem records created from existing incidents</a:t>
+            </a:r>
+          </a:p>
+          <a:p>
+            <a:r>
+              <a:rPr lang="en-US" dirty="0"/>
+              <a:t>Definition: </a:t>
+            </a:r>
             <a:r>
               <a:rPr lang="en-US" dirty="0">
                 <a:solidFill>
                   <a:schemeClr val="accent2"/>
                 </a:solidFill>
               </a:rPr>
-              <a:t>Assignment Rules </a:t>
-            </a:r>
-            <a:r>
-              <a:rPr lang="en-US" dirty="0"/>
-              <a:t>– automatically routes problems to the correct support group or individual</a:t>
-            </a:r>
-          </a:p>
-          <a:p>
-            <a:r>
-              <a:rPr lang="en-US" dirty="0">
-                <a:solidFill>
-                  <a:schemeClr val="accent2"/>
-                </a:solidFill>
-              </a:rPr>
-              <a:t>Priority Matrix </a:t>
-            </a:r>
-            <a:r>
-              <a:rPr lang="en-US" dirty="0"/>
-              <a:t>– priority = impact + urgency</a:t>
-            </a:r>
-          </a:p>
-          <a:p>
-            <a:r>
-              <a:rPr lang="en-US" dirty="0">
-                <a:solidFill>
-                  <a:schemeClr val="accent2"/>
-                </a:solidFill>
-              </a:rPr>
-              <a:t>Work Notes &amp; Comments </a:t>
-            </a:r>
-            <a:r>
-              <a:rPr lang="en-US" dirty="0"/>
-              <a:t>– facilitate collaboration between support teams and communicate with the user</a:t>
-            </a:r>
-          </a:p>
-          <a:p>
-            <a:r>
-              <a:rPr lang="en-US" dirty="0">
-                <a:solidFill>
-                  <a:schemeClr val="accent2"/>
-                </a:solidFill>
-              </a:rPr>
-              <a:t>Communicate Workarounds </a:t>
-            </a:r>
-            <a:r>
-              <a:rPr lang="en-US" dirty="0"/>
-              <a:t>– tell related incident owners about the fix</a:t>
-            </a:r>
-          </a:p>
-          <a:p>
-            <a:r>
-              <a:rPr lang="en-US" dirty="0">
-                <a:solidFill>
-                  <a:schemeClr val="accent2"/>
-                </a:solidFill>
-              </a:rPr>
-              <a:t>Known Errors </a:t>
-            </a:r>
-            <a:r>
-              <a:rPr lang="en-US" dirty="0"/>
-              <a:t>– Identify root causes and find solutions; create knowledge base articles</a:t>
-            </a:r>
+              <a:t>Proactive Problem Management </a:t>
+            </a:r>
+            <a:r>
+              <a:rPr lang="en-US" dirty="0"/>
+              <a:t>aims to identify and prevent problems before they cause incidents</a:t>
+            </a:r>
+          </a:p>
+          <a:p>
+            <a:pPr lvl="1"/>
+            <a:r>
+              <a:rPr lang="en-US" dirty="0"/>
+              <a:t>Use trend analysis, monitoring data, and continuous improvement to detect issues early </a:t>
+            </a:r>
+          </a:p>
+          <a:p>
+            <a:pPr lvl="1"/>
+            <a:endParaRPr lang="en-US" dirty="0"/>
           </a:p>
         </p:txBody>
       </p:sp>
     </p:spTree>
     <p:extLst>
       <p:ext uri="{BB962C8B-B14F-4D97-AF65-F5344CB8AC3E}">
-        <p14:creationId xmlns:p14="http://schemas.microsoft.com/office/powerpoint/2010/main" val="3301352783"/>
+        <p14:creationId xmlns:p14="http://schemas.microsoft.com/office/powerpoint/2010/main" val="1472518551"/>
       </p:ext>
     </p:extLst>
   </p:cSld>
@@ -5326,6 +5321,170 @@
           <p:cNvPr id="2" name="Title 1">
             <a:extLst>
               <a:ext uri="{FF2B5EF4-FFF2-40B4-BE49-F238E27FC236}">
+                <a16:creationId xmlns:a16="http://schemas.microsoft.com/office/drawing/2014/main" id="{23FFC745-70F1-2EEF-8C2F-71D334B9DF8B}"/>
+              </a:ext>
+            </a:extLst>
+          </p:cNvPr>
+          <p:cNvSpPr>
+            <a:spLocks noGrp="1"/>
+          </p:cNvSpPr>
+          <p:nvPr>
+            <p:ph type="title"/>
+          </p:nvPr>
+        </p:nvSpPr>
+        <p:spPr/>
+        <p:txBody>
+          <a:bodyPr/>
+          <a:lstStyle/>
+          <a:p>
+            <a:r>
+              <a:rPr lang="en-US" dirty="0"/>
+              <a:t>Key Problem Management Features</a:t>
+            </a:r>
+          </a:p>
+        </p:txBody>
+      </p:sp>
+      <p:sp>
+        <p:nvSpPr>
+          <p:cNvPr id="3" name="Content Placeholder 2">
+            <a:extLst>
+              <a:ext uri="{FF2B5EF4-FFF2-40B4-BE49-F238E27FC236}">
+                <a16:creationId xmlns:a16="http://schemas.microsoft.com/office/drawing/2014/main" id="{18C168EC-9684-3E21-8BEA-2CCD41D4C786}"/>
+              </a:ext>
+            </a:extLst>
+          </p:cNvPr>
+          <p:cNvSpPr>
+            <a:spLocks noGrp="1"/>
+          </p:cNvSpPr>
+          <p:nvPr>
+            <p:ph idx="1"/>
+          </p:nvPr>
+        </p:nvSpPr>
+        <p:spPr/>
+        <p:txBody>
+          <a:bodyPr/>
+          <a:lstStyle/>
+          <a:p>
+            <a:r>
+              <a:rPr lang="en-US" dirty="0">
+                <a:solidFill>
+                  <a:schemeClr val="accent2"/>
+                </a:solidFill>
+              </a:rPr>
+              <a:t>The Problem record </a:t>
+            </a:r>
+            <a:r>
+              <a:rPr lang="en-US" dirty="0"/>
+              <a:t>– link related incidents; log problem details; handle resolution/closure</a:t>
+            </a:r>
+          </a:p>
+          <a:p>
+            <a:r>
+              <a:rPr lang="en-US" dirty="0">
+                <a:solidFill>
+                  <a:schemeClr val="accent2"/>
+                </a:solidFill>
+              </a:rPr>
+              <a:t>Assignment Rules </a:t>
+            </a:r>
+            <a:r>
+              <a:rPr lang="en-US" dirty="0"/>
+              <a:t>– automatically routes problems to the correct support group or individual</a:t>
+            </a:r>
+          </a:p>
+          <a:p>
+            <a:r>
+              <a:rPr lang="en-US" dirty="0">
+                <a:solidFill>
+                  <a:schemeClr val="accent2"/>
+                </a:solidFill>
+              </a:rPr>
+              <a:t>Priority Matrix </a:t>
+            </a:r>
+            <a:r>
+              <a:rPr lang="en-US" dirty="0"/>
+              <a:t>– priority = impact + urgency</a:t>
+            </a:r>
+          </a:p>
+          <a:p>
+            <a:r>
+              <a:rPr lang="en-US" dirty="0">
+                <a:solidFill>
+                  <a:schemeClr val="accent2"/>
+                </a:solidFill>
+              </a:rPr>
+              <a:t>Work Notes &amp; Comments </a:t>
+            </a:r>
+            <a:r>
+              <a:rPr lang="en-US" dirty="0"/>
+              <a:t>– facilitate collaboration between support teams and communicate with the user</a:t>
+            </a:r>
+          </a:p>
+          <a:p>
+            <a:r>
+              <a:rPr lang="en-US" dirty="0">
+                <a:solidFill>
+                  <a:schemeClr val="accent2"/>
+                </a:solidFill>
+              </a:rPr>
+              <a:t>Communicate Workarounds </a:t>
+            </a:r>
+            <a:r>
+              <a:rPr lang="en-US" dirty="0"/>
+              <a:t>– tell related incident owners about the fix</a:t>
+            </a:r>
+          </a:p>
+          <a:p>
+            <a:r>
+              <a:rPr lang="en-US" dirty="0">
+                <a:solidFill>
+                  <a:schemeClr val="accent2"/>
+                </a:solidFill>
+              </a:rPr>
+              <a:t>Known Errors </a:t>
+            </a:r>
+            <a:r>
+              <a:rPr lang="en-US" dirty="0"/>
+              <a:t>– Identify root causes and find solutions; create knowledge base articles</a:t>
+            </a:r>
+          </a:p>
+        </p:txBody>
+      </p:sp>
+    </p:spTree>
+    <p:extLst>
+      <p:ext uri="{BB962C8B-B14F-4D97-AF65-F5344CB8AC3E}">
+        <p14:creationId xmlns:p14="http://schemas.microsoft.com/office/powerpoint/2010/main" val="3301352783"/>
+      </p:ext>
+    </p:extLst>
+  </p:cSld>
+  <p:clrMapOvr>
+    <a:masterClrMapping/>
+  </p:clrMapOvr>
+</p:sld>
+</file>
+
+<file path=ppt/slides/slide19.xml><?xml version="1.0" encoding="utf-8"?>
+<p:sld xmlns:a="http://schemas.openxmlformats.org/drawingml/2006/main" xmlns:r="http://schemas.openxmlformats.org/officeDocument/2006/relationships" xmlns:p="http://schemas.openxmlformats.org/presentationml/2006/main">
+  <p:cSld>
+    <p:spTree>
+      <p:nvGrpSpPr>
+        <p:cNvPr id="1" name=""/>
+        <p:cNvGrpSpPr/>
+        <p:nvPr/>
+      </p:nvGrpSpPr>
+      <p:grpSpPr>
+        <a:xfrm>
+          <a:off x="0" y="0"/>
+          <a:ext cx="0" cy="0"/>
+          <a:chOff x="0" y="0"/>
+          <a:chExt cx="0" cy="0"/>
+        </a:xfrm>
+      </p:grpSpPr>
+      <p:sp>
+        <p:nvSpPr>
+          <p:cNvPr id="2" name="Title 1">
+            <a:extLst>
+              <a:ext uri="{FF2B5EF4-FFF2-40B4-BE49-F238E27FC236}">
                 <a16:creationId xmlns:a16="http://schemas.microsoft.com/office/drawing/2014/main" id="{76590990-6B86-C8A4-7A44-555AE00DD931}"/>
               </a:ext>
             </a:extLst>
@@ -5498,7 +5657,140 @@
 </p:sld>
 </file>
 
-<file path=ppt/slides/slide19.xml><?xml version="1.0" encoding="utf-8"?>
+<file path=ppt/slides/slide2.xml><?xml version="1.0" encoding="utf-8"?>
+<p:sld xmlns:a="http://schemas.openxmlformats.org/drawingml/2006/main" xmlns:r="http://schemas.openxmlformats.org/officeDocument/2006/relationships" xmlns:p="http://schemas.openxmlformats.org/presentationml/2006/main">
+  <p:cSld>
+    <p:spTree>
+      <p:nvGrpSpPr>
+        <p:cNvPr id="1" name=""/>
+        <p:cNvGrpSpPr/>
+        <p:nvPr/>
+      </p:nvGrpSpPr>
+      <p:grpSpPr>
+        <a:xfrm>
+          <a:off x="0" y="0"/>
+          <a:ext cx="0" cy="0"/>
+          <a:chOff x="0" y="0"/>
+          <a:chExt cx="0" cy="0"/>
+        </a:xfrm>
+      </p:grpSpPr>
+      <p:sp>
+        <p:nvSpPr>
+          <p:cNvPr id="2" name="Title 1">
+            <a:extLst>
+              <a:ext uri="{FF2B5EF4-FFF2-40B4-BE49-F238E27FC236}">
+                <a16:creationId xmlns:a16="http://schemas.microsoft.com/office/drawing/2014/main" id="{47395674-13A9-9205-28DD-508DE993CD69}"/>
+              </a:ext>
+            </a:extLst>
+          </p:cNvPr>
+          <p:cNvSpPr>
+            <a:spLocks noGrp="1"/>
+          </p:cNvSpPr>
+          <p:nvPr>
+            <p:ph type="title"/>
+          </p:nvPr>
+        </p:nvSpPr>
+        <p:spPr/>
+        <p:txBody>
+          <a:bodyPr/>
+          <a:lstStyle/>
+          <a:p>
+            <a:r>
+              <a:rPr lang="en-US" dirty="0"/>
+              <a:t>What is Incident Management?</a:t>
+            </a:r>
+          </a:p>
+        </p:txBody>
+      </p:sp>
+      <p:sp>
+        <p:nvSpPr>
+          <p:cNvPr id="3" name="Content Placeholder 2">
+            <a:extLst>
+              <a:ext uri="{FF2B5EF4-FFF2-40B4-BE49-F238E27FC236}">
+                <a16:creationId xmlns:a16="http://schemas.microsoft.com/office/drawing/2014/main" id="{4C7E3DD8-E45A-6112-A399-C81789AA6D17}"/>
+              </a:ext>
+            </a:extLst>
+          </p:cNvPr>
+          <p:cNvSpPr>
+            <a:spLocks noGrp="1"/>
+          </p:cNvSpPr>
+          <p:nvPr>
+            <p:ph idx="1"/>
+          </p:nvPr>
+        </p:nvSpPr>
+        <p:spPr>
+          <a:xfrm>
+            <a:off x="581191" y="2428849"/>
+            <a:ext cx="11029615" cy="3419057"/>
+          </a:xfrm>
+        </p:spPr>
+        <p:txBody>
+          <a:bodyPr>
+            <a:normAutofit/>
+          </a:bodyPr>
+          <a:lstStyle/>
+          <a:p>
+            <a:r>
+              <a:rPr lang="en-US" dirty="0"/>
+              <a:t>Definition: </a:t>
+            </a:r>
+            <a:r>
+              <a:rPr lang="en-US" dirty="0">
+                <a:solidFill>
+                  <a:schemeClr val="accent2"/>
+                </a:solidFill>
+              </a:rPr>
+              <a:t>Incident Management </a:t>
+            </a:r>
+            <a:r>
+              <a:rPr lang="en-US" dirty="0"/>
+              <a:t>in ServiceNow is the process and supporting application used to restore normal service operation as quickly as possible after an unplanned interruption or reduction in quality of IT service — minimizing the impact on business operations.</a:t>
+            </a:r>
+          </a:p>
+          <a:p>
+            <a:pPr lvl="1"/>
+            <a:r>
+              <a:rPr lang="en-US" dirty="0"/>
+              <a:t>Make sure service disruptions are resolved quickly</a:t>
+            </a:r>
+          </a:p>
+          <a:p>
+            <a:pPr lvl="1"/>
+            <a:r>
+              <a:rPr lang="en-US" dirty="0"/>
+              <a:t>Work is assigned automatically to the right teams</a:t>
+            </a:r>
+          </a:p>
+          <a:p>
+            <a:pPr lvl="1"/>
+            <a:r>
+              <a:rPr lang="en-US" dirty="0"/>
+              <a:t>Customers and support staff can track progress transparently</a:t>
+            </a:r>
+          </a:p>
+          <a:p>
+            <a:pPr lvl="1"/>
+            <a:r>
+              <a:rPr lang="en-US" dirty="0"/>
+              <a:t>Finding a cause is not the concern of incidents, restoring service quickly is</a:t>
+            </a:r>
+          </a:p>
+        </p:txBody>
+      </p:sp>
+    </p:spTree>
+    <p:extLst>
+      <p:ext uri="{BB962C8B-B14F-4D97-AF65-F5344CB8AC3E}">
+        <p14:creationId xmlns:p14="http://schemas.microsoft.com/office/powerpoint/2010/main" val="2296974838"/>
+      </p:ext>
+    </p:extLst>
+  </p:cSld>
+  <p:clrMapOvr>
+    <a:masterClrMapping/>
+  </p:clrMapOvr>
+</p:sld>
+</file>
+
+<file path=ppt/slides/slide20.xml><?xml version="1.0" encoding="utf-8"?>
 <p:sld xmlns:a="http://schemas.openxmlformats.org/drawingml/2006/main" xmlns:r="http://schemas.openxmlformats.org/officeDocument/2006/relationships" xmlns:p="http://schemas.openxmlformats.org/presentationml/2006/main">
   <p:cSld>
     <p:spTree>
@@ -5586,140 +5878,7 @@
 </p:sld>
 </file>
 
-<file path=ppt/slides/slide2.xml><?xml version="1.0" encoding="utf-8"?>
-<p:sld xmlns:a="http://schemas.openxmlformats.org/drawingml/2006/main" xmlns:r="http://schemas.openxmlformats.org/officeDocument/2006/relationships" xmlns:p="http://schemas.openxmlformats.org/presentationml/2006/main">
-  <p:cSld>
-    <p:spTree>
-      <p:nvGrpSpPr>
-        <p:cNvPr id="1" name=""/>
-        <p:cNvGrpSpPr/>
-        <p:nvPr/>
-      </p:nvGrpSpPr>
-      <p:grpSpPr>
-        <a:xfrm>
-          <a:off x="0" y="0"/>
-          <a:ext cx="0" cy="0"/>
-          <a:chOff x="0" y="0"/>
-          <a:chExt cx="0" cy="0"/>
-        </a:xfrm>
-      </p:grpSpPr>
-      <p:sp>
-        <p:nvSpPr>
-          <p:cNvPr id="2" name="Title 1">
-            <a:extLst>
-              <a:ext uri="{FF2B5EF4-FFF2-40B4-BE49-F238E27FC236}">
-                <a16:creationId xmlns:a16="http://schemas.microsoft.com/office/drawing/2014/main" id="{47395674-13A9-9205-28DD-508DE993CD69}"/>
-              </a:ext>
-            </a:extLst>
-          </p:cNvPr>
-          <p:cNvSpPr>
-            <a:spLocks noGrp="1"/>
-          </p:cNvSpPr>
-          <p:nvPr>
-            <p:ph type="title"/>
-          </p:nvPr>
-        </p:nvSpPr>
-        <p:spPr/>
-        <p:txBody>
-          <a:bodyPr/>
-          <a:lstStyle/>
-          <a:p>
-            <a:r>
-              <a:rPr lang="en-US" dirty="0"/>
-              <a:t>What is Incident Management?</a:t>
-            </a:r>
-          </a:p>
-        </p:txBody>
-      </p:sp>
-      <p:sp>
-        <p:nvSpPr>
-          <p:cNvPr id="3" name="Content Placeholder 2">
-            <a:extLst>
-              <a:ext uri="{FF2B5EF4-FFF2-40B4-BE49-F238E27FC236}">
-                <a16:creationId xmlns:a16="http://schemas.microsoft.com/office/drawing/2014/main" id="{4C7E3DD8-E45A-6112-A399-C81789AA6D17}"/>
-              </a:ext>
-            </a:extLst>
-          </p:cNvPr>
-          <p:cNvSpPr>
-            <a:spLocks noGrp="1"/>
-          </p:cNvSpPr>
-          <p:nvPr>
-            <p:ph idx="1"/>
-          </p:nvPr>
-        </p:nvSpPr>
-        <p:spPr>
-          <a:xfrm>
-            <a:off x="581191" y="2428849"/>
-            <a:ext cx="11029615" cy="3419057"/>
-          </a:xfrm>
-        </p:spPr>
-        <p:txBody>
-          <a:bodyPr>
-            <a:normAutofit/>
-          </a:bodyPr>
-          <a:lstStyle/>
-          <a:p>
-            <a:r>
-              <a:rPr lang="en-US" dirty="0"/>
-              <a:t>Definition: </a:t>
-            </a:r>
-            <a:r>
-              <a:rPr lang="en-US" dirty="0">
-                <a:solidFill>
-                  <a:schemeClr val="accent2"/>
-                </a:solidFill>
-              </a:rPr>
-              <a:t>Incident Management </a:t>
-            </a:r>
-            <a:r>
-              <a:rPr lang="en-US" dirty="0"/>
-              <a:t>in ServiceNow is the process and supporting application used to restore normal service operation as quickly as possible after an unplanned interruption or reduction in quality of IT service — minimizing the impact on business operations.</a:t>
-            </a:r>
-          </a:p>
-          <a:p>
-            <a:pPr lvl="1"/>
-            <a:r>
-              <a:rPr lang="en-US" dirty="0"/>
-              <a:t>Make sure service disruptions are resolved quickly</a:t>
-            </a:r>
-          </a:p>
-          <a:p>
-            <a:pPr lvl="1"/>
-            <a:r>
-              <a:rPr lang="en-US" dirty="0"/>
-              <a:t>Work is assigned automatically to the right teams</a:t>
-            </a:r>
-          </a:p>
-          <a:p>
-            <a:pPr lvl="1"/>
-            <a:r>
-              <a:rPr lang="en-US" dirty="0"/>
-              <a:t>Customers and support staff can track progress transparently</a:t>
-            </a:r>
-          </a:p>
-          <a:p>
-            <a:pPr lvl="1"/>
-            <a:r>
-              <a:rPr lang="en-US" dirty="0"/>
-              <a:t>Finding a cause is not the concern of incidents, restoring service quickly is</a:t>
-            </a:r>
-          </a:p>
-        </p:txBody>
-      </p:sp>
-    </p:spTree>
-    <p:extLst>
-      <p:ext uri="{BB962C8B-B14F-4D97-AF65-F5344CB8AC3E}">
-        <p14:creationId xmlns:p14="http://schemas.microsoft.com/office/powerpoint/2010/main" val="2296974838"/>
-      </p:ext>
-    </p:extLst>
-  </p:cSld>
-  <p:clrMapOvr>
-    <a:masterClrMapping/>
-  </p:clrMapOvr>
-</p:sld>
-</file>
-
-<file path=ppt/slides/slide20.xml><?xml version="1.0" encoding="utf-8"?>
+<file path=ppt/slides/slide21.xml><?xml version="1.0" encoding="utf-8"?>
 <p:sld xmlns:a="http://schemas.openxmlformats.org/drawingml/2006/main" xmlns:r="http://schemas.openxmlformats.org/officeDocument/2006/relationships" xmlns:p="http://schemas.openxmlformats.org/presentationml/2006/main">
   <p:cSld>
     <p:spTree>
@@ -5937,7 +6096,7 @@
 </p:sld>
 </file>
 
-<file path=ppt/slides/slide21.xml><?xml version="1.0" encoding="utf-8"?>
+<file path=ppt/slides/slide22.xml><?xml version="1.0" encoding="utf-8"?>
 <p:sld xmlns:a="http://schemas.openxmlformats.org/drawingml/2006/main" xmlns:r="http://schemas.openxmlformats.org/officeDocument/2006/relationships" xmlns:p="http://schemas.openxmlformats.org/presentationml/2006/main">
   <p:cSld>
     <p:spTree>
@@ -6175,7 +6334,7 @@
 </p:sld>
 </file>
 
-<file path=ppt/slides/slide22.xml><?xml version="1.0" encoding="utf-8"?>
+<file path=ppt/slides/slide23.xml><?xml version="1.0" encoding="utf-8"?>
 <p:sld xmlns:a="http://schemas.openxmlformats.org/drawingml/2006/main" xmlns:r="http://schemas.openxmlformats.org/officeDocument/2006/relationships" xmlns:p="http://schemas.openxmlformats.org/presentationml/2006/main">
   <p:cSld>
     <p:spTree>
@@ -6374,7 +6533,7 @@
 </p:sld>
 </file>
 
-<file path=ppt/slides/slide23.xml><?xml version="1.0" encoding="utf-8"?>
+<file path=ppt/slides/slide24.xml><?xml version="1.0" encoding="utf-8"?>
 <p:sld xmlns:a="http://schemas.openxmlformats.org/drawingml/2006/main" xmlns:r="http://schemas.openxmlformats.org/officeDocument/2006/relationships" xmlns:p="http://schemas.openxmlformats.org/presentationml/2006/main">
   <p:cSld>
     <p:spTree>
@@ -6537,7 +6696,7 @@
 </p:sld>
 </file>
 
-<file path=ppt/slides/slide24.xml><?xml version="1.0" encoding="utf-8"?>
+<file path=ppt/slides/slide25.xml><?xml version="1.0" encoding="utf-8"?>
 <p:sld xmlns:a="http://schemas.openxmlformats.org/drawingml/2006/main" xmlns:r="http://schemas.openxmlformats.org/officeDocument/2006/relationships" xmlns:p="http://schemas.openxmlformats.org/presentationml/2006/main">
   <p:cSld>
     <p:spTree>
@@ -6919,7 +7078,7 @@
 </p:sld>
 </file>
 
-<file path=ppt/slides/slide25.xml><?xml version="1.0" encoding="utf-8"?>
+<file path=ppt/slides/slide26.xml><?xml version="1.0" encoding="utf-8"?>
 <p:sld xmlns:a="http://schemas.openxmlformats.org/drawingml/2006/main" xmlns:r="http://schemas.openxmlformats.org/officeDocument/2006/relationships" xmlns:p="http://schemas.openxmlformats.org/presentationml/2006/main">
   <p:cSld>
     <p:spTree>
@@ -6974,146 +7133,6 @@
     <p:extLst>
       <p:ext uri="{BB962C8B-B14F-4D97-AF65-F5344CB8AC3E}">
         <p14:creationId xmlns:p14="http://schemas.microsoft.com/office/powerpoint/2010/main" val="380141261"/>
-      </p:ext>
-    </p:extLst>
-  </p:cSld>
-  <p:clrMapOvr>
-    <a:masterClrMapping/>
-  </p:clrMapOvr>
-</p:sld>
-</file>
-
-<file path=ppt/slides/slide26.xml><?xml version="1.0" encoding="utf-8"?>
-<p:sld xmlns:a="http://schemas.openxmlformats.org/drawingml/2006/main" xmlns:r="http://schemas.openxmlformats.org/officeDocument/2006/relationships" xmlns:p="http://schemas.openxmlformats.org/presentationml/2006/main">
-  <p:cSld>
-    <p:spTree>
-      <p:nvGrpSpPr>
-        <p:cNvPr id="1" name=""/>
-        <p:cNvGrpSpPr/>
-        <p:nvPr/>
-      </p:nvGrpSpPr>
-      <p:grpSpPr>
-        <a:xfrm>
-          <a:off x="0" y="0"/>
-          <a:ext cx="0" cy="0"/>
-          <a:chOff x="0" y="0"/>
-          <a:chExt cx="0" cy="0"/>
-        </a:xfrm>
-      </p:grpSpPr>
-      <p:sp>
-        <p:nvSpPr>
-          <p:cNvPr id="2" name="Title 1">
-            <a:extLst>
-              <a:ext uri="{FF2B5EF4-FFF2-40B4-BE49-F238E27FC236}">
-                <a16:creationId xmlns:a16="http://schemas.microsoft.com/office/drawing/2014/main" id="{D4458A7F-7962-0CD3-6D38-C469283BDC9F}"/>
-              </a:ext>
-            </a:extLst>
-          </p:cNvPr>
-          <p:cNvSpPr>
-            <a:spLocks noGrp="1"/>
-          </p:cNvSpPr>
-          <p:nvPr>
-            <p:ph type="title"/>
-          </p:nvPr>
-        </p:nvSpPr>
-        <p:spPr/>
-        <p:txBody>
-          <a:bodyPr/>
-          <a:lstStyle/>
-          <a:p>
-            <a:r>
-              <a:rPr lang="en-US" dirty="0"/>
-              <a:t>What is Change Management?</a:t>
-            </a:r>
-          </a:p>
-        </p:txBody>
-      </p:sp>
-      <p:sp>
-        <p:nvSpPr>
-          <p:cNvPr id="3" name="Content Placeholder 2">
-            <a:extLst>
-              <a:ext uri="{FF2B5EF4-FFF2-40B4-BE49-F238E27FC236}">
-                <a16:creationId xmlns:a16="http://schemas.microsoft.com/office/drawing/2014/main" id="{E288AB57-8C17-2D7A-82A4-4954811D22CE}"/>
-              </a:ext>
-            </a:extLst>
-          </p:cNvPr>
-          <p:cNvSpPr>
-            <a:spLocks noGrp="1"/>
-          </p:cNvSpPr>
-          <p:nvPr>
-            <p:ph idx="1"/>
-          </p:nvPr>
-        </p:nvSpPr>
-        <p:spPr/>
-        <p:txBody>
-          <a:bodyPr/>
-          <a:lstStyle/>
-          <a:p>
-            <a:r>
-              <a:rPr lang="en-US" dirty="0"/>
-              <a:t>We don’t call it change management anymore in ITIL version 4. </a:t>
-            </a:r>
-          </a:p>
-          <a:p>
-            <a:r>
-              <a:rPr lang="en-US" dirty="0"/>
-              <a:t>ITIL V3 = Change Management </a:t>
-            </a:r>
-          </a:p>
-          <a:p>
-            <a:r>
-              <a:rPr lang="en-US" dirty="0"/>
-              <a:t>ITIL V4 = Change Enablement</a:t>
-            </a:r>
-          </a:p>
-          <a:p>
-            <a:r>
-              <a:rPr lang="en-US" dirty="0"/>
-              <a:t>Definition: </a:t>
-            </a:r>
-            <a:r>
-              <a:rPr lang="en-US" dirty="0">
-                <a:solidFill>
-                  <a:schemeClr val="accent2"/>
-                </a:solidFill>
-              </a:rPr>
-              <a:t>Change enablement </a:t>
-            </a:r>
-            <a:r>
-              <a:rPr lang="en-US" dirty="0"/>
-              <a:t>is the management practice of ensuring that changes to IT services and the IT infrastructure are implemented in a way that minimizes risk and disruption while maximizing value </a:t>
-            </a:r>
-          </a:p>
-          <a:p>
-            <a:endParaRPr lang="en-US" dirty="0"/>
-          </a:p>
-          <a:p>
-            <a:endParaRPr lang="en-US" dirty="0"/>
-          </a:p>
-          <a:p>
-            <a:pPr marL="0" indent="0" algn="ctr">
-              <a:buNone/>
-            </a:pPr>
-            <a:r>
-              <a:rPr lang="en-US" dirty="0"/>
-              <a:t>You may see an even older term ‘change control’. In day-to-day practice, you could see or hear all 3.</a:t>
-            </a:r>
-          </a:p>
-          <a:p>
-            <a:pPr marL="0" indent="0" algn="ctr">
-              <a:buNone/>
-            </a:pPr>
-            <a:r>
-              <a:rPr lang="en-US" dirty="0"/>
-              <a:t>Change Control, Change Management, Change Enablement (Newest)</a:t>
-            </a:r>
-          </a:p>
-        </p:txBody>
-      </p:sp>
-    </p:spTree>
-    <p:extLst>
-      <p:ext uri="{BB962C8B-B14F-4D97-AF65-F5344CB8AC3E}">
-        <p14:creationId xmlns:p14="http://schemas.microsoft.com/office/powerpoint/2010/main" val="2546766448"/>
       </p:ext>
     </p:extLst>
   </p:cSld>
@@ -7145,7 +7164,7 @@
           <p:cNvPr id="2" name="Title 1">
             <a:extLst>
               <a:ext uri="{FF2B5EF4-FFF2-40B4-BE49-F238E27FC236}">
-                <a16:creationId xmlns:a16="http://schemas.microsoft.com/office/drawing/2014/main" id="{69FB02F0-5CF1-56C1-DD10-FFAB584D20E7}"/>
+                <a16:creationId xmlns:a16="http://schemas.microsoft.com/office/drawing/2014/main" id="{D4458A7F-7962-0CD3-6D38-C469283BDC9F}"/>
               </a:ext>
             </a:extLst>
           </p:cNvPr>
@@ -7163,7 +7182,7 @@
           <a:p>
             <a:r>
               <a:rPr lang="en-US" dirty="0"/>
-              <a:t>Change Types</a:t>
+              <a:t>What is Change Management?</a:t>
             </a:r>
           </a:p>
         </p:txBody>
@@ -7173,7 +7192,7 @@
           <p:cNvPr id="3" name="Content Placeholder 2">
             <a:extLst>
               <a:ext uri="{FF2B5EF4-FFF2-40B4-BE49-F238E27FC236}">
-                <a16:creationId xmlns:a16="http://schemas.microsoft.com/office/drawing/2014/main" id="{7221DC42-2694-ADC2-4855-D806E75AD6CC}"/>
+                <a16:creationId xmlns:a16="http://schemas.microsoft.com/office/drawing/2014/main" id="{E288AB57-8C17-2D7A-82A4-4954811D22CE}"/>
               </a:ext>
             </a:extLst>
           </p:cNvPr>
@@ -7191,6 +7210,24 @@
           <a:p>
             <a:r>
               <a:rPr lang="en-US" dirty="0"/>
+              <a:t>We don’t call it change management anymore in ITIL version 4. </a:t>
+            </a:r>
+          </a:p>
+          <a:p>
+            <a:r>
+              <a:rPr lang="en-US" dirty="0"/>
+              <a:t>ITIL V3 = Change Management </a:t>
+            </a:r>
+          </a:p>
+          <a:p>
+            <a:r>
+              <a:rPr lang="en-US" dirty="0"/>
+              <a:t>ITIL V4 = Change Enablement</a:t>
+            </a:r>
+          </a:p>
+          <a:p>
+            <a:r>
+              <a:rPr lang="en-US" dirty="0"/>
               <a:t>Definition: </a:t>
             </a:r>
             <a:r>
@@ -7199,69 +7236,15 @@
                   <a:schemeClr val="accent2"/>
                 </a:solidFill>
               </a:rPr>
-              <a:t>Standard Changes </a:t>
-            </a:r>
-            <a:r>
-              <a:rPr lang="en-US" dirty="0"/>
-              <a:t>are pre-authorized changes that are low-risk and don’t need to be assessed or authorized </a:t>
-            </a:r>
-          </a:p>
-          <a:p>
-            <a:pPr lvl="1"/>
-            <a:r>
-              <a:rPr lang="en-US" dirty="0"/>
-              <a:t>Example: provisioning a new employee’s email using a script</a:t>
-            </a:r>
-          </a:p>
-          <a:p>
-            <a:r>
-              <a:rPr lang="en-US" dirty="0"/>
-              <a:t>Definition:  An </a:t>
-            </a:r>
-            <a:r>
-              <a:rPr lang="en-US" dirty="0">
-                <a:solidFill>
-                  <a:schemeClr val="accent2"/>
-                </a:solidFill>
-              </a:rPr>
-              <a:t>Emergency Change </a:t>
-            </a:r>
-            <a:r>
-              <a:rPr lang="en-US" dirty="0"/>
-              <a:t>is a change that must be implemented as soon as possible</a:t>
-            </a:r>
-          </a:p>
-          <a:p>
-            <a:pPr lvl="1"/>
-            <a:r>
-              <a:rPr lang="en-US" dirty="0"/>
-              <a:t>Example: Deploying a zero-day security hotfix</a:t>
-            </a:r>
-          </a:p>
-          <a:p>
-            <a:r>
-              <a:rPr lang="en-US" dirty="0"/>
-              <a:t>Definition: A </a:t>
-            </a:r>
-            <a:r>
-              <a:rPr lang="en-US" dirty="0">
-                <a:solidFill>
-                  <a:schemeClr val="accent2"/>
-                </a:solidFill>
-              </a:rPr>
-              <a:t>Normal Change </a:t>
-            </a:r>
-            <a:r>
-              <a:rPr lang="en-US" dirty="0"/>
-              <a:t>is any service change that is not a standard or emergency change</a:t>
-            </a:r>
-          </a:p>
-          <a:p>
-            <a:pPr lvl="1"/>
-            <a:r>
-              <a:rPr lang="en-US" dirty="0"/>
-              <a:t>Example: Upgrading our database from v12 to v13</a:t>
-            </a:r>
+              <a:t>Change enablement </a:t>
+            </a:r>
+            <a:r>
+              <a:rPr lang="en-US" dirty="0"/>
+              <a:t>is the management practice of ensuring that changes to IT services and the IT infrastructure are implemented in a way that minimizes risk and disruption while maximizing value </a:t>
+            </a:r>
+          </a:p>
+          <a:p>
+            <a:endParaRPr lang="en-US" dirty="0"/>
           </a:p>
           <a:p>
             <a:endParaRPr lang="en-US" dirty="0"/>
@@ -7272,15 +7255,16 @@
             </a:pPr>
             <a:r>
               <a:rPr lang="en-US" dirty="0"/>
-              <a:t>Changes are stored on [</a:t>
-            </a:r>
-            <a:r>
-              <a:rPr lang="en-US" dirty="0" err="1"/>
-              <a:t>change_request</a:t>
-            </a:r>
-            <a:r>
-              <a:rPr lang="en-US" dirty="0"/>
-              <a:t>]</a:t>
+              <a:t>You may see an even older term ‘change control’. In day-to-day practice, you could see or hear all 3.</a:t>
+            </a:r>
+          </a:p>
+          <a:p>
+            <a:pPr marL="0" indent="0" algn="ctr">
+              <a:buNone/>
+            </a:pPr>
+            <a:r>
+              <a:rPr lang="en-US" dirty="0"/>
+              <a:t>Change Control, Change Management, Change Enablement (Newest)</a:t>
             </a:r>
           </a:p>
         </p:txBody>
@@ -7288,7 +7272,7 @@
     </p:spTree>
     <p:extLst>
       <p:ext uri="{BB962C8B-B14F-4D97-AF65-F5344CB8AC3E}">
-        <p14:creationId xmlns:p14="http://schemas.microsoft.com/office/powerpoint/2010/main" val="3510581228"/>
+        <p14:creationId xmlns:p14="http://schemas.microsoft.com/office/powerpoint/2010/main" val="2546766448"/>
       </p:ext>
     </p:extLst>
   </p:cSld>
@@ -7320,7 +7304,7 @@
           <p:cNvPr id="2" name="Title 1">
             <a:extLst>
               <a:ext uri="{FF2B5EF4-FFF2-40B4-BE49-F238E27FC236}">
-                <a16:creationId xmlns:a16="http://schemas.microsoft.com/office/drawing/2014/main" id="{EB4F3E9E-7F68-4128-35D6-1D740E4FC0D8}"/>
+                <a16:creationId xmlns:a16="http://schemas.microsoft.com/office/drawing/2014/main" id="{69FB02F0-5CF1-56C1-DD10-FFAB584D20E7}"/>
               </a:ext>
             </a:extLst>
           </p:cNvPr>
@@ -7338,7 +7322,7 @@
           <a:p>
             <a:r>
               <a:rPr lang="en-US" dirty="0"/>
-              <a:t>Governance Roles</a:t>
+              <a:t>Change Types</a:t>
             </a:r>
           </a:p>
         </p:txBody>
@@ -7348,7 +7332,7 @@
           <p:cNvPr id="3" name="Content Placeholder 2">
             <a:extLst>
               <a:ext uri="{FF2B5EF4-FFF2-40B4-BE49-F238E27FC236}">
-                <a16:creationId xmlns:a16="http://schemas.microsoft.com/office/drawing/2014/main" id="{0EF5678F-DBE8-28B0-A126-4328ABA22FD8}"/>
+                <a16:creationId xmlns:a16="http://schemas.microsoft.com/office/drawing/2014/main" id="{7221DC42-2694-ADC2-4855-D806E75AD6CC}"/>
               </a:ext>
             </a:extLst>
           </p:cNvPr>
@@ -7366,7 +7350,51 @@
           <a:p>
             <a:r>
               <a:rPr lang="en-US" dirty="0"/>
-              <a:t>ITIL V4 introduced the Change Authority terminology, but CAB is still used too</a:t>
+              <a:t>Definition: </a:t>
+            </a:r>
+            <a:r>
+              <a:rPr lang="en-US" dirty="0">
+                <a:solidFill>
+                  <a:schemeClr val="accent2"/>
+                </a:solidFill>
+              </a:rPr>
+              <a:t>Standard Changes </a:t>
+            </a:r>
+            <a:r>
+              <a:rPr lang="en-US" dirty="0"/>
+              <a:t>are pre-authorized changes that are low-risk and don’t need to be assessed or authorized </a:t>
+            </a:r>
+          </a:p>
+          <a:p>
+            <a:pPr lvl="1"/>
+            <a:r>
+              <a:rPr lang="en-US" dirty="0"/>
+              <a:t>Example: provisioning a new employee’s email using a script</a:t>
+            </a:r>
+          </a:p>
+          <a:p>
+            <a:r>
+              <a:rPr lang="en-US" dirty="0"/>
+              <a:t>Definition:  An </a:t>
+            </a:r>
+            <a:r>
+              <a:rPr lang="en-US" dirty="0">
+                <a:solidFill>
+                  <a:schemeClr val="accent2"/>
+                </a:solidFill>
+              </a:rPr>
+              <a:t>Emergency Change </a:t>
+            </a:r>
+            <a:r>
+              <a:rPr lang="en-US" dirty="0"/>
+              <a:t>is a change that must be implemented as soon as possible</a:t>
+            </a:r>
+          </a:p>
+          <a:p>
+            <a:pPr lvl="1"/>
+            <a:r>
+              <a:rPr lang="en-US" dirty="0"/>
+              <a:t>Example: Deploying a zero-day security hotfix</a:t>
             </a:r>
           </a:p>
           <a:p>
@@ -7380,75 +7408,38 @@
                   <a:schemeClr val="accent2"/>
                 </a:solidFill>
               </a:rPr>
-              <a:t>Change Authority </a:t>
-            </a:r>
-            <a:r>
-              <a:rPr lang="en-US" dirty="0"/>
-              <a:t>is any mechanism by which change approval is granted </a:t>
+              <a:t>Normal Change </a:t>
+            </a:r>
+            <a:r>
+              <a:rPr lang="en-US" dirty="0"/>
+              <a:t>is any service change that is not a standard or emergency change</a:t>
             </a:r>
           </a:p>
           <a:p>
             <a:pPr lvl="1"/>
             <a:r>
               <a:rPr lang="en-US" dirty="0"/>
-              <a:t>A delegated team within the organization</a:t>
-            </a:r>
-          </a:p>
-          <a:p>
-            <a:pPr lvl="1"/>
-            <a:r>
-              <a:rPr lang="en-US" dirty="0"/>
-              <a:t>A peer review </a:t>
-            </a:r>
-          </a:p>
-          <a:p>
-            <a:pPr lvl="1"/>
-            <a:r>
-              <a:rPr lang="en-US" dirty="0"/>
-              <a:t>Automated approval processes in CI/CD pipelines</a:t>
-            </a:r>
-          </a:p>
-          <a:p>
-            <a:pPr lvl="1"/>
-            <a:r>
-              <a:rPr lang="en-US" dirty="0"/>
-              <a:t>Business stakeholders </a:t>
-            </a:r>
-          </a:p>
-          <a:p>
-            <a:r>
-              <a:rPr lang="en-US" dirty="0"/>
-              <a:t>Definition: A </a:t>
-            </a:r>
-            <a:r>
-              <a:rPr lang="en-US" dirty="0">
-                <a:solidFill>
-                  <a:schemeClr val="accent2"/>
-                </a:solidFill>
-              </a:rPr>
-              <a:t>Change Advisory Board (CAB) </a:t>
-            </a:r>
-            <a:r>
-              <a:rPr lang="en-US" dirty="0"/>
-              <a:t>is a committee that provides guidance and oversight on proposed changes, evaluating their impact and risks before approving</a:t>
-            </a:r>
-          </a:p>
-          <a:p>
-            <a:r>
-              <a:rPr lang="en-US" dirty="0"/>
-              <a:t>Definition: An </a:t>
-            </a:r>
-            <a:r>
-              <a:rPr lang="en-US" dirty="0">
-                <a:solidFill>
-                  <a:schemeClr val="accent2"/>
-                </a:solidFill>
-              </a:rPr>
-              <a:t>Emergency Change Advisory Board (ECAB) </a:t>
-            </a:r>
-            <a:r>
-              <a:rPr lang="en-US" dirty="0"/>
-              <a:t>is a flexible, rapid-response decision making group that is convened to assess and authorize emergency changes</a:t>
+              <a:t>Example: Upgrading our database from v12 to v13</a:t>
+            </a:r>
+          </a:p>
+          <a:p>
+            <a:endParaRPr lang="en-US" dirty="0"/>
+          </a:p>
+          <a:p>
+            <a:pPr marL="0" indent="0" algn="ctr">
+              <a:buNone/>
+            </a:pPr>
+            <a:r>
+              <a:rPr lang="en-US" dirty="0"/>
+              <a:t>Changes are stored on [</a:t>
+            </a:r>
+            <a:r>
+              <a:rPr lang="en-US" dirty="0" err="1"/>
+              <a:t>change_request</a:t>
+            </a:r>
+            <a:r>
+              <a:rPr lang="en-US" dirty="0"/>
+              <a:t>]</a:t>
             </a:r>
           </a:p>
         </p:txBody>
@@ -7456,7 +7447,7 @@
     </p:spTree>
     <p:extLst>
       <p:ext uri="{BB962C8B-B14F-4D97-AF65-F5344CB8AC3E}">
-        <p14:creationId xmlns:p14="http://schemas.microsoft.com/office/powerpoint/2010/main" val="203190173"/>
+        <p14:creationId xmlns:p14="http://schemas.microsoft.com/office/powerpoint/2010/main" val="3510581228"/>
       </p:ext>
     </p:extLst>
   </p:cSld>
@@ -7488,7 +7479,7 @@
           <p:cNvPr id="2" name="Title 1">
             <a:extLst>
               <a:ext uri="{FF2B5EF4-FFF2-40B4-BE49-F238E27FC236}">
-                <a16:creationId xmlns:a16="http://schemas.microsoft.com/office/drawing/2014/main" id="{5F45A74A-8767-3F0D-E3AD-9A87A5F3155E}"/>
+                <a16:creationId xmlns:a16="http://schemas.microsoft.com/office/drawing/2014/main" id="{EB4F3E9E-7F68-4128-35D6-1D740E4FC0D8}"/>
               </a:ext>
             </a:extLst>
           </p:cNvPr>
@@ -7506,7 +7497,7 @@
           <a:p>
             <a:r>
               <a:rPr lang="en-US" dirty="0"/>
-              <a:t>Key Change Enablement Features</a:t>
+              <a:t>Governance Roles</a:t>
             </a:r>
           </a:p>
         </p:txBody>
@@ -7516,7 +7507,7 @@
           <p:cNvPr id="3" name="Content Placeholder 2">
             <a:extLst>
               <a:ext uri="{FF2B5EF4-FFF2-40B4-BE49-F238E27FC236}">
-                <a16:creationId xmlns:a16="http://schemas.microsoft.com/office/drawing/2014/main" id="{65DD9CC2-6FEE-A4B2-3868-E4FF6C870A1D}"/>
+                <a16:creationId xmlns:a16="http://schemas.microsoft.com/office/drawing/2014/main" id="{0EF5678F-DBE8-28B0-A126-4328ABA22FD8}"/>
               </a:ext>
             </a:extLst>
           </p:cNvPr>
@@ -7527,21 +7518,20 @@
             <p:ph idx="1"/>
           </p:nvPr>
         </p:nvSpPr>
-        <p:spPr>
-          <a:xfrm>
-            <a:off x="581192" y="1945759"/>
-            <a:ext cx="11029616" cy="4008734"/>
-          </a:xfrm>
-        </p:spPr>
-        <p:txBody>
-          <a:bodyPr>
-            <a:normAutofit/>
-          </a:bodyPr>
+        <p:spPr/>
+        <p:txBody>
+          <a:bodyPr/>
           <a:lstStyle/>
           <a:p>
             <a:r>
               <a:rPr lang="en-US" dirty="0"/>
-              <a:t>The </a:t>
+              <a:t>ITIL V4 introduced the Change Authority terminology, but CAB is still used too</a:t>
+            </a:r>
+          </a:p>
+          <a:p>
+            <a:r>
+              <a:rPr lang="en-US" dirty="0"/>
+              <a:t>Definition: A </a:t>
             </a:r>
             <a:r>
               <a:rPr lang="en-US" dirty="0">
@@ -7549,25 +7539,45 @@
                   <a:schemeClr val="accent2"/>
                 </a:solidFill>
               </a:rPr>
-              <a:t>change request record </a:t>
-            </a:r>
-            <a:r>
-              <a:rPr lang="en-US" dirty="0"/>
-              <a:t>on the [</a:t>
-            </a:r>
-            <a:r>
-              <a:rPr lang="en-US" dirty="0" err="1"/>
-              <a:t>change_request</a:t>
-            </a:r>
-            <a:r>
-              <a:rPr lang="en-US" dirty="0"/>
-              <a:t>] table</a:t>
-            </a:r>
-          </a:p>
-          <a:p>
-            <a:r>
-              <a:rPr lang="en-US" dirty="0"/>
-              <a:t>Definition: </a:t>
+              <a:t>Change Authority </a:t>
+            </a:r>
+            <a:r>
+              <a:rPr lang="en-US" dirty="0"/>
+              <a:t>is any mechanism by which change approval is granted </a:t>
+            </a:r>
+          </a:p>
+          <a:p>
+            <a:pPr lvl="1"/>
+            <a:r>
+              <a:rPr lang="en-US" dirty="0"/>
+              <a:t>A delegated team within the organization</a:t>
+            </a:r>
+          </a:p>
+          <a:p>
+            <a:pPr lvl="1"/>
+            <a:r>
+              <a:rPr lang="en-US" dirty="0"/>
+              <a:t>A peer review </a:t>
+            </a:r>
+          </a:p>
+          <a:p>
+            <a:pPr lvl="1"/>
+            <a:r>
+              <a:rPr lang="en-US" dirty="0"/>
+              <a:t>Automated approval processes in CI/CD pipelines</a:t>
+            </a:r>
+          </a:p>
+          <a:p>
+            <a:pPr lvl="1"/>
+            <a:r>
+              <a:rPr lang="en-US" dirty="0"/>
+              <a:t>Business stakeholders </a:t>
+            </a:r>
+          </a:p>
+          <a:p>
+            <a:r>
+              <a:rPr lang="en-US" dirty="0"/>
+              <a:t>Definition: A </a:t>
             </a:r>
             <a:r>
               <a:rPr lang="en-US" dirty="0">
@@ -7575,39 +7585,17 @@
                   <a:schemeClr val="accent2"/>
                 </a:solidFill>
               </a:rPr>
-              <a:t>Risk Conditions </a:t>
-            </a:r>
-            <a:r>
-              <a:rPr lang="en-US" dirty="0"/>
-              <a:t>automatically calculate the risk field of a change record </a:t>
-            </a:r>
-          </a:p>
-          <a:p>
-            <a:pPr lvl="1"/>
-            <a:r>
-              <a:rPr lang="en-US" dirty="0"/>
-              <a:t>Bulit-in by default</a:t>
-            </a:r>
-          </a:p>
-          <a:p>
-            <a:pPr lvl="1"/>
-            <a:r>
-              <a:rPr lang="en-US" dirty="0"/>
-              <a:t>Risk Assessment plugin is an optional alternative. It calculates a weighted score from assessment questions (</a:t>
-            </a:r>
-            <a:r>
-              <a:rPr lang="en-US" dirty="0" err="1"/>
-              <a:t>com.snc.change_management.risk_assessment</a:t>
-            </a:r>
-            <a:r>
-              <a:rPr lang="en-US" dirty="0"/>
-              <a:t>)</a:t>
-            </a:r>
-          </a:p>
-          <a:p>
-            <a:r>
-              <a:rPr lang="en-US" dirty="0"/>
-              <a:t>Definition: </a:t>
+              <a:t>Change Advisory Board (CAB) </a:t>
+            </a:r>
+            <a:r>
+              <a:rPr lang="en-US" dirty="0"/>
+              <a:t>is a committee that provides guidance and oversight on proposed changes, evaluating their impact and risks before approving</a:t>
+            </a:r>
+          </a:p>
+          <a:p>
+            <a:r>
+              <a:rPr lang="en-US" dirty="0"/>
+              <a:t>Definition: An </a:t>
             </a:r>
             <a:r>
               <a:rPr lang="en-US" dirty="0">
@@ -7615,54 +7603,11 @@
                   <a:schemeClr val="accent2"/>
                 </a:solidFill>
               </a:rPr>
-              <a:t>Change Schedules </a:t>
-            </a:r>
-            <a:r>
-              <a:rPr lang="en-US" dirty="0"/>
-              <a:t>show us a calendar view that overlays our planned changes with blackout &amp; maintenance windows  </a:t>
-            </a:r>
-          </a:p>
-          <a:p>
-            <a:pPr lvl="1"/>
-            <a:r>
-              <a:rPr lang="en-US" dirty="0"/>
-              <a:t>Helps spot conflicts </a:t>
-            </a:r>
-          </a:p>
-          <a:p>
-            <a:r>
-              <a:rPr lang="en-US" dirty="0"/>
-              <a:t>Definition</a:t>
-            </a:r>
-            <a:r>
-              <a:rPr lang="en-US" dirty="0">
-                <a:solidFill>
-                  <a:schemeClr val="accent2"/>
-                </a:solidFill>
-              </a:rPr>
-              <a:t>: Change Approval Policies </a:t>
-            </a:r>
-            <a:r>
-              <a:rPr lang="en-US" dirty="0"/>
-              <a:t>decide who must approve a change, when, and under what conditions </a:t>
-            </a:r>
-          </a:p>
-          <a:p>
-            <a:r>
-              <a:rPr lang="en-US" dirty="0"/>
-              <a:t>Definition: </a:t>
-            </a:r>
-            <a:r>
-              <a:rPr lang="en-US" dirty="0">
-                <a:solidFill>
-                  <a:schemeClr val="accent2"/>
-                </a:solidFill>
-              </a:rPr>
-              <a:t>The CAB Workbench </a:t>
-            </a:r>
-            <a:r>
-              <a:rPr lang="en-US" dirty="0"/>
-              <a:t>is a built-in place to manage CAB meetings</a:t>
+              <a:t>Emergency Change Advisory Board (ECAB) </a:t>
+            </a:r>
+            <a:r>
+              <a:rPr lang="en-US" dirty="0"/>
+              <a:t>is a flexible, rapid-response decision making group that is convened to assess and authorize emergency changes</a:t>
             </a:r>
           </a:p>
         </p:txBody>
@@ -7670,7 +7615,7 @@
     </p:spTree>
     <p:extLst>
       <p:ext uri="{BB962C8B-B14F-4D97-AF65-F5344CB8AC3E}">
-        <p14:creationId xmlns:p14="http://schemas.microsoft.com/office/powerpoint/2010/main" val="793387103"/>
+        <p14:creationId xmlns:p14="http://schemas.microsoft.com/office/powerpoint/2010/main" val="203190173"/>
       </p:ext>
     </p:extLst>
   </p:cSld>
@@ -7845,6 +7790,220 @@
 </file>
 
 <file path=ppt/slides/slide30.xml><?xml version="1.0" encoding="utf-8"?>
+<p:sld xmlns:a="http://schemas.openxmlformats.org/drawingml/2006/main" xmlns:r="http://schemas.openxmlformats.org/officeDocument/2006/relationships" xmlns:p="http://schemas.openxmlformats.org/presentationml/2006/main">
+  <p:cSld>
+    <p:spTree>
+      <p:nvGrpSpPr>
+        <p:cNvPr id="1" name=""/>
+        <p:cNvGrpSpPr/>
+        <p:nvPr/>
+      </p:nvGrpSpPr>
+      <p:grpSpPr>
+        <a:xfrm>
+          <a:off x="0" y="0"/>
+          <a:ext cx="0" cy="0"/>
+          <a:chOff x="0" y="0"/>
+          <a:chExt cx="0" cy="0"/>
+        </a:xfrm>
+      </p:grpSpPr>
+      <p:sp>
+        <p:nvSpPr>
+          <p:cNvPr id="2" name="Title 1">
+            <a:extLst>
+              <a:ext uri="{FF2B5EF4-FFF2-40B4-BE49-F238E27FC236}">
+                <a16:creationId xmlns:a16="http://schemas.microsoft.com/office/drawing/2014/main" id="{5F45A74A-8767-3F0D-E3AD-9A87A5F3155E}"/>
+              </a:ext>
+            </a:extLst>
+          </p:cNvPr>
+          <p:cNvSpPr>
+            <a:spLocks noGrp="1"/>
+          </p:cNvSpPr>
+          <p:nvPr>
+            <p:ph type="title"/>
+          </p:nvPr>
+        </p:nvSpPr>
+        <p:spPr/>
+        <p:txBody>
+          <a:bodyPr/>
+          <a:lstStyle/>
+          <a:p>
+            <a:r>
+              <a:rPr lang="en-US" dirty="0"/>
+              <a:t>Key Change Enablement Features</a:t>
+            </a:r>
+          </a:p>
+        </p:txBody>
+      </p:sp>
+      <p:sp>
+        <p:nvSpPr>
+          <p:cNvPr id="3" name="Content Placeholder 2">
+            <a:extLst>
+              <a:ext uri="{FF2B5EF4-FFF2-40B4-BE49-F238E27FC236}">
+                <a16:creationId xmlns:a16="http://schemas.microsoft.com/office/drawing/2014/main" id="{65DD9CC2-6FEE-A4B2-3868-E4FF6C870A1D}"/>
+              </a:ext>
+            </a:extLst>
+          </p:cNvPr>
+          <p:cNvSpPr>
+            <a:spLocks noGrp="1"/>
+          </p:cNvSpPr>
+          <p:nvPr>
+            <p:ph idx="1"/>
+          </p:nvPr>
+        </p:nvSpPr>
+        <p:spPr>
+          <a:xfrm>
+            <a:off x="581192" y="1945759"/>
+            <a:ext cx="11029616" cy="4008734"/>
+          </a:xfrm>
+        </p:spPr>
+        <p:txBody>
+          <a:bodyPr>
+            <a:normAutofit/>
+          </a:bodyPr>
+          <a:lstStyle/>
+          <a:p>
+            <a:r>
+              <a:rPr lang="en-US" dirty="0"/>
+              <a:t>The </a:t>
+            </a:r>
+            <a:r>
+              <a:rPr lang="en-US" dirty="0">
+                <a:solidFill>
+                  <a:schemeClr val="accent2"/>
+                </a:solidFill>
+              </a:rPr>
+              <a:t>change request record </a:t>
+            </a:r>
+            <a:r>
+              <a:rPr lang="en-US" dirty="0"/>
+              <a:t>on the [</a:t>
+            </a:r>
+            <a:r>
+              <a:rPr lang="en-US" dirty="0" err="1"/>
+              <a:t>change_request</a:t>
+            </a:r>
+            <a:r>
+              <a:rPr lang="en-US" dirty="0"/>
+              <a:t>] table</a:t>
+            </a:r>
+          </a:p>
+          <a:p>
+            <a:r>
+              <a:rPr lang="en-US" dirty="0"/>
+              <a:t>Definition: </a:t>
+            </a:r>
+            <a:r>
+              <a:rPr lang="en-US" dirty="0">
+                <a:solidFill>
+                  <a:schemeClr val="accent2"/>
+                </a:solidFill>
+              </a:rPr>
+              <a:t>Risk Conditions </a:t>
+            </a:r>
+            <a:r>
+              <a:rPr lang="en-US" dirty="0"/>
+              <a:t>automatically calculate the risk field of a change record </a:t>
+            </a:r>
+          </a:p>
+          <a:p>
+            <a:pPr lvl="1"/>
+            <a:r>
+              <a:rPr lang="en-US" dirty="0"/>
+              <a:t>Bulit-in by default</a:t>
+            </a:r>
+          </a:p>
+          <a:p>
+            <a:pPr lvl="1"/>
+            <a:r>
+              <a:rPr lang="en-US" dirty="0"/>
+              <a:t>Risk Assessment plugin is an optional alternative. It calculates a weighted score from assessment questions (</a:t>
+            </a:r>
+            <a:r>
+              <a:rPr lang="en-US" dirty="0" err="1"/>
+              <a:t>com.snc.change_management.risk_assessment</a:t>
+            </a:r>
+            <a:r>
+              <a:rPr lang="en-US" dirty="0"/>
+              <a:t>)</a:t>
+            </a:r>
+          </a:p>
+          <a:p>
+            <a:r>
+              <a:rPr lang="en-US" dirty="0"/>
+              <a:t>Definition: </a:t>
+            </a:r>
+            <a:r>
+              <a:rPr lang="en-US" dirty="0">
+                <a:solidFill>
+                  <a:schemeClr val="accent2"/>
+                </a:solidFill>
+              </a:rPr>
+              <a:t>Change Schedules </a:t>
+            </a:r>
+            <a:r>
+              <a:rPr lang="en-US" dirty="0"/>
+              <a:t>show us a calendar view that overlays our planned changes with blackout &amp; maintenance windows  </a:t>
+            </a:r>
+          </a:p>
+          <a:p>
+            <a:pPr lvl="1"/>
+            <a:r>
+              <a:rPr lang="en-US" dirty="0"/>
+              <a:t>Helps spot conflicts </a:t>
+            </a:r>
+          </a:p>
+          <a:p>
+            <a:r>
+              <a:rPr lang="en-US" dirty="0"/>
+              <a:t>Definition</a:t>
+            </a:r>
+            <a:r>
+              <a:rPr lang="en-US" dirty="0">
+                <a:solidFill>
+                  <a:schemeClr val="accent2"/>
+                </a:solidFill>
+              </a:rPr>
+              <a:t>: Change Approval Policies </a:t>
+            </a:r>
+            <a:r>
+              <a:rPr lang="en-US" dirty="0"/>
+              <a:t>decide who must approve a change, when, and under what conditions </a:t>
+            </a:r>
+          </a:p>
+          <a:p>
+            <a:r>
+              <a:rPr lang="en-US" dirty="0"/>
+              <a:t>Definition: </a:t>
+            </a:r>
+            <a:r>
+              <a:rPr lang="en-US" dirty="0">
+                <a:solidFill>
+                  <a:schemeClr val="accent2"/>
+                </a:solidFill>
+              </a:rPr>
+              <a:t>The CAB Workbench </a:t>
+            </a:r>
+            <a:r>
+              <a:rPr lang="en-US" dirty="0"/>
+              <a:t>is a built-in place to manage CAB meetings</a:t>
+            </a:r>
+          </a:p>
+        </p:txBody>
+      </p:sp>
+    </p:spTree>
+    <p:extLst>
+      <p:ext uri="{BB962C8B-B14F-4D97-AF65-F5344CB8AC3E}">
+        <p14:creationId xmlns:p14="http://schemas.microsoft.com/office/powerpoint/2010/main" val="793387103"/>
+      </p:ext>
+    </p:extLst>
+  </p:cSld>
+  <p:clrMapOvr>
+    <a:masterClrMapping/>
+  </p:clrMapOvr>
+</p:sld>
+</file>
+
+<file path=ppt/slides/slide31.xml><?xml version="1.0" encoding="utf-8"?>
 <p:sld xmlns:a="http://schemas.openxmlformats.org/drawingml/2006/main" xmlns:r="http://schemas.openxmlformats.org/officeDocument/2006/relationships" xmlns:p="http://schemas.openxmlformats.org/presentationml/2006/main">
   <p:cSld>
     <p:spTree>
@@ -7965,7 +8124,7 @@
 </p:sld>
 </file>
 
-<file path=ppt/slides/slide31.xml><?xml version="1.0" encoding="utf-8"?>
+<file path=ppt/slides/slide32.xml><?xml version="1.0" encoding="utf-8"?>
 <p:sld xmlns:a="http://schemas.openxmlformats.org/drawingml/2006/main" xmlns:r="http://schemas.openxmlformats.org/officeDocument/2006/relationships" xmlns:p="http://schemas.openxmlformats.org/presentationml/2006/main">
   <p:cSld>
     <p:spTree>
@@ -8100,7 +8259,7 @@
 </p:sld>
 </file>
 
-<file path=ppt/slides/slide32.xml><?xml version="1.0" encoding="utf-8"?>
+<file path=ppt/slides/slide33.xml><?xml version="1.0" encoding="utf-8"?>
 <p:sld xmlns:a="http://schemas.openxmlformats.org/drawingml/2006/main" xmlns:r="http://schemas.openxmlformats.org/officeDocument/2006/relationships" xmlns:p="http://schemas.openxmlformats.org/presentationml/2006/main">
   <p:cSld>
     <p:spTree>
@@ -8462,7 +8621,7 @@
 </p:sld>
 </file>
 
-<file path=ppt/slides/slide33.xml><?xml version="1.0" encoding="utf-8"?>
+<file path=ppt/slides/slide34.xml><?xml version="1.0" encoding="utf-8"?>
 <p:sld xmlns:a="http://schemas.openxmlformats.org/drawingml/2006/main" xmlns:r="http://schemas.openxmlformats.org/officeDocument/2006/relationships" xmlns:p="http://schemas.openxmlformats.org/presentationml/2006/main">
   <p:cSld>
     <p:spTree>
@@ -8589,7 +8748,7 @@
 </p:sld>
 </file>
 
-<file path=ppt/slides/slide34.xml><?xml version="1.0" encoding="utf-8"?>
+<file path=ppt/slides/slide35.xml><?xml version="1.0" encoding="utf-8"?>
 <p:sld xmlns:a="http://schemas.openxmlformats.org/drawingml/2006/main" xmlns:r="http://schemas.openxmlformats.org/officeDocument/2006/relationships" xmlns:p="http://schemas.openxmlformats.org/presentationml/2006/main">
   <p:cSld>
     <p:spTree>
@@ -8728,7 +8887,7 @@
 </p:sld>
 </file>
 
-<file path=ppt/slides/slide35.xml><?xml version="1.0" encoding="utf-8"?>
+<file path=ppt/slides/slide36.xml><?xml version="1.0" encoding="utf-8"?>
 <p:sld xmlns:a="http://schemas.openxmlformats.org/drawingml/2006/main" xmlns:r="http://schemas.openxmlformats.org/officeDocument/2006/relationships" xmlns:p="http://schemas.openxmlformats.org/presentationml/2006/main">
   <p:cSld>
     <p:spTree>
@@ -8855,7 +9014,7 @@
 </p:sld>
 </file>
 
-<file path=ppt/slides/slide36.xml><?xml version="1.0" encoding="utf-8"?>
+<file path=ppt/slides/slide37.xml><?xml version="1.0" encoding="utf-8"?>
 <p:sld xmlns:a="http://schemas.openxmlformats.org/drawingml/2006/main" xmlns:r="http://schemas.openxmlformats.org/officeDocument/2006/relationships" xmlns:p="http://schemas.openxmlformats.org/presentationml/2006/main">
   <p:cSld>
     <p:spTree>
@@ -8978,7 +9137,7 @@
 </p:sld>
 </file>
 
-<file path=ppt/slides/slide37.xml><?xml version="1.0" encoding="utf-8"?>
+<file path=ppt/slides/slide38.xml><?xml version="1.0" encoding="utf-8"?>
 <p:sld xmlns:a="http://schemas.openxmlformats.org/drawingml/2006/main" xmlns:r="http://schemas.openxmlformats.org/officeDocument/2006/relationships" xmlns:p="http://schemas.openxmlformats.org/presentationml/2006/main">
   <p:cSld>
     <p:spTree>
@@ -9181,7 +9340,7 @@
 </p:sld>
 </file>
 
-<file path=ppt/slides/slide38.xml><?xml version="1.0" encoding="utf-8"?>
+<file path=ppt/slides/slide39.xml><?xml version="1.0" encoding="utf-8"?>
 <p:sld xmlns:a="http://schemas.openxmlformats.org/drawingml/2006/main" xmlns:r="http://schemas.openxmlformats.org/officeDocument/2006/relationships" xmlns:p="http://schemas.openxmlformats.org/presentationml/2006/main">
   <p:cSld>
     <p:spTree>
@@ -9564,70 +9723,6 @@
     <p:extLst>
       <p:ext uri="{BB962C8B-B14F-4D97-AF65-F5344CB8AC3E}">
         <p14:creationId xmlns:p14="http://schemas.microsoft.com/office/powerpoint/2010/main" val="896463295"/>
-      </p:ext>
-    </p:extLst>
-  </p:cSld>
-  <p:clrMapOvr>
-    <a:masterClrMapping/>
-  </p:clrMapOvr>
-</p:sld>
-</file>
-
-<file path=ppt/slides/slide39.xml><?xml version="1.0" encoding="utf-8"?>
-<p:sld xmlns:a="http://schemas.openxmlformats.org/drawingml/2006/main" xmlns:r="http://schemas.openxmlformats.org/officeDocument/2006/relationships" xmlns:p="http://schemas.openxmlformats.org/presentationml/2006/main">
-  <p:cSld>
-    <p:spTree>
-      <p:nvGrpSpPr>
-        <p:cNvPr id="1" name="">
-          <a:extLst>
-            <a:ext uri="{FF2B5EF4-FFF2-40B4-BE49-F238E27FC236}">
-              <a16:creationId xmlns:a16="http://schemas.microsoft.com/office/drawing/2014/main" id="{163F29BE-5D6D-2F42-2A1F-393302B1B1E0}"/>
-            </a:ext>
-          </a:extLst>
-        </p:cNvPr>
-        <p:cNvGrpSpPr/>
-        <p:nvPr/>
-      </p:nvGrpSpPr>
-      <p:grpSpPr>
-        <a:xfrm>
-          <a:off x="0" y="0"/>
-          <a:ext cx="0" cy="0"/>
-          <a:chOff x="0" y="0"/>
-          <a:chExt cx="0" cy="0"/>
-        </a:xfrm>
-      </p:grpSpPr>
-      <p:sp>
-        <p:nvSpPr>
-          <p:cNvPr id="2" name="Title 1">
-            <a:extLst>
-              <a:ext uri="{FF2B5EF4-FFF2-40B4-BE49-F238E27FC236}">
-                <a16:creationId xmlns:a16="http://schemas.microsoft.com/office/drawing/2014/main" id="{E3B4165A-E25C-23C3-0B6F-376400DDB386}"/>
-              </a:ext>
-            </a:extLst>
-          </p:cNvPr>
-          <p:cNvSpPr>
-            <a:spLocks noGrp="1"/>
-          </p:cNvSpPr>
-          <p:nvPr>
-            <p:ph type="ctrTitle"/>
-          </p:nvPr>
-        </p:nvSpPr>
-        <p:spPr/>
-        <p:txBody>
-          <a:bodyPr/>
-          <a:lstStyle/>
-          <a:p>
-            <a:r>
-              <a:rPr lang="en-US" dirty="0"/>
-              <a:t>Knowledge Management</a:t>
-            </a:r>
-          </a:p>
-        </p:txBody>
-      </p:sp>
-    </p:spTree>
-    <p:extLst>
-      <p:ext uri="{BB962C8B-B14F-4D97-AF65-F5344CB8AC3E}">
-        <p14:creationId xmlns:p14="http://schemas.microsoft.com/office/powerpoint/2010/main" val="2508246095"/>
       </p:ext>
     </p:extLst>
   </p:cSld>
@@ -9931,7 +10026,13 @@
   <p:cSld>
     <p:spTree>
       <p:nvGrpSpPr>
-        <p:cNvPr id="1" name=""/>
+        <p:cNvPr id="1" name="">
+          <a:extLst>
+            <a:ext uri="{FF2B5EF4-FFF2-40B4-BE49-F238E27FC236}">
+              <a16:creationId xmlns:a16="http://schemas.microsoft.com/office/drawing/2014/main" id="{163F29BE-5D6D-2F42-2A1F-393302B1B1E0}"/>
+            </a:ext>
+          </a:extLst>
+        </p:cNvPr>
         <p:cNvGrpSpPr/>
         <p:nvPr/>
       </p:nvGrpSpPr>
@@ -9948,7 +10049,7 @@
           <p:cNvPr id="2" name="Title 1">
             <a:extLst>
               <a:ext uri="{FF2B5EF4-FFF2-40B4-BE49-F238E27FC236}">
-                <a16:creationId xmlns:a16="http://schemas.microsoft.com/office/drawing/2014/main" id="{046470B8-1416-2A79-27C7-CA16703C67C3}"/>
+                <a16:creationId xmlns:a16="http://schemas.microsoft.com/office/drawing/2014/main" id="{E3B4165A-E25C-23C3-0B6F-376400DDB386}"/>
               </a:ext>
             </a:extLst>
           </p:cNvPr>
@@ -9956,7 +10057,7 @@
             <a:spLocks noGrp="1"/>
           </p:cNvSpPr>
           <p:nvPr>
-            <p:ph type="title"/>
+            <p:ph type="ctrTitle"/>
           </p:nvPr>
         </p:nvSpPr>
         <p:spPr/>
@@ -9966,68 +10067,7 @@
           <a:p>
             <a:r>
               <a:rPr lang="en-US" dirty="0"/>
-              <a:t>What is Knowledge management?</a:t>
-            </a:r>
-          </a:p>
-        </p:txBody>
-      </p:sp>
-      <p:sp>
-        <p:nvSpPr>
-          <p:cNvPr id="3" name="Content Placeholder 2">
-            <a:extLst>
-              <a:ext uri="{FF2B5EF4-FFF2-40B4-BE49-F238E27FC236}">
-                <a16:creationId xmlns:a16="http://schemas.microsoft.com/office/drawing/2014/main" id="{CA095179-F491-2C74-CC80-3262BFC22108}"/>
-              </a:ext>
-            </a:extLst>
-          </p:cNvPr>
-          <p:cNvSpPr>
-            <a:spLocks noGrp="1"/>
-          </p:cNvSpPr>
-          <p:nvPr>
-            <p:ph idx="1"/>
-          </p:nvPr>
-        </p:nvSpPr>
-        <p:spPr/>
-        <p:txBody>
-          <a:bodyPr/>
-          <a:lstStyle/>
-          <a:p>
-            <a:r>
-              <a:rPr lang="en-US" dirty="0"/>
-              <a:t>Definition: </a:t>
-            </a:r>
-            <a:r>
-              <a:rPr lang="en-US" dirty="0">
-                <a:solidFill>
-                  <a:schemeClr val="accent2"/>
-                </a:solidFill>
-              </a:rPr>
-              <a:t>Knowledge Management </a:t>
-            </a:r>
-            <a:r>
-              <a:rPr lang="en-US" dirty="0"/>
-              <a:t>is the practice of effective, efficient, and convenient use of information and knowledge across the organization</a:t>
-            </a:r>
-          </a:p>
-          <a:p>
-            <a:pPr lvl="1"/>
-            <a:r>
-              <a:rPr lang="en-US" dirty="0"/>
-              <a:t>Helps people make better decisions </a:t>
-            </a:r>
-          </a:p>
-          <a:p>
-            <a:pPr lvl="1"/>
-            <a:r>
-              <a:rPr lang="en-US" dirty="0"/>
-              <a:t>Resolve issues faster</a:t>
-            </a:r>
-          </a:p>
-          <a:p>
-            <a:pPr lvl="1"/>
-            <a:r>
-              <a:rPr lang="en-US" dirty="0"/>
-              <a:t>Reduce backtracking over work </a:t>
+              <a:t>Knowledge Management</a:t>
             </a:r>
           </a:p>
         </p:txBody>
@@ -10035,7 +10075,7 @@
     </p:spTree>
     <p:extLst>
       <p:ext uri="{BB962C8B-B14F-4D97-AF65-F5344CB8AC3E}">
-        <p14:creationId xmlns:p14="http://schemas.microsoft.com/office/powerpoint/2010/main" val="3592671714"/>
+        <p14:creationId xmlns:p14="http://schemas.microsoft.com/office/powerpoint/2010/main" val="2508246095"/>
       </p:ext>
     </p:extLst>
   </p:cSld>
@@ -10067,6 +10107,125 @@
           <p:cNvPr id="2" name="Title 1">
             <a:extLst>
               <a:ext uri="{FF2B5EF4-FFF2-40B4-BE49-F238E27FC236}">
+                <a16:creationId xmlns:a16="http://schemas.microsoft.com/office/drawing/2014/main" id="{046470B8-1416-2A79-27C7-CA16703C67C3}"/>
+              </a:ext>
+            </a:extLst>
+          </p:cNvPr>
+          <p:cNvSpPr>
+            <a:spLocks noGrp="1"/>
+          </p:cNvSpPr>
+          <p:nvPr>
+            <p:ph type="title"/>
+          </p:nvPr>
+        </p:nvSpPr>
+        <p:spPr/>
+        <p:txBody>
+          <a:bodyPr/>
+          <a:lstStyle/>
+          <a:p>
+            <a:r>
+              <a:rPr lang="en-US" dirty="0"/>
+              <a:t>What is Knowledge management?</a:t>
+            </a:r>
+          </a:p>
+        </p:txBody>
+      </p:sp>
+      <p:sp>
+        <p:nvSpPr>
+          <p:cNvPr id="3" name="Content Placeholder 2">
+            <a:extLst>
+              <a:ext uri="{FF2B5EF4-FFF2-40B4-BE49-F238E27FC236}">
+                <a16:creationId xmlns:a16="http://schemas.microsoft.com/office/drawing/2014/main" id="{CA095179-F491-2C74-CC80-3262BFC22108}"/>
+              </a:ext>
+            </a:extLst>
+          </p:cNvPr>
+          <p:cNvSpPr>
+            <a:spLocks noGrp="1"/>
+          </p:cNvSpPr>
+          <p:nvPr>
+            <p:ph idx="1"/>
+          </p:nvPr>
+        </p:nvSpPr>
+        <p:spPr/>
+        <p:txBody>
+          <a:bodyPr/>
+          <a:lstStyle/>
+          <a:p>
+            <a:r>
+              <a:rPr lang="en-US" dirty="0"/>
+              <a:t>Definition: </a:t>
+            </a:r>
+            <a:r>
+              <a:rPr lang="en-US" dirty="0">
+                <a:solidFill>
+                  <a:schemeClr val="accent2"/>
+                </a:solidFill>
+              </a:rPr>
+              <a:t>Knowledge Management </a:t>
+            </a:r>
+            <a:r>
+              <a:rPr lang="en-US" dirty="0"/>
+              <a:t>is the practice of effective, efficient, and convenient use of information and knowledge across the organization</a:t>
+            </a:r>
+          </a:p>
+          <a:p>
+            <a:pPr lvl="1"/>
+            <a:r>
+              <a:rPr lang="en-US" dirty="0"/>
+              <a:t>Helps people make better decisions </a:t>
+            </a:r>
+          </a:p>
+          <a:p>
+            <a:pPr lvl="1"/>
+            <a:r>
+              <a:rPr lang="en-US" dirty="0"/>
+              <a:t>Resolve issues faster</a:t>
+            </a:r>
+          </a:p>
+          <a:p>
+            <a:pPr lvl="1"/>
+            <a:r>
+              <a:rPr lang="en-US" dirty="0"/>
+              <a:t>Reduce backtracking over work </a:t>
+            </a:r>
+          </a:p>
+        </p:txBody>
+      </p:sp>
+    </p:spTree>
+    <p:extLst>
+      <p:ext uri="{BB962C8B-B14F-4D97-AF65-F5344CB8AC3E}">
+        <p14:creationId xmlns:p14="http://schemas.microsoft.com/office/powerpoint/2010/main" val="3592671714"/>
+      </p:ext>
+    </p:extLst>
+  </p:cSld>
+  <p:clrMapOvr>
+    <a:masterClrMapping/>
+  </p:clrMapOvr>
+</p:sld>
+</file>
+
+<file path=ppt/slides/slide42.xml><?xml version="1.0" encoding="utf-8"?>
+<p:sld xmlns:a="http://schemas.openxmlformats.org/drawingml/2006/main" xmlns:r="http://schemas.openxmlformats.org/officeDocument/2006/relationships" xmlns:p="http://schemas.openxmlformats.org/presentationml/2006/main">
+  <p:cSld>
+    <p:spTree>
+      <p:nvGrpSpPr>
+        <p:cNvPr id="1" name=""/>
+        <p:cNvGrpSpPr/>
+        <p:nvPr/>
+      </p:nvGrpSpPr>
+      <p:grpSpPr>
+        <a:xfrm>
+          <a:off x="0" y="0"/>
+          <a:ext cx="0" cy="0"/>
+          <a:chOff x="0" y="0"/>
+          <a:chExt cx="0" cy="0"/>
+        </a:xfrm>
+      </p:grpSpPr>
+      <p:sp>
+        <p:nvSpPr>
+          <p:cNvPr id="2" name="Title 1">
+            <a:extLst>
+              <a:ext uri="{FF2B5EF4-FFF2-40B4-BE49-F238E27FC236}">
                 <a16:creationId xmlns:a16="http://schemas.microsoft.com/office/drawing/2014/main" id="{AC987EB1-8925-CAA5-5991-A7A1921E276C}"/>
               </a:ext>
             </a:extLst>
@@ -10145,7 +10304,7 @@
 </p:sld>
 </file>
 
-<file path=ppt/slides/slide42.xml><?xml version="1.0" encoding="utf-8"?>
+<file path=ppt/slides/slide43.xml><?xml version="1.0" encoding="utf-8"?>
 <p:sld xmlns:a="http://schemas.openxmlformats.org/drawingml/2006/main" xmlns:r="http://schemas.openxmlformats.org/officeDocument/2006/relationships" xmlns:p="http://schemas.openxmlformats.org/presentationml/2006/main">
   <p:cSld>
     <p:spTree>
@@ -10269,7 +10428,7 @@
 </p:sld>
 </file>
 
-<file path=ppt/slides/slide43.xml><?xml version="1.0" encoding="utf-8"?>
+<file path=ppt/slides/slide44.xml><?xml version="1.0" encoding="utf-8"?>
 <p:sld xmlns:a="http://schemas.openxmlformats.org/drawingml/2006/main" xmlns:r="http://schemas.openxmlformats.org/officeDocument/2006/relationships" xmlns:p="http://schemas.openxmlformats.org/presentationml/2006/main">
   <p:cSld>
     <p:spTree>
@@ -10481,7 +10640,7 @@
 </p:sld>
 </file>
 
-<file path=ppt/slides/slide44.xml><?xml version="1.0" encoding="utf-8"?>
+<file path=ppt/slides/slide45.xml><?xml version="1.0" encoding="utf-8"?>
 <p:sld xmlns:a="http://schemas.openxmlformats.org/drawingml/2006/main" xmlns:r="http://schemas.openxmlformats.org/officeDocument/2006/relationships" xmlns:p="http://schemas.openxmlformats.org/presentationml/2006/main">
   <p:cSld>
     <p:spTree>
@@ -10663,7 +10822,7 @@
 </p:sld>
 </file>
 
-<file path=ppt/slides/slide45.xml><?xml version="1.0" encoding="utf-8"?>
+<file path=ppt/slides/slide46.xml><?xml version="1.0" encoding="utf-8"?>
 <p:sld xmlns:a="http://schemas.openxmlformats.org/drawingml/2006/main" xmlns:r="http://schemas.openxmlformats.org/officeDocument/2006/relationships" xmlns:p="http://schemas.openxmlformats.org/presentationml/2006/main">
   <p:cSld>
     <p:spTree>
@@ -10784,7 +10943,7 @@
 </p:sld>
 </file>
 
-<file path=ppt/slides/slide46.xml><?xml version="1.0" encoding="utf-8"?>
+<file path=ppt/slides/slide47.xml><?xml version="1.0" encoding="utf-8"?>
 <p:sld xmlns:a="http://schemas.openxmlformats.org/drawingml/2006/main" xmlns:r="http://schemas.openxmlformats.org/officeDocument/2006/relationships" xmlns:p="http://schemas.openxmlformats.org/presentationml/2006/main">
   <p:cSld>
     <p:spTree>
